--- a/dokumentation/phase2.pptx
+++ b/dokumentation/phase2.pptx
@@ -5,7 +5,7 @@
     <p:sldMasterId id="2147483648" r:id="rId1"/>
   </p:sldMasterIdLst>
   <p:notesMasterIdLst>
-    <p:notesMasterId r:id="rId27"/>
+    <p:notesMasterId r:id="rId29"/>
   </p:notesMasterIdLst>
   <p:sldIdLst>
     <p:sldId id="256" r:id="rId2"/>
@@ -24,15 +24,17 @@
     <p:sldId id="275" r:id="rId15"/>
     <p:sldId id="276" r:id="rId16"/>
     <p:sldId id="277" r:id="rId17"/>
-    <p:sldId id="278" r:id="rId18"/>
-    <p:sldId id="279" r:id="rId19"/>
+    <p:sldId id="279" r:id="rId18"/>
+    <p:sldId id="278" r:id="rId19"/>
     <p:sldId id="280" r:id="rId20"/>
     <p:sldId id="262" r:id="rId21"/>
     <p:sldId id="267" r:id="rId22"/>
     <p:sldId id="266" r:id="rId23"/>
     <p:sldId id="268" r:id="rId24"/>
     <p:sldId id="283" r:id="rId25"/>
-    <p:sldId id="282" r:id="rId26"/>
+    <p:sldId id="286" r:id="rId26"/>
+    <p:sldId id="282" r:id="rId27"/>
+    <p:sldId id="285" r:id="rId28"/>
   </p:sldIdLst>
   <p:sldSz cx="12192000" cy="6858000"/>
   <p:notesSz cx="6858000" cy="9144000"/>
@@ -1350,7 +1352,7 @@
           <a:p>
             <a:fld id="{DFFA5C31-9359-4949-BED1-0133BA12B92D}" type="datetimeFigureOut">
               <a:rPr lang="de-DE" smtClean="0"/>
-              <a:t>31.05.2026</a:t>
+              <a:t>02.06.2026</a:t>
             </a:fld>
             <a:endParaRPr lang="de-DE"/>
           </a:p>
@@ -2586,7 +2588,7 @@
           <a:p>
             <a:fld id="{A67C030D-4A5A-4BC7-9A8A-8AA3566EE56A}" type="datetimeFigureOut">
               <a:rPr lang="de-DE" smtClean="0"/>
-              <a:t>31.05.2026</a:t>
+              <a:t>02.06.2026</a:t>
             </a:fld>
             <a:endParaRPr lang="de-DE"/>
           </a:p>
@@ -2901,7 +2903,7 @@
           <a:p>
             <a:fld id="{A67C030D-4A5A-4BC7-9A8A-8AA3566EE56A}" type="datetimeFigureOut">
               <a:rPr lang="de-DE" smtClean="0"/>
-              <a:t>31.05.2026</a:t>
+              <a:t>02.06.2026</a:t>
             </a:fld>
             <a:endParaRPr lang="de-DE"/>
           </a:p>
@@ -3124,7 +3126,7 @@
           <a:p>
             <a:fld id="{A67C030D-4A5A-4BC7-9A8A-8AA3566EE56A}" type="datetimeFigureOut">
               <a:rPr lang="de-DE" smtClean="0"/>
-              <a:t>31.05.2026</a:t>
+              <a:t>02.06.2026</a:t>
             </a:fld>
             <a:endParaRPr lang="de-DE"/>
           </a:p>
@@ -3356,7 +3358,7 @@
           <a:p>
             <a:fld id="{A67C030D-4A5A-4BC7-9A8A-8AA3566EE56A}" type="datetimeFigureOut">
               <a:rPr lang="de-DE" smtClean="0"/>
-              <a:t>31.05.2026</a:t>
+              <a:t>02.06.2026</a:t>
             </a:fld>
             <a:endParaRPr lang="de-DE"/>
           </a:p>
@@ -7189,6 +7191,57 @@
           </a:prstGeom>
         </p:spPr>
       </p:pic>
+      <p:sp>
+        <p:nvSpPr>
+          <p:cNvPr id="3" name="Textfeld 2">
+            <a:extLst>
+              <a:ext uri="{FF2B5EF4-FFF2-40B4-BE49-F238E27FC236}">
+                <a16:creationId xmlns:a16="http://schemas.microsoft.com/office/drawing/2014/main" id="{A87C2556-DEB1-C0D9-7E7F-EF013547331B}"/>
+              </a:ext>
+            </a:extLst>
+          </p:cNvPr>
+          <p:cNvSpPr txBox="1"/>
+          <p:nvPr/>
+        </p:nvSpPr>
+        <p:spPr>
+          <a:xfrm>
+            <a:off x="4442255" y="4349579"/>
+            <a:ext cx="2551670" cy="523220"/>
+          </a:xfrm>
+          <a:prstGeom prst="rect">
+            <a:avLst/>
+          </a:prstGeom>
+          <a:noFill/>
+        </p:spPr>
+        <p:txBody>
+          <a:bodyPr wrap="square" rtlCol="0">
+            <a:spAutoFit/>
+          </a:bodyPr>
+          <a:lstStyle/>
+          <a:p>
+            <a:pPr algn="ctr"/>
+            <a:r>
+              <a:rPr lang="de-DE" sz="1400" b="1" dirty="0">
+                <a:solidFill>
+                  <a:srgbClr val="4DFBFF"/>
+                </a:solidFill>
+              </a:rPr>
+              <a:t>Teilmenge,</a:t>
+            </a:r>
+          </a:p>
+          <a:p>
+            <a:pPr algn="ctr"/>
+            <a:r>
+              <a:rPr lang="de-DE" sz="1400" b="1" dirty="0">
+                <a:solidFill>
+                  <a:srgbClr val="4DFBFF"/>
+                </a:solidFill>
+              </a:rPr>
+              <a:t>insgesamt 25 Datensätze</a:t>
+            </a:r>
+          </a:p>
+        </p:txBody>
+      </p:sp>
     </p:spTree>
     <p:extLst>
       <p:ext uri="{BB962C8B-B14F-4D97-AF65-F5344CB8AC3E}">
@@ -9539,7 +9592,7 @@
         <p:spPr>
           <a:xfrm>
             <a:off x="331640" y="684640"/>
-            <a:ext cx="5168720" cy="3016210"/>
+            <a:ext cx="5168720" cy="3939540"/>
           </a:xfrm>
           <a:prstGeom prst="rect">
             <a:avLst/>
@@ -9983,7 +10036,7 @@
                   <a:srgbClr val="000000"/>
                 </a:solidFill>
               </a:rPr>
-              <a:t>SELECT </a:t>
+              <a:t>SELECT  </a:t>
             </a:r>
             <a:r>
               <a:rPr lang="de-DE" sz="1000" dirty="0" err="1">
@@ -9999,7 +10052,17 @@
                   <a:srgbClr val="000000"/>
                 </a:solidFill>
               </a:rPr>
-              <a:t>, </a:t>
+              <a:t>,</a:t>
+            </a:r>
+          </a:p>
+          <a:p>
+            <a:r>
+              <a:rPr lang="de-DE" sz="1000" dirty="0">
+                <a:solidFill>
+                  <a:srgbClr val="000000"/>
+                </a:solidFill>
+              </a:rPr>
+              <a:t>        </a:t>
             </a:r>
             <a:r>
               <a:rPr lang="de-DE" sz="1000" dirty="0" err="1">
@@ -10015,7 +10078,27 @@
                   <a:srgbClr val="000000"/>
                 </a:solidFill>
               </a:rPr>
-              <a:t>,       b1.titel AS original, b2.titel AS </a:t>
+              <a:t>,</a:t>
+            </a:r>
+          </a:p>
+          <a:p>
+            <a:r>
+              <a:rPr lang="de-DE" sz="1000" dirty="0">
+                <a:solidFill>
+                  <a:srgbClr val="000000"/>
+                </a:solidFill>
+              </a:rPr>
+              <a:t>        b1.titel    AS original,</a:t>
+            </a:r>
+          </a:p>
+          <a:p>
+            <a:r>
+              <a:rPr lang="de-DE" sz="1000" dirty="0">
+                <a:solidFill>
+                  <a:srgbClr val="000000"/>
+                </a:solidFill>
+              </a:rPr>
+              <a:t>        b2.titel    AS </a:t>
             </a:r>
             <a:r>
               <a:rPr lang="de-DE" sz="1000" dirty="0" err="1">
@@ -10031,7 +10114,17 @@
                   <a:srgbClr val="000000"/>
                 </a:solidFill>
               </a:rPr>
-              <a:t>,       </a:t>
+              <a:t>,</a:t>
+            </a:r>
+          </a:p>
+          <a:p>
+            <a:r>
+              <a:rPr lang="de-DE" sz="1000" dirty="0">
+                <a:solidFill>
+                  <a:srgbClr val="000000"/>
+                </a:solidFill>
+              </a:rPr>
+              <a:t>        </a:t>
             </a:r>
             <a:r>
               <a:rPr lang="de-DE" sz="1000" dirty="0" err="1">
@@ -10071,15 +10164,22 @@
                   <a:srgbClr val="000000"/>
                 </a:solidFill>
               </a:rPr>
-              <a:t>gemeldet_vonFROM</a:t>
-            </a:r>
-            <a:r>
-              <a:rPr lang="de-DE" sz="1000" dirty="0">
-                <a:solidFill>
-                  <a:srgbClr val="000000"/>
-                </a:solidFill>
-              </a:rPr>
-              <a:t> </a:t>
+              <a:t>gemeldet_von</a:t>
+            </a:r>
+            <a:endParaRPr lang="de-DE" sz="1000" dirty="0">
+              <a:solidFill>
+                <a:srgbClr val="000000"/>
+              </a:solidFill>
+            </a:endParaRPr>
+          </a:p>
+          <a:p>
+            <a:r>
+              <a:rPr lang="de-DE" sz="1000" dirty="0">
+                <a:solidFill>
+                  <a:srgbClr val="000000"/>
+                </a:solidFill>
+              </a:rPr>
+              <a:t>FROM    </a:t>
             </a:r>
             <a:r>
               <a:rPr lang="de-DE" sz="1000" dirty="0" err="1">
@@ -10095,7 +10195,17 @@
                   <a:srgbClr val="000000"/>
                 </a:solidFill>
               </a:rPr>
-              <a:t> </a:t>
+              <a:t> dm</a:t>
+            </a:r>
+          </a:p>
+          <a:p>
+            <a:r>
+              <a:rPr lang="de-DE" sz="1000" dirty="0">
+                <a:solidFill>
+                  <a:srgbClr val="000000"/>
+                </a:solidFill>
+              </a:rPr>
+              <a:t>JOIN    buch b1     ON b1.buch_id = </a:t>
             </a:r>
             <a:r>
               <a:rPr lang="de-DE" sz="1000" dirty="0" err="1">
@@ -10103,15 +10213,22 @@
                   <a:srgbClr val="000000"/>
                 </a:solidFill>
               </a:rPr>
-              <a:t>dmJOIN</a:t>
-            </a:r>
-            <a:r>
-              <a:rPr lang="de-DE" sz="1000" dirty="0">
-                <a:solidFill>
-                  <a:srgbClr val="000000"/>
-                </a:solidFill>
-              </a:rPr>
-              <a:t> buch b1 ON b1.buch_id = </a:t>
+              <a:t>dm.buch_id_original</a:t>
+            </a:r>
+            <a:endParaRPr lang="de-DE" sz="1000" dirty="0">
+              <a:solidFill>
+                <a:srgbClr val="000000"/>
+              </a:solidFill>
+            </a:endParaRPr>
+          </a:p>
+          <a:p>
+            <a:r>
+              <a:rPr lang="de-DE" sz="1000" dirty="0">
+                <a:solidFill>
+                  <a:srgbClr val="000000"/>
+                </a:solidFill>
+              </a:rPr>
+              <a:t>JOIN    buch b2     ON b2.buch_id = </a:t>
             </a:r>
             <a:r>
               <a:rPr lang="de-DE" sz="1000" dirty="0" err="1">
@@ -10119,15 +10236,22 @@
                   <a:srgbClr val="000000"/>
                 </a:solidFill>
               </a:rPr>
-              <a:t>dm.buch_id_originalJOIN</a:t>
-            </a:r>
-            <a:r>
-              <a:rPr lang="de-DE" sz="1000" dirty="0">
-                <a:solidFill>
-                  <a:srgbClr val="000000"/>
-                </a:solidFill>
-              </a:rPr>
-              <a:t> buch b2 ON b2.buch_id = </a:t>
+              <a:t>dm.buch_id_duplikat</a:t>
+            </a:r>
+            <a:endParaRPr lang="de-DE" sz="1000" dirty="0">
+              <a:solidFill>
+                <a:srgbClr val="000000"/>
+              </a:solidFill>
+            </a:endParaRPr>
+          </a:p>
+          <a:p>
+            <a:r>
+              <a:rPr lang="de-DE" sz="1000" dirty="0">
+                <a:solidFill>
+                  <a:srgbClr val="000000"/>
+                </a:solidFill>
+              </a:rPr>
+              <a:t>JOIN    </a:t>
             </a:r>
             <a:r>
               <a:rPr lang="de-DE" sz="1000" dirty="0" err="1">
@@ -10135,15 +10259,15 @@
                   <a:srgbClr val="000000"/>
                 </a:solidFill>
               </a:rPr>
-              <a:t>dm.buch_id_duplikatJOIN</a:t>
-            </a:r>
-            <a:r>
-              <a:rPr lang="de-DE" sz="1000" dirty="0">
-                <a:solidFill>
-                  <a:srgbClr val="000000"/>
-                </a:solidFill>
-              </a:rPr>
-              <a:t> </a:t>
+              <a:t>nutzer</a:t>
+            </a:r>
+            <a:r>
+              <a:rPr lang="de-DE" sz="1000" dirty="0">
+                <a:solidFill>
+                  <a:srgbClr val="000000"/>
+                </a:solidFill>
+              </a:rPr>
+              <a:t> n    ON </a:t>
             </a:r>
             <a:r>
               <a:rPr lang="de-DE" sz="1000" dirty="0" err="1">
@@ -10151,15 +10275,15 @@
                   <a:srgbClr val="000000"/>
                 </a:solidFill>
               </a:rPr>
-              <a:t>nutzer</a:t>
-            </a:r>
-            <a:r>
-              <a:rPr lang="de-DE" sz="1000" dirty="0">
-                <a:solidFill>
-                  <a:srgbClr val="000000"/>
-                </a:solidFill>
-              </a:rPr>
-              <a:t> n ON </a:t>
+              <a:t>n.nutzer_id</a:t>
+            </a:r>
+            <a:r>
+              <a:rPr lang="de-DE" sz="1000" dirty="0">
+                <a:solidFill>
+                  <a:srgbClr val="000000"/>
+                </a:solidFill>
+              </a:rPr>
+              <a:t> = </a:t>
             </a:r>
             <a:r>
               <a:rPr lang="de-DE" sz="1000" dirty="0" err="1">
@@ -10167,15 +10291,22 @@
                   <a:srgbClr val="000000"/>
                 </a:solidFill>
               </a:rPr>
-              <a:t>n.nutzer_id</a:t>
-            </a:r>
-            <a:r>
-              <a:rPr lang="de-DE" sz="1000" dirty="0">
-                <a:solidFill>
-                  <a:srgbClr val="000000"/>
-                </a:solidFill>
-              </a:rPr>
-              <a:t> = </a:t>
+              <a:t>dm.melder_id</a:t>
+            </a:r>
+            <a:endParaRPr lang="de-DE" sz="1000" dirty="0">
+              <a:solidFill>
+                <a:srgbClr val="000000"/>
+              </a:solidFill>
+            </a:endParaRPr>
+          </a:p>
+          <a:p>
+            <a:r>
+              <a:rPr lang="de-DE" sz="1000" dirty="0">
+                <a:solidFill>
+                  <a:srgbClr val="000000"/>
+                </a:solidFill>
+              </a:rPr>
+              <a:t>WHERE   </a:t>
             </a:r>
             <a:r>
               <a:rPr lang="de-DE" sz="1000" dirty="0" err="1">
@@ -10183,22 +10314,6 @@
                   <a:srgbClr val="000000"/>
                 </a:solidFill>
               </a:rPr>
-              <a:t>dm.melder_idWHERE</a:t>
-            </a:r>
-            <a:r>
-              <a:rPr lang="de-DE" sz="1000" dirty="0">
-                <a:solidFill>
-                  <a:srgbClr val="000000"/>
-                </a:solidFill>
-              </a:rPr>
-              <a:t> </a:t>
-            </a:r>
-            <a:r>
-              <a:rPr lang="de-DE" sz="1000" dirty="0" err="1">
-                <a:solidFill>
-                  <a:srgbClr val="000000"/>
-                </a:solidFill>
-              </a:rPr>
               <a:t>dm.status</a:t>
             </a:r>
             <a:r>
@@ -10207,7 +10322,17 @@
                   <a:srgbClr val="000000"/>
                 </a:solidFill>
               </a:rPr>
-              <a:t> = 'OFFEN'ORDER BY </a:t>
+              <a:t> = 'OFFEN'</a:t>
+            </a:r>
+          </a:p>
+          <a:p>
+            <a:r>
+              <a:rPr lang="de-DE" sz="1000" dirty="0">
+                <a:solidFill>
+                  <a:srgbClr val="000000"/>
+                </a:solidFill>
+              </a:rPr>
+              <a:t>ORDER BY </a:t>
             </a:r>
             <a:r>
               <a:rPr lang="de-DE" sz="1000" dirty="0" err="1">
@@ -10766,7 +10891,7 @@
         </p:nvSpPr>
         <p:spPr>
           <a:xfrm rot="1916152">
-            <a:off x="1727846" y="4085834"/>
+            <a:off x="2267894" y="4539583"/>
             <a:ext cx="644375" cy="503227"/>
           </a:xfrm>
           <a:prstGeom prst="rightArrow">
@@ -10826,7 +10951,7 @@
         </p:blipFill>
         <p:spPr>
           <a:xfrm>
-            <a:off x="2549103" y="4438619"/>
+            <a:off x="2882735" y="5322335"/>
             <a:ext cx="6426530" cy="1162110"/>
           </a:xfrm>
           <a:prstGeom prst="rect">
@@ -10953,7 +11078,7 @@
         <p:spPr>
           <a:xfrm>
             <a:off x="331640" y="684640"/>
-            <a:ext cx="5168720" cy="246221"/>
+            <a:ext cx="5168720" cy="4093428"/>
           </a:xfrm>
           <a:prstGeom prst="rect">
             <a:avLst/>
@@ -10970,18 +11095,878 @@
           <a:lstStyle/>
           <a:p>
             <a:r>
-              <a:rPr lang="en-US" sz="1000">
-                <a:solidFill>
-                  <a:srgbClr val="000000"/>
-                </a:solidFill>
-              </a:rPr>
-              <a:t>CREATE SEQUENCE seq_exemplar START WITH 1000 INCREMENT BY 1 NOCACHE;</a:t>
-            </a:r>
+              <a:rPr lang="en-US" sz="1000" dirty="0">
+                <a:solidFill>
+                  <a:srgbClr val="000000"/>
+                </a:solidFill>
+              </a:rPr>
+              <a:t>CREATE SEQUENCE </a:t>
+            </a:r>
+            <a:r>
+              <a:rPr lang="en-US" sz="1000" dirty="0" err="1">
+                <a:solidFill>
+                  <a:srgbClr val="000000"/>
+                </a:solidFill>
+              </a:rPr>
+              <a:t>seq_exemplar</a:t>
+            </a:r>
+            <a:r>
+              <a:rPr lang="en-US" sz="1000" dirty="0">
+                <a:solidFill>
+                  <a:srgbClr val="000000"/>
+                </a:solidFill>
+              </a:rPr>
+              <a:t> START WITH 1000 INCREMENT BY 1 NOCACHE;</a:t>
+            </a:r>
+          </a:p>
+          <a:p>
+            <a:endParaRPr lang="en-US" sz="1000" dirty="0">
+              <a:solidFill>
+                <a:srgbClr val="000000"/>
+              </a:solidFill>
+            </a:endParaRPr>
+          </a:p>
+          <a:p>
+            <a:r>
+              <a:rPr lang="de-DE" sz="1000" dirty="0">
+                <a:solidFill>
+                  <a:srgbClr val="000000"/>
+                </a:solidFill>
+              </a:rPr>
+              <a:t>CREATE TABLE </a:t>
+            </a:r>
+            <a:r>
+              <a:rPr lang="de-DE" sz="1000" dirty="0" err="1">
+                <a:solidFill>
+                  <a:srgbClr val="000000"/>
+                </a:solidFill>
+              </a:rPr>
+              <a:t>exemplar</a:t>
+            </a:r>
+            <a:r>
+              <a:rPr lang="de-DE" sz="1000" dirty="0">
+                <a:solidFill>
+                  <a:srgbClr val="000000"/>
+                </a:solidFill>
+              </a:rPr>
+              <a:t> (</a:t>
+            </a:r>
+          </a:p>
+          <a:p>
+            <a:r>
+              <a:rPr lang="de-DE" sz="1000" dirty="0">
+                <a:solidFill>
+                  <a:srgbClr val="000000"/>
+                </a:solidFill>
+              </a:rPr>
+              <a:t>    </a:t>
+            </a:r>
+            <a:r>
+              <a:rPr lang="de-DE" sz="1000" dirty="0" err="1">
+                <a:solidFill>
+                  <a:srgbClr val="000000"/>
+                </a:solidFill>
+              </a:rPr>
+              <a:t>exemplar_id</a:t>
+            </a:r>
+            <a:r>
+              <a:rPr lang="de-DE" sz="1000" dirty="0">
+                <a:solidFill>
+                  <a:srgbClr val="000000"/>
+                </a:solidFill>
+              </a:rPr>
+              <a:t>             NUMBER          DEFAULT </a:t>
+            </a:r>
+            <a:r>
+              <a:rPr lang="de-DE" sz="1000" dirty="0" err="1">
+                <a:solidFill>
+                  <a:srgbClr val="000000"/>
+                </a:solidFill>
+              </a:rPr>
+              <a:t>seq_exemplar.NEXTVAL</a:t>
+            </a:r>
+            <a:r>
+              <a:rPr lang="de-DE" sz="1000" dirty="0">
+                <a:solidFill>
+                  <a:srgbClr val="000000"/>
+                </a:solidFill>
+              </a:rPr>
+              <a:t> PRIMARY KEY,</a:t>
+            </a:r>
+          </a:p>
+          <a:p>
+            <a:r>
+              <a:rPr lang="de-DE" sz="1000" dirty="0">
+                <a:solidFill>
+                  <a:srgbClr val="000000"/>
+                </a:solidFill>
+              </a:rPr>
+              <a:t>    </a:t>
+            </a:r>
+            <a:r>
+              <a:rPr lang="de-DE" sz="1000" dirty="0" err="1">
+                <a:solidFill>
+                  <a:srgbClr val="000000"/>
+                </a:solidFill>
+              </a:rPr>
+              <a:t>buch_id</a:t>
+            </a:r>
+            <a:r>
+              <a:rPr lang="de-DE" sz="1000" dirty="0">
+                <a:solidFill>
+                  <a:srgbClr val="000000"/>
+                </a:solidFill>
+              </a:rPr>
+              <a:t>                 NUMBER          NOT NULL REFERENCES buch(</a:t>
+            </a:r>
+            <a:r>
+              <a:rPr lang="de-DE" sz="1000" dirty="0" err="1">
+                <a:solidFill>
+                  <a:srgbClr val="000000"/>
+                </a:solidFill>
+              </a:rPr>
+              <a:t>buch_id</a:t>
+            </a:r>
+            <a:r>
+              <a:rPr lang="de-DE" sz="1000" dirty="0">
+                <a:solidFill>
+                  <a:srgbClr val="000000"/>
+                </a:solidFill>
+              </a:rPr>
+              <a:t>),</a:t>
+            </a:r>
+          </a:p>
+          <a:p>
+            <a:r>
+              <a:rPr lang="de-DE" sz="1000" dirty="0">
+                <a:solidFill>
+                  <a:srgbClr val="000000"/>
+                </a:solidFill>
+              </a:rPr>
+              <a:t>    </a:t>
+            </a:r>
+            <a:r>
+              <a:rPr lang="de-DE" sz="1000" dirty="0" err="1">
+                <a:solidFill>
+                  <a:srgbClr val="000000"/>
+                </a:solidFill>
+              </a:rPr>
+              <a:t>besitzer_id</a:t>
+            </a:r>
+            <a:r>
+              <a:rPr lang="de-DE" sz="1000" dirty="0">
+                <a:solidFill>
+                  <a:srgbClr val="000000"/>
+                </a:solidFill>
+              </a:rPr>
+              <a:t>             NUMBER          NOT NULL REFERENCES </a:t>
+            </a:r>
+            <a:r>
+              <a:rPr lang="de-DE" sz="1000" dirty="0" err="1">
+                <a:solidFill>
+                  <a:srgbClr val="000000"/>
+                </a:solidFill>
+              </a:rPr>
+              <a:t>nutzer</a:t>
+            </a:r>
+            <a:r>
+              <a:rPr lang="de-DE" sz="1000" dirty="0">
+                <a:solidFill>
+                  <a:srgbClr val="000000"/>
+                </a:solidFill>
+              </a:rPr>
+              <a:t>(</a:t>
+            </a:r>
+            <a:r>
+              <a:rPr lang="de-DE" sz="1000" dirty="0" err="1">
+                <a:solidFill>
+                  <a:srgbClr val="000000"/>
+                </a:solidFill>
+              </a:rPr>
+              <a:t>nutzer_id</a:t>
+            </a:r>
+            <a:r>
+              <a:rPr lang="de-DE" sz="1000" dirty="0">
+                <a:solidFill>
+                  <a:srgbClr val="000000"/>
+                </a:solidFill>
+              </a:rPr>
+              <a:t>),</a:t>
+            </a:r>
+          </a:p>
+          <a:p>
+            <a:r>
+              <a:rPr lang="de-DE" sz="1000" dirty="0">
+                <a:solidFill>
+                  <a:srgbClr val="000000"/>
+                </a:solidFill>
+              </a:rPr>
+              <a:t>    </a:t>
+            </a:r>
+            <a:r>
+              <a:rPr lang="de-DE" sz="1000" dirty="0" err="1">
+                <a:solidFill>
+                  <a:srgbClr val="000000"/>
+                </a:solidFill>
+              </a:rPr>
+              <a:t>abholort_id</a:t>
+            </a:r>
+            <a:r>
+              <a:rPr lang="de-DE" sz="1000" dirty="0">
+                <a:solidFill>
+                  <a:srgbClr val="000000"/>
+                </a:solidFill>
+              </a:rPr>
+              <a:t>             NUMBER          REFERENCES </a:t>
+            </a:r>
+            <a:r>
+              <a:rPr lang="de-DE" sz="1000" dirty="0" err="1">
+                <a:solidFill>
+                  <a:srgbClr val="000000"/>
+                </a:solidFill>
+              </a:rPr>
+              <a:t>adresse</a:t>
+            </a:r>
+            <a:r>
+              <a:rPr lang="de-DE" sz="1000" dirty="0">
+                <a:solidFill>
+                  <a:srgbClr val="000000"/>
+                </a:solidFill>
+              </a:rPr>
+              <a:t>(</a:t>
+            </a:r>
+            <a:r>
+              <a:rPr lang="de-DE" sz="1000" dirty="0" err="1">
+                <a:solidFill>
+                  <a:srgbClr val="000000"/>
+                </a:solidFill>
+              </a:rPr>
+              <a:t>adresse_id</a:t>
+            </a:r>
+            <a:r>
+              <a:rPr lang="de-DE" sz="1000" dirty="0">
+                <a:solidFill>
+                  <a:srgbClr val="000000"/>
+                </a:solidFill>
+              </a:rPr>
+              <a:t>),</a:t>
+            </a:r>
+          </a:p>
+          <a:p>
+            <a:r>
+              <a:rPr lang="de-DE" sz="1000" dirty="0">
+                <a:solidFill>
+                  <a:srgbClr val="000000"/>
+                </a:solidFill>
+              </a:rPr>
+              <a:t>    zustand                 VARCHAR2(20)    NOT NULL CHECK (zustand IN ('NEU','GUT','AKZEPTABEL','SCHLECHT')),</a:t>
+            </a:r>
+          </a:p>
+          <a:p>
+            <a:r>
+              <a:rPr lang="de-DE" sz="1000" dirty="0">
+                <a:solidFill>
+                  <a:srgbClr val="000000"/>
+                </a:solidFill>
+              </a:rPr>
+              <a:t>    </a:t>
+            </a:r>
+            <a:r>
+              <a:rPr lang="de-DE" sz="1000" dirty="0" err="1">
+                <a:solidFill>
+                  <a:srgbClr val="000000"/>
+                </a:solidFill>
+              </a:rPr>
+              <a:t>bemerkung</a:t>
+            </a:r>
+            <a:r>
+              <a:rPr lang="de-DE" sz="1000" dirty="0">
+                <a:solidFill>
+                  <a:srgbClr val="000000"/>
+                </a:solidFill>
+              </a:rPr>
+              <a:t>               VARCHAR2(1000),</a:t>
+            </a:r>
+          </a:p>
+          <a:p>
+            <a:r>
+              <a:rPr lang="de-DE" sz="1000" dirty="0">
+                <a:solidFill>
+                  <a:srgbClr val="000000"/>
+                </a:solidFill>
+              </a:rPr>
+              <a:t>    gesperrt                NUMBER(1)       DEFAULT 0 NOT NULL CHECK (gesperrt IN (0,1)),</a:t>
+            </a:r>
+          </a:p>
+          <a:p>
+            <a:r>
+              <a:rPr lang="de-DE" sz="1000" dirty="0">
+                <a:solidFill>
+                  <a:srgbClr val="000000"/>
+                </a:solidFill>
+              </a:rPr>
+              <a:t>    </a:t>
+            </a:r>
+            <a:r>
+              <a:rPr lang="de-DE" sz="1000" dirty="0" err="1">
+                <a:solidFill>
+                  <a:srgbClr val="000000"/>
+                </a:solidFill>
+              </a:rPr>
+              <a:t>postversand_moeglich</a:t>
+            </a:r>
+            <a:r>
+              <a:rPr lang="de-DE" sz="1000" dirty="0">
+                <a:solidFill>
+                  <a:srgbClr val="000000"/>
+                </a:solidFill>
+              </a:rPr>
+              <a:t>    NUMBER(1)       DEFAULT 0 NOT NULL CHECK (</a:t>
+            </a:r>
+            <a:r>
+              <a:rPr lang="de-DE" sz="1000" dirty="0" err="1">
+                <a:solidFill>
+                  <a:srgbClr val="000000"/>
+                </a:solidFill>
+              </a:rPr>
+              <a:t>postversand_moeglich</a:t>
+            </a:r>
+            <a:r>
+              <a:rPr lang="de-DE" sz="1000" dirty="0">
+                <a:solidFill>
+                  <a:srgbClr val="000000"/>
+                </a:solidFill>
+              </a:rPr>
+              <a:t> IN (0,1)),</a:t>
+            </a:r>
+          </a:p>
+          <a:p>
+            <a:r>
+              <a:rPr lang="de-DE" sz="1000" dirty="0">
+                <a:solidFill>
+                  <a:srgbClr val="000000"/>
+                </a:solidFill>
+              </a:rPr>
+              <a:t>    </a:t>
+            </a:r>
+            <a:r>
+              <a:rPr lang="de-DE" sz="1000" dirty="0" err="1">
+                <a:solidFill>
+                  <a:srgbClr val="000000"/>
+                </a:solidFill>
+              </a:rPr>
+              <a:t>max_leihdauer_tage</a:t>
+            </a:r>
+            <a:r>
+              <a:rPr lang="de-DE" sz="1000" dirty="0">
+                <a:solidFill>
+                  <a:srgbClr val="000000"/>
+                </a:solidFill>
+              </a:rPr>
+              <a:t>      NUMBER(3),</a:t>
+            </a:r>
+          </a:p>
+          <a:p>
+            <a:r>
+              <a:rPr lang="de-DE" sz="1000" dirty="0">
+                <a:solidFill>
+                  <a:srgbClr val="000000"/>
+                </a:solidFill>
+              </a:rPr>
+              <a:t>    </a:t>
+            </a:r>
+            <a:r>
+              <a:rPr lang="de-DE" sz="1000" dirty="0" err="1">
+                <a:solidFill>
+                  <a:srgbClr val="000000"/>
+                </a:solidFill>
+              </a:rPr>
+              <a:t>created_at</a:t>
+            </a:r>
+            <a:r>
+              <a:rPr lang="de-DE" sz="1000" dirty="0">
+                <a:solidFill>
+                  <a:srgbClr val="000000"/>
+                </a:solidFill>
+              </a:rPr>
+              <a:t>              DATE            DEFAULT SYSDATE NOT NULL</a:t>
+            </a:r>
+          </a:p>
+          <a:p>
+            <a:r>
+              <a:rPr lang="de-DE" sz="1000" dirty="0">
+                <a:solidFill>
+                  <a:srgbClr val="000000"/>
+                </a:solidFill>
+              </a:rPr>
+              <a:t>);</a:t>
+            </a:r>
+          </a:p>
+          <a:p>
             <a:endParaRPr lang="de-DE" sz="1000" dirty="0">
               <a:solidFill>
                 <a:srgbClr val="000000"/>
               </a:solidFill>
             </a:endParaRPr>
+          </a:p>
+          <a:p>
+            <a:r>
+              <a:rPr lang="de-DE" sz="1000" dirty="0">
+                <a:solidFill>
+                  <a:srgbClr val="000000"/>
+                </a:solidFill>
+              </a:rPr>
+              <a:t>SELECT </a:t>
+            </a:r>
+            <a:r>
+              <a:rPr lang="de-DE" sz="1000" dirty="0" err="1">
+                <a:solidFill>
+                  <a:srgbClr val="000000"/>
+                </a:solidFill>
+              </a:rPr>
+              <a:t>b.titel</a:t>
+            </a:r>
+            <a:r>
+              <a:rPr lang="de-DE" sz="1000" dirty="0">
+                <a:solidFill>
+                  <a:srgbClr val="000000"/>
+                </a:solidFill>
+              </a:rPr>
+              <a:t>, </a:t>
+            </a:r>
+            <a:r>
+              <a:rPr lang="de-DE" sz="1000" dirty="0" err="1">
+                <a:solidFill>
+                  <a:srgbClr val="000000"/>
+                </a:solidFill>
+              </a:rPr>
+              <a:t>u.vorname</a:t>
+            </a:r>
+            <a:r>
+              <a:rPr lang="de-DE" sz="1000" dirty="0">
+                <a:solidFill>
+                  <a:srgbClr val="000000"/>
+                </a:solidFill>
+              </a:rPr>
+              <a:t>, </a:t>
+            </a:r>
+            <a:r>
+              <a:rPr lang="de-DE" sz="1000" dirty="0" err="1">
+                <a:solidFill>
+                  <a:srgbClr val="000000"/>
+                </a:solidFill>
+              </a:rPr>
+              <a:t>u.nachname</a:t>
+            </a:r>
+            <a:r>
+              <a:rPr lang="de-DE" sz="1000" dirty="0">
+                <a:solidFill>
+                  <a:srgbClr val="000000"/>
+                </a:solidFill>
+              </a:rPr>
+              <a:t>, </a:t>
+            </a:r>
+            <a:r>
+              <a:rPr lang="de-DE" sz="1000" dirty="0" err="1">
+                <a:solidFill>
+                  <a:srgbClr val="000000"/>
+                </a:solidFill>
+              </a:rPr>
+              <a:t>e.max_leihdauer_tage</a:t>
+            </a:r>
+            <a:r>
+              <a:rPr lang="de-DE" sz="1000" dirty="0">
+                <a:solidFill>
+                  <a:srgbClr val="000000"/>
+                </a:solidFill>
+              </a:rPr>
+              <a:t>, </a:t>
+            </a:r>
+            <a:r>
+              <a:rPr lang="de-DE" sz="1000" dirty="0" err="1">
+                <a:solidFill>
+                  <a:srgbClr val="000000"/>
+                </a:solidFill>
+              </a:rPr>
+              <a:t>e.zustand</a:t>
+            </a:r>
+            <a:endParaRPr lang="de-DE" sz="1000" dirty="0">
+              <a:solidFill>
+                <a:srgbClr val="000000"/>
+              </a:solidFill>
+            </a:endParaRPr>
+          </a:p>
+          <a:p>
+            <a:r>
+              <a:rPr lang="de-DE" sz="1000" dirty="0">
+                <a:solidFill>
+                  <a:srgbClr val="000000"/>
+                </a:solidFill>
+              </a:rPr>
+              <a:t>FROM </a:t>
+            </a:r>
+            <a:r>
+              <a:rPr lang="de-DE" sz="1000" dirty="0" err="1">
+                <a:solidFill>
+                  <a:srgbClr val="000000"/>
+                </a:solidFill>
+              </a:rPr>
+              <a:t>exemplar</a:t>
+            </a:r>
+            <a:r>
+              <a:rPr lang="de-DE" sz="1000" dirty="0">
+                <a:solidFill>
+                  <a:srgbClr val="000000"/>
+                </a:solidFill>
+              </a:rPr>
+              <a:t> e</a:t>
+            </a:r>
+          </a:p>
+          <a:p>
+            <a:r>
+              <a:rPr lang="de-DE" sz="1000" dirty="0">
+                <a:solidFill>
+                  <a:srgbClr val="000000"/>
+                </a:solidFill>
+              </a:rPr>
+              <a:t>JOIN buch b ON </a:t>
+            </a:r>
+            <a:r>
+              <a:rPr lang="de-DE" sz="1000" dirty="0" err="1">
+                <a:solidFill>
+                  <a:srgbClr val="000000"/>
+                </a:solidFill>
+              </a:rPr>
+              <a:t>b.buch_id</a:t>
+            </a:r>
+            <a:r>
+              <a:rPr lang="de-DE" sz="1000" dirty="0">
+                <a:solidFill>
+                  <a:srgbClr val="000000"/>
+                </a:solidFill>
+              </a:rPr>
+              <a:t> = </a:t>
+            </a:r>
+            <a:r>
+              <a:rPr lang="de-DE" sz="1000" dirty="0" err="1">
+                <a:solidFill>
+                  <a:srgbClr val="000000"/>
+                </a:solidFill>
+              </a:rPr>
+              <a:t>e.buch_id</a:t>
+            </a:r>
+            <a:endParaRPr lang="de-DE" sz="1000" dirty="0">
+              <a:solidFill>
+                <a:srgbClr val="000000"/>
+              </a:solidFill>
+            </a:endParaRPr>
+          </a:p>
+          <a:p>
+            <a:r>
+              <a:rPr lang="de-DE" sz="1000" dirty="0">
+                <a:solidFill>
+                  <a:srgbClr val="000000"/>
+                </a:solidFill>
+              </a:rPr>
+              <a:t>JOIN </a:t>
+            </a:r>
+            <a:r>
+              <a:rPr lang="de-DE" sz="1000" dirty="0" err="1">
+                <a:solidFill>
+                  <a:srgbClr val="000000"/>
+                </a:solidFill>
+              </a:rPr>
+              <a:t>buch_genre</a:t>
+            </a:r>
+            <a:r>
+              <a:rPr lang="de-DE" sz="1000" dirty="0">
+                <a:solidFill>
+                  <a:srgbClr val="000000"/>
+                </a:solidFill>
+              </a:rPr>
+              <a:t> </a:t>
+            </a:r>
+            <a:r>
+              <a:rPr lang="de-DE" sz="1000" dirty="0" err="1">
+                <a:solidFill>
+                  <a:srgbClr val="000000"/>
+                </a:solidFill>
+              </a:rPr>
+              <a:t>bg</a:t>
+            </a:r>
+            <a:r>
+              <a:rPr lang="de-DE" sz="1000" dirty="0">
+                <a:solidFill>
+                  <a:srgbClr val="000000"/>
+                </a:solidFill>
+              </a:rPr>
+              <a:t> ON </a:t>
+            </a:r>
+            <a:r>
+              <a:rPr lang="de-DE" sz="1000" dirty="0" err="1">
+                <a:solidFill>
+                  <a:srgbClr val="000000"/>
+                </a:solidFill>
+              </a:rPr>
+              <a:t>bg.buch_id</a:t>
+            </a:r>
+            <a:r>
+              <a:rPr lang="de-DE" sz="1000" dirty="0">
+                <a:solidFill>
+                  <a:srgbClr val="000000"/>
+                </a:solidFill>
+              </a:rPr>
+              <a:t> = </a:t>
+            </a:r>
+            <a:r>
+              <a:rPr lang="de-DE" sz="1000" dirty="0" err="1">
+                <a:solidFill>
+                  <a:srgbClr val="000000"/>
+                </a:solidFill>
+              </a:rPr>
+              <a:t>b.buch_id</a:t>
+            </a:r>
+            <a:endParaRPr lang="de-DE" sz="1000" dirty="0">
+              <a:solidFill>
+                <a:srgbClr val="000000"/>
+              </a:solidFill>
+            </a:endParaRPr>
+          </a:p>
+          <a:p>
+            <a:r>
+              <a:rPr lang="de-DE" sz="1000" dirty="0">
+                <a:solidFill>
+                  <a:srgbClr val="000000"/>
+                </a:solidFill>
+              </a:rPr>
+              <a:t>JOIN </a:t>
+            </a:r>
+            <a:r>
+              <a:rPr lang="de-DE" sz="1000" dirty="0" err="1">
+                <a:solidFill>
+                  <a:srgbClr val="000000"/>
+                </a:solidFill>
+              </a:rPr>
+              <a:t>genre</a:t>
+            </a:r>
+            <a:r>
+              <a:rPr lang="de-DE" sz="1000" dirty="0">
+                <a:solidFill>
+                  <a:srgbClr val="000000"/>
+                </a:solidFill>
+              </a:rPr>
+              <a:t> g ON </a:t>
+            </a:r>
+            <a:r>
+              <a:rPr lang="de-DE" sz="1000" dirty="0" err="1">
+                <a:solidFill>
+                  <a:srgbClr val="000000"/>
+                </a:solidFill>
+              </a:rPr>
+              <a:t>g.genre_id</a:t>
+            </a:r>
+            <a:r>
+              <a:rPr lang="de-DE" sz="1000" dirty="0">
+                <a:solidFill>
+                  <a:srgbClr val="000000"/>
+                </a:solidFill>
+              </a:rPr>
+              <a:t> = </a:t>
+            </a:r>
+            <a:r>
+              <a:rPr lang="de-DE" sz="1000" dirty="0" err="1">
+                <a:solidFill>
+                  <a:srgbClr val="000000"/>
+                </a:solidFill>
+              </a:rPr>
+              <a:t>bg.genre_id</a:t>
+            </a:r>
+            <a:endParaRPr lang="de-DE" sz="1000" dirty="0">
+              <a:solidFill>
+                <a:srgbClr val="000000"/>
+              </a:solidFill>
+            </a:endParaRPr>
+          </a:p>
+          <a:p>
+            <a:r>
+              <a:rPr lang="de-DE" sz="1000" dirty="0">
+                <a:solidFill>
+                  <a:srgbClr val="000000"/>
+                </a:solidFill>
+              </a:rPr>
+              <a:t>JOIN </a:t>
+            </a:r>
+            <a:r>
+              <a:rPr lang="de-DE" sz="1000" dirty="0" err="1">
+                <a:solidFill>
+                  <a:srgbClr val="000000"/>
+                </a:solidFill>
+              </a:rPr>
+              <a:t>nutzer</a:t>
+            </a:r>
+            <a:r>
+              <a:rPr lang="de-DE" sz="1000" dirty="0">
+                <a:solidFill>
+                  <a:srgbClr val="000000"/>
+                </a:solidFill>
+              </a:rPr>
+              <a:t> u ON </a:t>
+            </a:r>
+            <a:r>
+              <a:rPr lang="de-DE" sz="1000" dirty="0" err="1">
+                <a:solidFill>
+                  <a:srgbClr val="000000"/>
+                </a:solidFill>
+              </a:rPr>
+              <a:t>u.nutzer_id</a:t>
+            </a:r>
+            <a:r>
+              <a:rPr lang="de-DE" sz="1000" dirty="0">
+                <a:solidFill>
+                  <a:srgbClr val="000000"/>
+                </a:solidFill>
+              </a:rPr>
+              <a:t> = </a:t>
+            </a:r>
+            <a:r>
+              <a:rPr lang="de-DE" sz="1000" dirty="0" err="1">
+                <a:solidFill>
+                  <a:srgbClr val="000000"/>
+                </a:solidFill>
+              </a:rPr>
+              <a:t>e.besitzer_id</a:t>
+            </a:r>
+            <a:endParaRPr lang="de-DE" sz="1000" dirty="0">
+              <a:solidFill>
+                <a:srgbClr val="000000"/>
+              </a:solidFill>
+            </a:endParaRPr>
+          </a:p>
+          <a:p>
+            <a:r>
+              <a:rPr lang="de-DE" sz="1000" dirty="0">
+                <a:solidFill>
+                  <a:srgbClr val="000000"/>
+                </a:solidFill>
+              </a:rPr>
+              <a:t>WHERE </a:t>
+            </a:r>
+            <a:r>
+              <a:rPr lang="de-DE" sz="1000" dirty="0" err="1">
+                <a:solidFill>
+                  <a:srgbClr val="000000"/>
+                </a:solidFill>
+              </a:rPr>
+              <a:t>g.bezeichnung</a:t>
+            </a:r>
+            <a:r>
+              <a:rPr lang="de-DE" sz="1000" dirty="0">
+                <a:solidFill>
+                  <a:srgbClr val="000000"/>
+                </a:solidFill>
+              </a:rPr>
+              <a:t> = '</a:t>
+            </a:r>
+            <a:r>
+              <a:rPr lang="de-DE" sz="1000" dirty="0" err="1">
+                <a:solidFill>
+                  <a:srgbClr val="000000"/>
+                </a:solidFill>
+              </a:rPr>
+              <a:t>Romance</a:t>
+            </a:r>
+            <a:r>
+              <a:rPr lang="de-DE" sz="1000" dirty="0">
+                <a:solidFill>
+                  <a:srgbClr val="000000"/>
+                </a:solidFill>
+              </a:rPr>
+              <a:t>'</a:t>
+            </a:r>
+          </a:p>
+          <a:p>
+            <a:r>
+              <a:rPr lang="de-DE" sz="1000" dirty="0">
+                <a:solidFill>
+                  <a:srgbClr val="000000"/>
+                </a:solidFill>
+              </a:rPr>
+              <a:t>AND </a:t>
+            </a:r>
+            <a:r>
+              <a:rPr lang="de-DE" sz="1000" dirty="0" err="1">
+                <a:solidFill>
+                  <a:srgbClr val="000000"/>
+                </a:solidFill>
+              </a:rPr>
+              <a:t>e.postversand_moeglich</a:t>
+            </a:r>
+            <a:r>
+              <a:rPr lang="de-DE" sz="1000" dirty="0">
+                <a:solidFill>
+                  <a:srgbClr val="000000"/>
+                </a:solidFill>
+              </a:rPr>
+              <a:t> = 1</a:t>
+            </a:r>
+          </a:p>
+          <a:p>
+            <a:r>
+              <a:rPr lang="de-DE" sz="1000" dirty="0">
+                <a:solidFill>
+                  <a:srgbClr val="000000"/>
+                </a:solidFill>
+              </a:rPr>
+              <a:t>ORDER BY </a:t>
+            </a:r>
+            <a:r>
+              <a:rPr lang="de-DE" sz="1000" dirty="0" err="1">
+                <a:solidFill>
+                  <a:srgbClr val="000000"/>
+                </a:solidFill>
+              </a:rPr>
+              <a:t>b.titel</a:t>
+            </a:r>
+            <a:r>
+              <a:rPr lang="de-DE" sz="1000" dirty="0">
+                <a:solidFill>
+                  <a:srgbClr val="000000"/>
+                </a:solidFill>
+              </a:rPr>
+              <a:t>, </a:t>
+            </a:r>
+            <a:r>
+              <a:rPr lang="de-DE" sz="1000" dirty="0" err="1">
+                <a:solidFill>
+                  <a:srgbClr val="000000"/>
+                </a:solidFill>
+              </a:rPr>
+              <a:t>e.zustand</a:t>
+            </a:r>
+            <a:r>
+              <a:rPr lang="de-DE" sz="1000" dirty="0">
+                <a:solidFill>
+                  <a:srgbClr val="000000"/>
+                </a:solidFill>
+              </a:rPr>
+              <a:t>, </a:t>
+            </a:r>
+            <a:r>
+              <a:rPr lang="de-DE" sz="1000" dirty="0" err="1">
+                <a:solidFill>
+                  <a:srgbClr val="000000"/>
+                </a:solidFill>
+              </a:rPr>
+              <a:t>e.max_leihdauer_tage</a:t>
+            </a:r>
+            <a:r>
+              <a:rPr lang="de-DE" sz="1000" dirty="0">
+                <a:solidFill>
+                  <a:srgbClr val="000000"/>
+                </a:solidFill>
+              </a:rPr>
+              <a:t>;</a:t>
+            </a:r>
           </a:p>
         </p:txBody>
       </p:sp>
@@ -11275,7 +12260,7 @@
         <p:spPr>
           <a:xfrm>
             <a:off x="7472038" y="684640"/>
-            <a:ext cx="3172475" cy="2496709"/>
+            <a:ext cx="3172475" cy="2653841"/>
           </a:xfrm>
           <a:prstGeom prst="rect">
             <a:avLst/>
@@ -11472,7 +12457,33 @@
             </a:pPr>
             <a:r>
               <a:rPr lang="de-DE" sz="1400" dirty="0"/>
-              <a:t>Jeder… </a:t>
+              <a:t>Exemplare sind die physischen Bücher im Bestand der Nutzer.</a:t>
+            </a:r>
+          </a:p>
+          <a:p>
+            <a:pPr marL="0" indent="0">
+              <a:buNone/>
+            </a:pPr>
+            <a:r>
+              <a:rPr lang="de-DE" sz="1400" dirty="0"/>
+              <a:t>Neben Zustand und maximaler Leihdauer kann ein Exemplar als postversandfähig markiert sein.</a:t>
+            </a:r>
+          </a:p>
+          <a:p>
+            <a:pPr marL="0" indent="0">
+              <a:buNone/>
+            </a:pPr>
+            <a:r>
+              <a:rPr lang="de-DE" sz="1400" dirty="0"/>
+              <a:t>Die Abfrage liefert alle </a:t>
+            </a:r>
+            <a:r>
+              <a:rPr lang="de-DE" sz="1400" dirty="0" err="1"/>
+              <a:t>Romance</a:t>
+            </a:r>
+            <a:r>
+              <a:rPr lang="de-DE" sz="1400" dirty="0"/>
+              <a:t>-Exemplare, die per Post versendet werden können, mit Besitzer und Konditionen.</a:t>
             </a:r>
           </a:p>
         </p:txBody>
@@ -11491,7 +12502,7 @@
         </p:nvSpPr>
         <p:spPr>
           <a:xfrm>
-            <a:off x="3469411" y="5272897"/>
+            <a:off x="2763054" y="5210068"/>
             <a:ext cx="644375" cy="503227"/>
           </a:xfrm>
           <a:prstGeom prst="rightArrow">
@@ -11526,6 +12537,87 @@
           <a:p>
             <a:pPr algn="ctr"/>
             <a:endParaRPr lang="de-DE"/>
+          </a:p>
+        </p:txBody>
+      </p:sp>
+      <p:pic>
+        <p:nvPicPr>
+          <p:cNvPr id="10" name="Grafik 9">
+            <a:extLst>
+              <a:ext uri="{FF2B5EF4-FFF2-40B4-BE49-F238E27FC236}">
+                <a16:creationId xmlns:a16="http://schemas.microsoft.com/office/drawing/2014/main" id="{52C7FAB1-EABF-32A9-EE9F-55BC1F669A88}"/>
+              </a:ext>
+            </a:extLst>
+          </p:cNvPr>
+          <p:cNvPicPr>
+            <a:picLocks noChangeAspect="1"/>
+          </p:cNvPicPr>
+          <p:nvPr/>
+        </p:nvPicPr>
+        <p:blipFill>
+          <a:blip r:embed="rId2"/>
+          <a:stretch>
+            <a:fillRect/>
+          </a:stretch>
+        </p:blipFill>
+        <p:spPr>
+          <a:xfrm>
+            <a:off x="3775892" y="3860646"/>
+            <a:ext cx="5499383" cy="2997354"/>
+          </a:xfrm>
+          <a:prstGeom prst="rect">
+            <a:avLst/>
+          </a:prstGeom>
+        </p:spPr>
+      </p:pic>
+      <p:sp>
+        <p:nvSpPr>
+          <p:cNvPr id="12" name="Textfeld 11">
+            <a:extLst>
+              <a:ext uri="{FF2B5EF4-FFF2-40B4-BE49-F238E27FC236}">
+                <a16:creationId xmlns:a16="http://schemas.microsoft.com/office/drawing/2014/main" id="{798952A6-6355-E1AC-EB9F-E6633DE86E96}"/>
+              </a:ext>
+            </a:extLst>
+          </p:cNvPr>
+          <p:cNvSpPr txBox="1"/>
+          <p:nvPr/>
+        </p:nvSpPr>
+        <p:spPr>
+          <a:xfrm>
+            <a:off x="6685479" y="4228044"/>
+            <a:ext cx="2551670" cy="523220"/>
+          </a:xfrm>
+          <a:prstGeom prst="rect">
+            <a:avLst/>
+          </a:prstGeom>
+          <a:noFill/>
+        </p:spPr>
+        <p:txBody>
+          <a:bodyPr wrap="square" rtlCol="0">
+            <a:spAutoFit/>
+          </a:bodyPr>
+          <a:lstStyle/>
+          <a:p>
+            <a:pPr algn="ctr"/>
+            <a:r>
+              <a:rPr lang="de-DE" sz="1400" b="1" dirty="0">
+                <a:solidFill>
+                  <a:srgbClr val="79B747"/>
+                </a:solidFill>
+              </a:rPr>
+              <a:t>Teilmenge,</a:t>
+            </a:r>
+          </a:p>
+          <a:p>
+            <a:pPr algn="ctr"/>
+            <a:r>
+              <a:rPr lang="de-DE" sz="1400" b="1" dirty="0">
+                <a:solidFill>
+                  <a:srgbClr val="79B747"/>
+                </a:solidFill>
+              </a:rPr>
+              <a:t>insgesamt 24 Datensätze</a:t>
+            </a:r>
           </a:p>
         </p:txBody>
       </p:sp>
@@ -11648,7 +12740,7 @@
         <p:spPr>
           <a:xfrm>
             <a:off x="331640" y="684640"/>
-            <a:ext cx="5168720" cy="246221"/>
+            <a:ext cx="5168720" cy="3477875"/>
           </a:xfrm>
           <a:prstGeom prst="rect">
             <a:avLst/>
@@ -11687,6 +12779,694 @@
                 </a:solidFill>
               </a:rPr>
               <a:t> START WITH 1000 INCREMENT BY 1 NOCACHE;</a:t>
+            </a:r>
+          </a:p>
+          <a:p>
+            <a:endParaRPr lang="en-US" sz="1000" dirty="0">
+              <a:solidFill>
+                <a:srgbClr val="000000"/>
+              </a:solidFill>
+            </a:endParaRPr>
+          </a:p>
+          <a:p>
+            <a:r>
+              <a:rPr lang="en-US" sz="1000" dirty="0">
+                <a:solidFill>
+                  <a:srgbClr val="000000"/>
+                </a:solidFill>
+              </a:rPr>
+              <a:t>CREATE TABLE </a:t>
+            </a:r>
+            <a:r>
+              <a:rPr lang="en-US" sz="1000" dirty="0" err="1">
+                <a:solidFill>
+                  <a:srgbClr val="000000"/>
+                </a:solidFill>
+              </a:rPr>
+              <a:t>ausleihanfrage</a:t>
+            </a:r>
+            <a:r>
+              <a:rPr lang="en-US" sz="1000" dirty="0">
+                <a:solidFill>
+                  <a:srgbClr val="000000"/>
+                </a:solidFill>
+              </a:rPr>
+              <a:t> (</a:t>
+            </a:r>
+          </a:p>
+          <a:p>
+            <a:r>
+              <a:rPr lang="en-US" sz="1000" dirty="0">
+                <a:solidFill>
+                  <a:srgbClr val="000000"/>
+                </a:solidFill>
+              </a:rPr>
+              <a:t>    </a:t>
+            </a:r>
+            <a:r>
+              <a:rPr lang="en-US" sz="1000" dirty="0" err="1">
+                <a:solidFill>
+                  <a:srgbClr val="000000"/>
+                </a:solidFill>
+              </a:rPr>
+              <a:t>anfrage_id</a:t>
+            </a:r>
+            <a:r>
+              <a:rPr lang="en-US" sz="1000" dirty="0">
+                <a:solidFill>
+                  <a:srgbClr val="000000"/>
+                </a:solidFill>
+              </a:rPr>
+              <a:t>      NUMBER          DEFAULT </a:t>
+            </a:r>
+            <a:r>
+              <a:rPr lang="en-US" sz="1000" dirty="0" err="1">
+                <a:solidFill>
+                  <a:srgbClr val="000000"/>
+                </a:solidFill>
+              </a:rPr>
+              <a:t>seq_ausleihanfrage.NEXTVAL</a:t>
+            </a:r>
+            <a:r>
+              <a:rPr lang="en-US" sz="1000" dirty="0">
+                <a:solidFill>
+                  <a:srgbClr val="000000"/>
+                </a:solidFill>
+              </a:rPr>
+              <a:t> PRIMARY KEY,</a:t>
+            </a:r>
+          </a:p>
+          <a:p>
+            <a:r>
+              <a:rPr lang="en-US" sz="1000" dirty="0">
+                <a:solidFill>
+                  <a:srgbClr val="000000"/>
+                </a:solidFill>
+              </a:rPr>
+              <a:t>    </a:t>
+            </a:r>
+            <a:r>
+              <a:rPr lang="en-US" sz="1000" dirty="0" err="1">
+                <a:solidFill>
+                  <a:srgbClr val="000000"/>
+                </a:solidFill>
+              </a:rPr>
+              <a:t>exemplar_id</a:t>
+            </a:r>
+            <a:r>
+              <a:rPr lang="en-US" sz="1000" dirty="0">
+                <a:solidFill>
+                  <a:srgbClr val="000000"/>
+                </a:solidFill>
+              </a:rPr>
+              <a:t>     NUMBER          NOT NULL REFERENCES exemplar(</a:t>
+            </a:r>
+            <a:r>
+              <a:rPr lang="en-US" sz="1000" dirty="0" err="1">
+                <a:solidFill>
+                  <a:srgbClr val="000000"/>
+                </a:solidFill>
+              </a:rPr>
+              <a:t>exemplar_id</a:t>
+            </a:r>
+            <a:r>
+              <a:rPr lang="en-US" sz="1000" dirty="0">
+                <a:solidFill>
+                  <a:srgbClr val="000000"/>
+                </a:solidFill>
+              </a:rPr>
+              <a:t>),</a:t>
+            </a:r>
+          </a:p>
+          <a:p>
+            <a:r>
+              <a:rPr lang="en-US" sz="1000" dirty="0">
+                <a:solidFill>
+                  <a:srgbClr val="000000"/>
+                </a:solidFill>
+              </a:rPr>
+              <a:t>    </a:t>
+            </a:r>
+            <a:r>
+              <a:rPr lang="en-US" sz="1000" dirty="0" err="1">
+                <a:solidFill>
+                  <a:srgbClr val="000000"/>
+                </a:solidFill>
+              </a:rPr>
+              <a:t>leiher_id</a:t>
+            </a:r>
+            <a:r>
+              <a:rPr lang="en-US" sz="1000" dirty="0">
+                <a:solidFill>
+                  <a:srgbClr val="000000"/>
+                </a:solidFill>
+              </a:rPr>
+              <a:t>       NUMBER          NOT NULL REFERENCES </a:t>
+            </a:r>
+            <a:r>
+              <a:rPr lang="en-US" sz="1000" dirty="0" err="1">
+                <a:solidFill>
+                  <a:srgbClr val="000000"/>
+                </a:solidFill>
+              </a:rPr>
+              <a:t>nutzer</a:t>
+            </a:r>
+            <a:r>
+              <a:rPr lang="en-US" sz="1000" dirty="0">
+                <a:solidFill>
+                  <a:srgbClr val="000000"/>
+                </a:solidFill>
+              </a:rPr>
+              <a:t>(</a:t>
+            </a:r>
+            <a:r>
+              <a:rPr lang="en-US" sz="1000" dirty="0" err="1">
+                <a:solidFill>
+                  <a:srgbClr val="000000"/>
+                </a:solidFill>
+              </a:rPr>
+              <a:t>nutzer_id</a:t>
+            </a:r>
+            <a:r>
+              <a:rPr lang="en-US" sz="1000" dirty="0">
+                <a:solidFill>
+                  <a:srgbClr val="000000"/>
+                </a:solidFill>
+              </a:rPr>
+              <a:t>),</a:t>
+            </a:r>
+          </a:p>
+          <a:p>
+            <a:r>
+              <a:rPr lang="en-US" sz="1000" dirty="0">
+                <a:solidFill>
+                  <a:srgbClr val="000000"/>
+                </a:solidFill>
+              </a:rPr>
+              <a:t>    </a:t>
+            </a:r>
+            <a:r>
+              <a:rPr lang="en-US" sz="1000" dirty="0" err="1">
+                <a:solidFill>
+                  <a:srgbClr val="000000"/>
+                </a:solidFill>
+              </a:rPr>
+              <a:t>verleiher_id</a:t>
+            </a:r>
+            <a:r>
+              <a:rPr lang="en-US" sz="1000" dirty="0">
+                <a:solidFill>
+                  <a:srgbClr val="000000"/>
+                </a:solidFill>
+              </a:rPr>
+              <a:t>    NUMBER          NOT NULL REFERENCES </a:t>
+            </a:r>
+            <a:r>
+              <a:rPr lang="en-US" sz="1000" dirty="0" err="1">
+                <a:solidFill>
+                  <a:srgbClr val="000000"/>
+                </a:solidFill>
+              </a:rPr>
+              <a:t>nutzer</a:t>
+            </a:r>
+            <a:r>
+              <a:rPr lang="en-US" sz="1000" dirty="0">
+                <a:solidFill>
+                  <a:srgbClr val="000000"/>
+                </a:solidFill>
+              </a:rPr>
+              <a:t>(</a:t>
+            </a:r>
+            <a:r>
+              <a:rPr lang="en-US" sz="1000" dirty="0" err="1">
+                <a:solidFill>
+                  <a:srgbClr val="000000"/>
+                </a:solidFill>
+              </a:rPr>
+              <a:t>nutzer_id</a:t>
+            </a:r>
+            <a:r>
+              <a:rPr lang="en-US" sz="1000" dirty="0">
+                <a:solidFill>
+                  <a:srgbClr val="000000"/>
+                </a:solidFill>
+              </a:rPr>
+              <a:t>),</a:t>
+            </a:r>
+          </a:p>
+          <a:p>
+            <a:r>
+              <a:rPr lang="en-US" sz="1000" dirty="0">
+                <a:solidFill>
+                  <a:srgbClr val="000000"/>
+                </a:solidFill>
+              </a:rPr>
+              <a:t>    </a:t>
+            </a:r>
+            <a:r>
+              <a:rPr lang="en-US" sz="1000" dirty="0" err="1">
+                <a:solidFill>
+                  <a:srgbClr val="000000"/>
+                </a:solidFill>
+              </a:rPr>
+              <a:t>anfragedatum</a:t>
+            </a:r>
+            <a:r>
+              <a:rPr lang="en-US" sz="1000" dirty="0">
+                <a:solidFill>
+                  <a:srgbClr val="000000"/>
+                </a:solidFill>
+              </a:rPr>
+              <a:t>    DATE            DEFAULT SYSDATE NOT NULL,</a:t>
+            </a:r>
+          </a:p>
+          <a:p>
+            <a:r>
+              <a:rPr lang="en-US" sz="1000" dirty="0">
+                <a:solidFill>
+                  <a:srgbClr val="000000"/>
+                </a:solidFill>
+              </a:rPr>
+              <a:t>    status          VARCHAR2(20)    DEFAULT 'OFFEN' NOT NULL</a:t>
+            </a:r>
+          </a:p>
+          <a:p>
+            <a:r>
+              <a:rPr lang="en-US" sz="1000" dirty="0">
+                <a:solidFill>
+                  <a:srgbClr val="000000"/>
+                </a:solidFill>
+              </a:rPr>
+              <a:t>                        CHECK (status IN ('OFFEN','BESTAETIGT','ABGELEHNT','STORNIERT')),</a:t>
+            </a:r>
+          </a:p>
+          <a:p>
+            <a:r>
+              <a:rPr lang="en-US" sz="1000" dirty="0">
+                <a:solidFill>
+                  <a:srgbClr val="000000"/>
+                </a:solidFill>
+              </a:rPr>
+              <a:t>    </a:t>
+            </a:r>
+            <a:r>
+              <a:rPr lang="en-US" sz="1000" dirty="0" err="1">
+                <a:solidFill>
+                  <a:srgbClr val="000000"/>
+                </a:solidFill>
+              </a:rPr>
+              <a:t>nachricht</a:t>
+            </a:r>
+            <a:r>
+              <a:rPr lang="en-US" sz="1000" dirty="0">
+                <a:solidFill>
+                  <a:srgbClr val="000000"/>
+                </a:solidFill>
+              </a:rPr>
+              <a:t>       VARCHAR2(1000)</a:t>
+            </a:r>
+          </a:p>
+          <a:p>
+            <a:r>
+              <a:rPr lang="en-US" sz="1000" dirty="0">
+                <a:solidFill>
+                  <a:srgbClr val="000000"/>
+                </a:solidFill>
+              </a:rPr>
+              <a:t>);</a:t>
+            </a:r>
+          </a:p>
+          <a:p>
+            <a:endParaRPr lang="en-US" sz="1000" dirty="0">
+              <a:solidFill>
+                <a:srgbClr val="000000"/>
+              </a:solidFill>
+            </a:endParaRPr>
+          </a:p>
+          <a:p>
+            <a:r>
+              <a:rPr lang="en-US" sz="1000" dirty="0">
+                <a:solidFill>
+                  <a:srgbClr val="000000"/>
+                </a:solidFill>
+              </a:rPr>
+              <a:t>SELECT </a:t>
+            </a:r>
+            <a:r>
+              <a:rPr lang="en-US" sz="1000" dirty="0" err="1">
+                <a:solidFill>
+                  <a:srgbClr val="000000"/>
+                </a:solidFill>
+              </a:rPr>
+              <a:t>a.anfrage_id</a:t>
+            </a:r>
+            <a:r>
+              <a:rPr lang="en-US" sz="1000" dirty="0">
+                <a:solidFill>
+                  <a:srgbClr val="000000"/>
+                </a:solidFill>
+              </a:rPr>
+              <a:t>, </a:t>
+            </a:r>
+            <a:r>
+              <a:rPr lang="en-US" sz="1000" dirty="0" err="1">
+                <a:solidFill>
+                  <a:srgbClr val="000000"/>
+                </a:solidFill>
+              </a:rPr>
+              <a:t>a.anfragedatum</a:t>
+            </a:r>
+            <a:r>
+              <a:rPr lang="en-US" sz="1000" dirty="0">
+                <a:solidFill>
+                  <a:srgbClr val="000000"/>
+                </a:solidFill>
+              </a:rPr>
+              <a:t>, </a:t>
+            </a:r>
+            <a:r>
+              <a:rPr lang="en-US" sz="1000" dirty="0" err="1">
+                <a:solidFill>
+                  <a:srgbClr val="000000"/>
+                </a:solidFill>
+              </a:rPr>
+              <a:t>b.titel</a:t>
+            </a:r>
+            <a:r>
+              <a:rPr lang="en-US" sz="1000" dirty="0">
+                <a:solidFill>
+                  <a:srgbClr val="000000"/>
+                </a:solidFill>
+              </a:rPr>
+              <a:t>,</a:t>
+            </a:r>
+          </a:p>
+          <a:p>
+            <a:r>
+              <a:rPr lang="en-US" sz="1000" dirty="0">
+                <a:solidFill>
+                  <a:srgbClr val="000000"/>
+                </a:solidFill>
+              </a:rPr>
+              <a:t>       </a:t>
+            </a:r>
+            <a:r>
+              <a:rPr lang="en-US" sz="1000" dirty="0" err="1">
+                <a:solidFill>
+                  <a:srgbClr val="000000"/>
+                </a:solidFill>
+              </a:rPr>
+              <a:t>n.vorname</a:t>
+            </a:r>
+            <a:r>
+              <a:rPr lang="en-US" sz="1000" dirty="0">
+                <a:solidFill>
+                  <a:srgbClr val="000000"/>
+                </a:solidFill>
+              </a:rPr>
+              <a:t> || ' ' || </a:t>
+            </a:r>
+            <a:r>
+              <a:rPr lang="en-US" sz="1000" dirty="0" err="1">
+                <a:solidFill>
+                  <a:srgbClr val="000000"/>
+                </a:solidFill>
+              </a:rPr>
+              <a:t>n.nachname</a:t>
+            </a:r>
+            <a:r>
+              <a:rPr lang="en-US" sz="1000" dirty="0">
+                <a:solidFill>
+                  <a:srgbClr val="000000"/>
+                </a:solidFill>
+              </a:rPr>
+              <a:t> AS </a:t>
+            </a:r>
+            <a:r>
+              <a:rPr lang="en-US" sz="1000" dirty="0" err="1">
+                <a:solidFill>
+                  <a:srgbClr val="000000"/>
+                </a:solidFill>
+              </a:rPr>
+              <a:t>leiher</a:t>
+            </a:r>
+            <a:r>
+              <a:rPr lang="en-US" sz="1000" dirty="0">
+                <a:solidFill>
+                  <a:srgbClr val="000000"/>
+                </a:solidFill>
+              </a:rPr>
+              <a:t>,</a:t>
+            </a:r>
+          </a:p>
+          <a:p>
+            <a:r>
+              <a:rPr lang="en-US" sz="1000" dirty="0">
+                <a:solidFill>
+                  <a:srgbClr val="000000"/>
+                </a:solidFill>
+              </a:rPr>
+              <a:t>       </a:t>
+            </a:r>
+            <a:r>
+              <a:rPr lang="en-US" sz="1000" dirty="0" err="1">
+                <a:solidFill>
+                  <a:srgbClr val="000000"/>
+                </a:solidFill>
+              </a:rPr>
+              <a:t>a.status</a:t>
+            </a:r>
+            <a:endParaRPr lang="en-US" sz="1000" dirty="0">
+              <a:solidFill>
+                <a:srgbClr val="000000"/>
+              </a:solidFill>
+            </a:endParaRPr>
+          </a:p>
+          <a:p>
+            <a:r>
+              <a:rPr lang="en-US" sz="1000" dirty="0">
+                <a:solidFill>
+                  <a:srgbClr val="000000"/>
+                </a:solidFill>
+              </a:rPr>
+              <a:t>FROM </a:t>
+            </a:r>
+            <a:r>
+              <a:rPr lang="en-US" sz="1000" dirty="0" err="1">
+                <a:solidFill>
+                  <a:srgbClr val="000000"/>
+                </a:solidFill>
+              </a:rPr>
+              <a:t>ausleihanfrage</a:t>
+            </a:r>
+            <a:r>
+              <a:rPr lang="en-US" sz="1000" dirty="0">
+                <a:solidFill>
+                  <a:srgbClr val="000000"/>
+                </a:solidFill>
+              </a:rPr>
+              <a:t> a</a:t>
+            </a:r>
+          </a:p>
+          <a:p>
+            <a:r>
+              <a:rPr lang="en-US" sz="1000" dirty="0">
+                <a:solidFill>
+                  <a:srgbClr val="000000"/>
+                </a:solidFill>
+              </a:rPr>
+              <a:t>JOIN exemplar e ON </a:t>
+            </a:r>
+            <a:r>
+              <a:rPr lang="en-US" sz="1000" dirty="0" err="1">
+                <a:solidFill>
+                  <a:srgbClr val="000000"/>
+                </a:solidFill>
+              </a:rPr>
+              <a:t>e.exemplar_id</a:t>
+            </a:r>
+            <a:r>
+              <a:rPr lang="en-US" sz="1000" dirty="0">
+                <a:solidFill>
+                  <a:srgbClr val="000000"/>
+                </a:solidFill>
+              </a:rPr>
+              <a:t> = </a:t>
+            </a:r>
+            <a:r>
+              <a:rPr lang="en-US" sz="1000" dirty="0" err="1">
+                <a:solidFill>
+                  <a:srgbClr val="000000"/>
+                </a:solidFill>
+              </a:rPr>
+              <a:t>a.exemplar_id</a:t>
+            </a:r>
+            <a:endParaRPr lang="en-US" sz="1000" dirty="0">
+              <a:solidFill>
+                <a:srgbClr val="000000"/>
+              </a:solidFill>
+            </a:endParaRPr>
+          </a:p>
+          <a:p>
+            <a:r>
+              <a:rPr lang="en-US" sz="1000" dirty="0">
+                <a:solidFill>
+                  <a:srgbClr val="000000"/>
+                </a:solidFill>
+              </a:rPr>
+              <a:t>JOIN </a:t>
+            </a:r>
+            <a:r>
+              <a:rPr lang="en-US" sz="1000" dirty="0" err="1">
+                <a:solidFill>
+                  <a:srgbClr val="000000"/>
+                </a:solidFill>
+              </a:rPr>
+              <a:t>buch</a:t>
+            </a:r>
+            <a:r>
+              <a:rPr lang="en-US" sz="1000" dirty="0">
+                <a:solidFill>
+                  <a:srgbClr val="000000"/>
+                </a:solidFill>
+              </a:rPr>
+              <a:t> b ON </a:t>
+            </a:r>
+            <a:r>
+              <a:rPr lang="en-US" sz="1000" dirty="0" err="1">
+                <a:solidFill>
+                  <a:srgbClr val="000000"/>
+                </a:solidFill>
+              </a:rPr>
+              <a:t>b.buch_id</a:t>
+            </a:r>
+            <a:r>
+              <a:rPr lang="en-US" sz="1000" dirty="0">
+                <a:solidFill>
+                  <a:srgbClr val="000000"/>
+                </a:solidFill>
+              </a:rPr>
+              <a:t> = </a:t>
+            </a:r>
+            <a:r>
+              <a:rPr lang="en-US" sz="1000" dirty="0" err="1">
+                <a:solidFill>
+                  <a:srgbClr val="000000"/>
+                </a:solidFill>
+              </a:rPr>
+              <a:t>e.buch_id</a:t>
+            </a:r>
+            <a:endParaRPr lang="en-US" sz="1000" dirty="0">
+              <a:solidFill>
+                <a:srgbClr val="000000"/>
+              </a:solidFill>
+            </a:endParaRPr>
+          </a:p>
+          <a:p>
+            <a:r>
+              <a:rPr lang="en-US" sz="1000" dirty="0">
+                <a:solidFill>
+                  <a:srgbClr val="000000"/>
+                </a:solidFill>
+              </a:rPr>
+              <a:t>JOIN </a:t>
+            </a:r>
+            <a:r>
+              <a:rPr lang="en-US" sz="1000" dirty="0" err="1">
+                <a:solidFill>
+                  <a:srgbClr val="000000"/>
+                </a:solidFill>
+              </a:rPr>
+              <a:t>nutzer</a:t>
+            </a:r>
+            <a:r>
+              <a:rPr lang="en-US" sz="1000" dirty="0">
+                <a:solidFill>
+                  <a:srgbClr val="000000"/>
+                </a:solidFill>
+              </a:rPr>
+              <a:t> n ON </a:t>
+            </a:r>
+            <a:r>
+              <a:rPr lang="en-US" sz="1000" dirty="0" err="1">
+                <a:solidFill>
+                  <a:srgbClr val="000000"/>
+                </a:solidFill>
+              </a:rPr>
+              <a:t>n.nutzer_id</a:t>
+            </a:r>
+            <a:r>
+              <a:rPr lang="en-US" sz="1000" dirty="0">
+                <a:solidFill>
+                  <a:srgbClr val="000000"/>
+                </a:solidFill>
+              </a:rPr>
+              <a:t> = </a:t>
+            </a:r>
+            <a:r>
+              <a:rPr lang="en-US" sz="1000" dirty="0" err="1">
+                <a:solidFill>
+                  <a:srgbClr val="000000"/>
+                </a:solidFill>
+              </a:rPr>
+              <a:t>a.leiher_id</a:t>
+            </a:r>
+            <a:endParaRPr lang="en-US" sz="1000" dirty="0">
+              <a:solidFill>
+                <a:srgbClr val="000000"/>
+              </a:solidFill>
+            </a:endParaRPr>
+          </a:p>
+          <a:p>
+            <a:r>
+              <a:rPr lang="en-US" sz="1000" dirty="0">
+                <a:solidFill>
+                  <a:srgbClr val="000000"/>
+                </a:solidFill>
+              </a:rPr>
+              <a:t>WHERE </a:t>
+            </a:r>
+            <a:r>
+              <a:rPr lang="en-US" sz="1000" dirty="0" err="1">
+                <a:solidFill>
+                  <a:srgbClr val="000000"/>
+                </a:solidFill>
+              </a:rPr>
+              <a:t>a.verleiher_id</a:t>
+            </a:r>
+            <a:r>
+              <a:rPr lang="en-US" sz="1000" dirty="0">
+                <a:solidFill>
+                  <a:srgbClr val="000000"/>
+                </a:solidFill>
+              </a:rPr>
+              <a:t> = 25</a:t>
+            </a:r>
+          </a:p>
+          <a:p>
+            <a:r>
+              <a:rPr lang="en-US" sz="1000" dirty="0">
+                <a:solidFill>
+                  <a:srgbClr val="000000"/>
+                </a:solidFill>
+              </a:rPr>
+              <a:t>ORDER BY </a:t>
+            </a:r>
+            <a:r>
+              <a:rPr lang="en-US" sz="1000" dirty="0" err="1">
+                <a:solidFill>
+                  <a:srgbClr val="000000"/>
+                </a:solidFill>
+              </a:rPr>
+              <a:t>a.anfragedatum</a:t>
+            </a:r>
+            <a:r>
+              <a:rPr lang="en-US" sz="1000" dirty="0">
+                <a:solidFill>
+                  <a:srgbClr val="000000"/>
+                </a:solidFill>
+              </a:rPr>
+              <a:t>;</a:t>
             </a:r>
           </a:p>
         </p:txBody>
@@ -12178,7 +13958,25 @@
             </a:pPr>
             <a:r>
               <a:rPr lang="de-DE" sz="1400" dirty="0"/>
-              <a:t>Jeder… </a:t>
+              <a:t>Eine Ausleihanfrage stellt ein Nutzer, wenn er ein Exemplar ausleihen möchte.</a:t>
+            </a:r>
+          </a:p>
+          <a:p>
+            <a:pPr marL="0" indent="0">
+              <a:buNone/>
+            </a:pPr>
+            <a:r>
+              <a:rPr lang="de-DE" sz="1400" dirty="0"/>
+              <a:t>Der Verleiher kann sie bestätigen, ablehnen oder ignorieren.</a:t>
+            </a:r>
+          </a:p>
+          <a:p>
+            <a:pPr marL="0" indent="0">
+              <a:buNone/>
+            </a:pPr>
+            <a:r>
+              <a:rPr lang="de-DE" sz="1400" dirty="0"/>
+              <a:t>Die Abfrage zeigt die Anfragen aus der Sicht des Verleihers mit der Benutzer-Id 25.</a:t>
             </a:r>
           </a:p>
         </p:txBody>
@@ -12196,8 +13994,8 @@
           <p:nvPr/>
         </p:nvSpPr>
         <p:spPr>
-          <a:xfrm>
-            <a:off x="3469411" y="5272897"/>
+          <a:xfrm rot="1598287">
+            <a:off x="2193011" y="3910901"/>
             <a:ext cx="644375" cy="503227"/>
           </a:xfrm>
           <a:prstGeom prst="rightArrow">
@@ -12235,6 +14033,36 @@
           </a:p>
         </p:txBody>
       </p:sp>
+      <p:pic>
+        <p:nvPicPr>
+          <p:cNvPr id="10" name="Grafik 9">
+            <a:extLst>
+              <a:ext uri="{FF2B5EF4-FFF2-40B4-BE49-F238E27FC236}">
+                <a16:creationId xmlns:a16="http://schemas.microsoft.com/office/drawing/2014/main" id="{8C5E63F9-983A-CCE7-FC07-AAD635350CAB}"/>
+              </a:ext>
+            </a:extLst>
+          </p:cNvPr>
+          <p:cNvPicPr>
+            <a:picLocks noChangeAspect="1"/>
+          </p:cNvPicPr>
+          <p:nvPr/>
+        </p:nvPicPr>
+        <p:blipFill>
+          <a:blip r:embed="rId2"/>
+          <a:stretch>
+            <a:fillRect/>
+          </a:stretch>
+        </p:blipFill>
+        <p:spPr>
+          <a:xfrm>
+            <a:off x="2916000" y="4162514"/>
+            <a:ext cx="4737343" cy="584230"/>
+          </a:xfrm>
+          <a:prstGeom prst="rect">
+            <a:avLst/>
+          </a:prstGeom>
+        </p:spPr>
+      </p:pic>
     </p:spTree>
     <p:extLst>
       <p:ext uri="{BB962C8B-B14F-4D97-AF65-F5344CB8AC3E}">
@@ -12354,7 +14182,7 @@
         <p:spPr>
           <a:xfrm>
             <a:off x="331640" y="684640"/>
-            <a:ext cx="5168720" cy="246221"/>
+            <a:ext cx="5168720" cy="4555093"/>
           </a:xfrm>
           <a:prstGeom prst="rect">
             <a:avLst/>
@@ -12371,18 +14199,834 @@
           <a:lstStyle/>
           <a:p>
             <a:r>
-              <a:rPr lang="en-US" sz="1000">
-                <a:solidFill>
-                  <a:srgbClr val="000000"/>
-                </a:solidFill>
-              </a:rPr>
-              <a:t>CREATE SEQUENCE seq_ausleihe START WITH 1000 INCREMENT BY 1 NOCACHE;</a:t>
-            </a:r>
+              <a:rPr lang="en-US" sz="1000" dirty="0">
+                <a:solidFill>
+                  <a:srgbClr val="000000"/>
+                </a:solidFill>
+              </a:rPr>
+              <a:t>CREATE SEQUENCE </a:t>
+            </a:r>
+            <a:r>
+              <a:rPr lang="en-US" sz="1000" dirty="0" err="1">
+                <a:solidFill>
+                  <a:srgbClr val="000000"/>
+                </a:solidFill>
+              </a:rPr>
+              <a:t>seq_ausleihe</a:t>
+            </a:r>
+            <a:r>
+              <a:rPr lang="en-US" sz="1000" dirty="0">
+                <a:solidFill>
+                  <a:srgbClr val="000000"/>
+                </a:solidFill>
+              </a:rPr>
+              <a:t> START WITH 1000 INCREMENT BY 1 NOCACHE;</a:t>
+            </a:r>
+          </a:p>
+          <a:p>
+            <a:endParaRPr lang="en-US" sz="1000" dirty="0">
+              <a:solidFill>
+                <a:srgbClr val="000000"/>
+              </a:solidFill>
+            </a:endParaRPr>
+          </a:p>
+          <a:p>
+            <a:r>
+              <a:rPr lang="de-DE" sz="1000" dirty="0">
+                <a:solidFill>
+                  <a:srgbClr val="000000"/>
+                </a:solidFill>
+              </a:rPr>
+              <a:t>CREATE TABLE ausleihe (</a:t>
+            </a:r>
+          </a:p>
+          <a:p>
+            <a:r>
+              <a:rPr lang="de-DE" sz="1000" dirty="0">
+                <a:solidFill>
+                  <a:srgbClr val="000000"/>
+                </a:solidFill>
+              </a:rPr>
+              <a:t>    </a:t>
+            </a:r>
+            <a:r>
+              <a:rPr lang="de-DE" sz="1000" dirty="0" err="1">
+                <a:solidFill>
+                  <a:srgbClr val="000000"/>
+                </a:solidFill>
+              </a:rPr>
+              <a:t>ausleihe_id</a:t>
+            </a:r>
+            <a:r>
+              <a:rPr lang="de-DE" sz="1000" dirty="0">
+                <a:solidFill>
+                  <a:srgbClr val="000000"/>
+                </a:solidFill>
+              </a:rPr>
+              <a:t>                     NUMBER          DEFAULT </a:t>
+            </a:r>
+            <a:r>
+              <a:rPr lang="de-DE" sz="1000" dirty="0" err="1">
+                <a:solidFill>
+                  <a:srgbClr val="000000"/>
+                </a:solidFill>
+              </a:rPr>
+              <a:t>seq_ausleihe.NEXTVAL</a:t>
+            </a:r>
+            <a:r>
+              <a:rPr lang="de-DE" sz="1000" dirty="0">
+                <a:solidFill>
+                  <a:srgbClr val="000000"/>
+                </a:solidFill>
+              </a:rPr>
+              <a:t> PRIMARY KEY,</a:t>
+            </a:r>
+          </a:p>
+          <a:p>
+            <a:r>
+              <a:rPr lang="de-DE" sz="1000" dirty="0">
+                <a:solidFill>
+                  <a:srgbClr val="000000"/>
+                </a:solidFill>
+              </a:rPr>
+              <a:t>    </a:t>
+            </a:r>
+            <a:r>
+              <a:rPr lang="de-DE" sz="1000" dirty="0" err="1">
+                <a:solidFill>
+                  <a:srgbClr val="000000"/>
+                </a:solidFill>
+              </a:rPr>
+              <a:t>anfrage_id</a:t>
+            </a:r>
+            <a:r>
+              <a:rPr lang="de-DE" sz="1000" dirty="0">
+                <a:solidFill>
+                  <a:srgbClr val="000000"/>
+                </a:solidFill>
+              </a:rPr>
+              <a:t>                      NUMBER          NOT NULL UNIQUE REFERENCES ausleihanfrage(</a:t>
+            </a:r>
+            <a:r>
+              <a:rPr lang="de-DE" sz="1000" dirty="0" err="1">
+                <a:solidFill>
+                  <a:srgbClr val="000000"/>
+                </a:solidFill>
+              </a:rPr>
+              <a:t>anfrage_id</a:t>
+            </a:r>
+            <a:r>
+              <a:rPr lang="de-DE" sz="1000" dirty="0">
+                <a:solidFill>
+                  <a:srgbClr val="000000"/>
+                </a:solidFill>
+              </a:rPr>
+              <a:t>),</a:t>
+            </a:r>
+          </a:p>
+          <a:p>
+            <a:r>
+              <a:rPr lang="de-DE" sz="1000" dirty="0">
+                <a:solidFill>
+                  <a:srgbClr val="000000"/>
+                </a:solidFill>
+              </a:rPr>
+              <a:t>    </a:t>
+            </a:r>
+            <a:r>
+              <a:rPr lang="de-DE" sz="1000" dirty="0" err="1">
+                <a:solidFill>
+                  <a:srgbClr val="000000"/>
+                </a:solidFill>
+              </a:rPr>
+              <a:t>ausleihdatum</a:t>
+            </a:r>
+            <a:r>
+              <a:rPr lang="de-DE" sz="1000" dirty="0">
+                <a:solidFill>
+                  <a:srgbClr val="000000"/>
+                </a:solidFill>
+              </a:rPr>
+              <a:t>                    DATE            DEFAULT SYSDATE NOT NULL,</a:t>
+            </a:r>
+          </a:p>
+          <a:p>
+            <a:r>
+              <a:rPr lang="de-DE" sz="1000" dirty="0">
+                <a:solidFill>
+                  <a:srgbClr val="000000"/>
+                </a:solidFill>
+              </a:rPr>
+              <a:t>    </a:t>
+            </a:r>
+            <a:r>
+              <a:rPr lang="de-DE" sz="1000" dirty="0" err="1">
+                <a:solidFill>
+                  <a:srgbClr val="000000"/>
+                </a:solidFill>
+              </a:rPr>
+              <a:t>geplantes_rueckgabedatum</a:t>
+            </a:r>
+            <a:r>
+              <a:rPr lang="de-DE" sz="1000" dirty="0">
+                <a:solidFill>
+                  <a:srgbClr val="000000"/>
+                </a:solidFill>
+              </a:rPr>
+              <a:t>        DATE            NOT NULL,</a:t>
+            </a:r>
+          </a:p>
+          <a:p>
+            <a:r>
+              <a:rPr lang="de-DE" sz="1000" dirty="0">
+                <a:solidFill>
+                  <a:srgbClr val="000000"/>
+                </a:solidFill>
+              </a:rPr>
+              <a:t>    </a:t>
+            </a:r>
+            <a:r>
+              <a:rPr lang="de-DE" sz="1000" dirty="0" err="1">
+                <a:solidFill>
+                  <a:srgbClr val="000000"/>
+                </a:solidFill>
+              </a:rPr>
+              <a:t>tatsaechliches_rueckgabedatum</a:t>
+            </a:r>
+            <a:r>
+              <a:rPr lang="de-DE" sz="1000" dirty="0">
+                <a:solidFill>
+                  <a:srgbClr val="000000"/>
+                </a:solidFill>
+              </a:rPr>
+              <a:t>   DATE,</a:t>
+            </a:r>
+          </a:p>
+          <a:p>
+            <a:r>
+              <a:rPr lang="de-DE" sz="1000" dirty="0">
+                <a:solidFill>
+                  <a:srgbClr val="000000"/>
+                </a:solidFill>
+              </a:rPr>
+              <a:t>    </a:t>
+            </a:r>
+            <a:r>
+              <a:rPr lang="de-DE" sz="1000" dirty="0" err="1">
+                <a:solidFill>
+                  <a:srgbClr val="000000"/>
+                </a:solidFill>
+              </a:rPr>
+              <a:t>zustand_bei_uebergabe</a:t>
+            </a:r>
+            <a:r>
+              <a:rPr lang="de-DE" sz="1000" dirty="0">
+                <a:solidFill>
+                  <a:srgbClr val="000000"/>
+                </a:solidFill>
+              </a:rPr>
+              <a:t>           VARCHAR2(20)    NOT NULL CHECK (</a:t>
+            </a:r>
+            <a:r>
+              <a:rPr lang="de-DE" sz="1000" dirty="0" err="1">
+                <a:solidFill>
+                  <a:srgbClr val="000000"/>
+                </a:solidFill>
+              </a:rPr>
+              <a:t>zustand_bei_uebergabe</a:t>
+            </a:r>
+            <a:r>
+              <a:rPr lang="de-DE" sz="1000" dirty="0">
+                <a:solidFill>
+                  <a:srgbClr val="000000"/>
+                </a:solidFill>
+              </a:rPr>
+              <a:t> IN ('NEU','GUT','AKZEPTABEL','SCHLECHT')),</a:t>
+            </a:r>
+          </a:p>
+          <a:p>
+            <a:r>
+              <a:rPr lang="de-DE" sz="1000" dirty="0">
+                <a:solidFill>
+                  <a:srgbClr val="000000"/>
+                </a:solidFill>
+              </a:rPr>
+              <a:t>    </a:t>
+            </a:r>
+            <a:r>
+              <a:rPr lang="de-DE" sz="1000" dirty="0" err="1">
+                <a:solidFill>
+                  <a:srgbClr val="000000"/>
+                </a:solidFill>
+              </a:rPr>
+              <a:t>status</a:t>
+            </a:r>
+            <a:r>
+              <a:rPr lang="de-DE" sz="1000" dirty="0">
+                <a:solidFill>
+                  <a:srgbClr val="000000"/>
+                </a:solidFill>
+              </a:rPr>
+              <a:t>                          VARCHAR2(20)    DEFAULT 'LAUFEND' NOT NULL CHECK (</a:t>
+            </a:r>
+            <a:r>
+              <a:rPr lang="de-DE" sz="1000" dirty="0" err="1">
+                <a:solidFill>
+                  <a:srgbClr val="000000"/>
+                </a:solidFill>
+              </a:rPr>
+              <a:t>status</a:t>
+            </a:r>
+            <a:r>
+              <a:rPr lang="de-DE" sz="1000" dirty="0">
+                <a:solidFill>
+                  <a:srgbClr val="000000"/>
+                </a:solidFill>
+              </a:rPr>
+              <a:t> IN ('LAUFEND','UEBERGEBEN','ABGESCHLOSSEN','ABGEBROCHEN')),</a:t>
+            </a:r>
+          </a:p>
+          <a:p>
+            <a:r>
+              <a:rPr lang="de-DE" sz="1000" dirty="0">
+                <a:solidFill>
+                  <a:srgbClr val="000000"/>
+                </a:solidFill>
+              </a:rPr>
+              <a:t>    </a:t>
+            </a:r>
+            <a:r>
+              <a:rPr lang="de-DE" sz="1000" dirty="0" err="1">
+                <a:solidFill>
+                  <a:srgbClr val="000000"/>
+                </a:solidFill>
+              </a:rPr>
+              <a:t>abbrechender_benutzer</a:t>
+            </a:r>
+            <a:r>
+              <a:rPr lang="de-DE" sz="1000" dirty="0">
+                <a:solidFill>
+                  <a:srgbClr val="000000"/>
+                </a:solidFill>
+              </a:rPr>
+              <a:t>           NUMBER          REFERENCES </a:t>
+            </a:r>
+            <a:r>
+              <a:rPr lang="de-DE" sz="1000" dirty="0" err="1">
+                <a:solidFill>
+                  <a:srgbClr val="000000"/>
+                </a:solidFill>
+              </a:rPr>
+              <a:t>nutzer</a:t>
+            </a:r>
+            <a:r>
+              <a:rPr lang="de-DE" sz="1000" dirty="0">
+                <a:solidFill>
+                  <a:srgbClr val="000000"/>
+                </a:solidFill>
+              </a:rPr>
+              <a:t>(</a:t>
+            </a:r>
+            <a:r>
+              <a:rPr lang="de-DE" sz="1000" dirty="0" err="1">
+                <a:solidFill>
+                  <a:srgbClr val="000000"/>
+                </a:solidFill>
+              </a:rPr>
+              <a:t>nutzer_id</a:t>
+            </a:r>
+            <a:r>
+              <a:rPr lang="de-DE" sz="1000" dirty="0">
+                <a:solidFill>
+                  <a:srgbClr val="000000"/>
+                </a:solidFill>
+              </a:rPr>
+              <a:t>),</a:t>
+            </a:r>
+          </a:p>
+          <a:p>
+            <a:r>
+              <a:rPr lang="de-DE" sz="1000" dirty="0">
+                <a:solidFill>
+                  <a:srgbClr val="000000"/>
+                </a:solidFill>
+              </a:rPr>
+              <a:t>    </a:t>
+            </a:r>
+            <a:r>
+              <a:rPr lang="de-DE" sz="1000" dirty="0" err="1">
+                <a:solidFill>
+                  <a:srgbClr val="000000"/>
+                </a:solidFill>
+              </a:rPr>
+              <a:t>abbruchgrund</a:t>
+            </a:r>
+            <a:r>
+              <a:rPr lang="de-DE" sz="1000" dirty="0">
+                <a:solidFill>
+                  <a:srgbClr val="000000"/>
+                </a:solidFill>
+              </a:rPr>
+              <a:t>                    VARCHAR2(500)</a:t>
+            </a:r>
+          </a:p>
+          <a:p>
+            <a:r>
+              <a:rPr lang="de-DE" sz="1000" dirty="0">
+                <a:solidFill>
+                  <a:srgbClr val="000000"/>
+                </a:solidFill>
+              </a:rPr>
+              <a:t>);</a:t>
+            </a:r>
+          </a:p>
+          <a:p>
             <a:endParaRPr lang="de-DE" sz="1000" dirty="0">
               <a:solidFill>
                 <a:srgbClr val="000000"/>
               </a:solidFill>
             </a:endParaRPr>
+          </a:p>
+          <a:p>
+            <a:r>
+              <a:rPr lang="de-DE" sz="1000" dirty="0">
+                <a:solidFill>
+                  <a:srgbClr val="000000"/>
+                </a:solidFill>
+              </a:rPr>
+              <a:t>SELECT </a:t>
+            </a:r>
+            <a:r>
+              <a:rPr lang="de-DE" sz="1000" dirty="0" err="1">
+                <a:solidFill>
+                  <a:srgbClr val="000000"/>
+                </a:solidFill>
+              </a:rPr>
+              <a:t>a.ausleihe_id</a:t>
+            </a:r>
+            <a:r>
+              <a:rPr lang="de-DE" sz="1000" dirty="0">
+                <a:solidFill>
+                  <a:srgbClr val="000000"/>
+                </a:solidFill>
+              </a:rPr>
+              <a:t>, </a:t>
+            </a:r>
+            <a:r>
+              <a:rPr lang="de-DE" sz="1000" dirty="0" err="1">
+                <a:solidFill>
+                  <a:srgbClr val="000000"/>
+                </a:solidFill>
+              </a:rPr>
+              <a:t>b.titel</a:t>
+            </a:r>
+            <a:r>
+              <a:rPr lang="de-DE" sz="1000" dirty="0">
+                <a:solidFill>
+                  <a:srgbClr val="000000"/>
+                </a:solidFill>
+              </a:rPr>
+              <a:t>,</a:t>
+            </a:r>
+          </a:p>
+          <a:p>
+            <a:r>
+              <a:rPr lang="de-DE" sz="1000" dirty="0">
+                <a:solidFill>
+                  <a:srgbClr val="000000"/>
+                </a:solidFill>
+              </a:rPr>
+              <a:t>       </a:t>
+            </a:r>
+            <a:r>
+              <a:rPr lang="de-DE" sz="1000" dirty="0" err="1">
+                <a:solidFill>
+                  <a:srgbClr val="000000"/>
+                </a:solidFill>
+              </a:rPr>
+              <a:t>n.vorname</a:t>
+            </a:r>
+            <a:r>
+              <a:rPr lang="de-DE" sz="1000" dirty="0">
+                <a:solidFill>
+                  <a:srgbClr val="000000"/>
+                </a:solidFill>
+              </a:rPr>
+              <a:t> || ' ' || </a:t>
+            </a:r>
+            <a:r>
+              <a:rPr lang="de-DE" sz="1000" dirty="0" err="1">
+                <a:solidFill>
+                  <a:srgbClr val="000000"/>
+                </a:solidFill>
+              </a:rPr>
+              <a:t>n.nachname</a:t>
+            </a:r>
+            <a:r>
+              <a:rPr lang="de-DE" sz="1000" dirty="0">
+                <a:solidFill>
+                  <a:srgbClr val="000000"/>
+                </a:solidFill>
+              </a:rPr>
+              <a:t> AS </a:t>
+            </a:r>
+            <a:r>
+              <a:rPr lang="de-DE" sz="1000" dirty="0" err="1">
+                <a:solidFill>
+                  <a:srgbClr val="000000"/>
+                </a:solidFill>
+              </a:rPr>
+              <a:t>leiher</a:t>
+            </a:r>
+            <a:r>
+              <a:rPr lang="de-DE" sz="1000" dirty="0">
+                <a:solidFill>
+                  <a:srgbClr val="000000"/>
+                </a:solidFill>
+              </a:rPr>
+              <a:t>,</a:t>
+            </a:r>
+          </a:p>
+          <a:p>
+            <a:r>
+              <a:rPr lang="de-DE" sz="1000" dirty="0">
+                <a:solidFill>
+                  <a:srgbClr val="000000"/>
+                </a:solidFill>
+              </a:rPr>
+              <a:t>       </a:t>
+            </a:r>
+            <a:r>
+              <a:rPr lang="de-DE" sz="1000" dirty="0" err="1">
+                <a:solidFill>
+                  <a:srgbClr val="000000"/>
+                </a:solidFill>
+              </a:rPr>
+              <a:t>a.geplantes_rueckgabedatum</a:t>
+            </a:r>
+            <a:r>
+              <a:rPr lang="de-DE" sz="1000" dirty="0">
+                <a:solidFill>
+                  <a:srgbClr val="000000"/>
+                </a:solidFill>
+              </a:rPr>
+              <a:t>,</a:t>
+            </a:r>
+          </a:p>
+          <a:p>
+            <a:r>
+              <a:rPr lang="de-DE" sz="1000" dirty="0">
+                <a:solidFill>
+                  <a:srgbClr val="000000"/>
+                </a:solidFill>
+              </a:rPr>
+              <a:t>       SYSDATE - </a:t>
+            </a:r>
+            <a:r>
+              <a:rPr lang="de-DE" sz="1000" dirty="0" err="1">
+                <a:solidFill>
+                  <a:srgbClr val="000000"/>
+                </a:solidFill>
+              </a:rPr>
+              <a:t>a.geplantes_rueckgabedatum</a:t>
+            </a:r>
+            <a:r>
+              <a:rPr lang="de-DE" sz="1000" dirty="0">
+                <a:solidFill>
+                  <a:srgbClr val="000000"/>
+                </a:solidFill>
+              </a:rPr>
+              <a:t> AS </a:t>
+            </a:r>
+            <a:r>
+              <a:rPr lang="de-DE" sz="1000" dirty="0" err="1">
+                <a:solidFill>
+                  <a:srgbClr val="000000"/>
+                </a:solidFill>
+              </a:rPr>
+              <a:t>tage_ueberfaellig</a:t>
+            </a:r>
+            <a:endParaRPr lang="de-DE" sz="1000" dirty="0">
+              <a:solidFill>
+                <a:srgbClr val="000000"/>
+              </a:solidFill>
+            </a:endParaRPr>
+          </a:p>
+          <a:p>
+            <a:r>
+              <a:rPr lang="de-DE" sz="1000" dirty="0">
+                <a:solidFill>
+                  <a:srgbClr val="000000"/>
+                </a:solidFill>
+              </a:rPr>
+              <a:t>FROM ausleihe a</a:t>
+            </a:r>
+          </a:p>
+          <a:p>
+            <a:r>
+              <a:rPr lang="de-DE" sz="1000" dirty="0">
+                <a:solidFill>
+                  <a:srgbClr val="000000"/>
+                </a:solidFill>
+              </a:rPr>
+              <a:t>JOIN ausleihanfrage an ON </a:t>
+            </a:r>
+            <a:r>
+              <a:rPr lang="de-DE" sz="1000" dirty="0" err="1">
+                <a:solidFill>
+                  <a:srgbClr val="000000"/>
+                </a:solidFill>
+              </a:rPr>
+              <a:t>an.anfrage_id</a:t>
+            </a:r>
+            <a:r>
+              <a:rPr lang="de-DE" sz="1000" dirty="0">
+                <a:solidFill>
+                  <a:srgbClr val="000000"/>
+                </a:solidFill>
+              </a:rPr>
+              <a:t> = </a:t>
+            </a:r>
+            <a:r>
+              <a:rPr lang="de-DE" sz="1000" dirty="0" err="1">
+                <a:solidFill>
+                  <a:srgbClr val="000000"/>
+                </a:solidFill>
+              </a:rPr>
+              <a:t>a.anfrage_id</a:t>
+            </a:r>
+            <a:endParaRPr lang="de-DE" sz="1000" dirty="0">
+              <a:solidFill>
+                <a:srgbClr val="000000"/>
+              </a:solidFill>
+            </a:endParaRPr>
+          </a:p>
+          <a:p>
+            <a:r>
+              <a:rPr lang="de-DE" sz="1000" dirty="0">
+                <a:solidFill>
+                  <a:srgbClr val="000000"/>
+                </a:solidFill>
+              </a:rPr>
+              <a:t>JOIN </a:t>
+            </a:r>
+            <a:r>
+              <a:rPr lang="de-DE" sz="1000" dirty="0" err="1">
+                <a:solidFill>
+                  <a:srgbClr val="000000"/>
+                </a:solidFill>
+              </a:rPr>
+              <a:t>exemplar</a:t>
+            </a:r>
+            <a:r>
+              <a:rPr lang="de-DE" sz="1000" dirty="0">
+                <a:solidFill>
+                  <a:srgbClr val="000000"/>
+                </a:solidFill>
+              </a:rPr>
+              <a:t> e ON </a:t>
+            </a:r>
+            <a:r>
+              <a:rPr lang="de-DE" sz="1000" dirty="0" err="1">
+                <a:solidFill>
+                  <a:srgbClr val="000000"/>
+                </a:solidFill>
+              </a:rPr>
+              <a:t>e.exemplar_id</a:t>
+            </a:r>
+            <a:r>
+              <a:rPr lang="de-DE" sz="1000" dirty="0">
+                <a:solidFill>
+                  <a:srgbClr val="000000"/>
+                </a:solidFill>
+              </a:rPr>
+              <a:t> = </a:t>
+            </a:r>
+            <a:r>
+              <a:rPr lang="de-DE" sz="1000" dirty="0" err="1">
+                <a:solidFill>
+                  <a:srgbClr val="000000"/>
+                </a:solidFill>
+              </a:rPr>
+              <a:t>an.exemplar_id</a:t>
+            </a:r>
+            <a:endParaRPr lang="de-DE" sz="1000" dirty="0">
+              <a:solidFill>
+                <a:srgbClr val="000000"/>
+              </a:solidFill>
+            </a:endParaRPr>
+          </a:p>
+          <a:p>
+            <a:r>
+              <a:rPr lang="de-DE" sz="1000" dirty="0">
+                <a:solidFill>
+                  <a:srgbClr val="000000"/>
+                </a:solidFill>
+              </a:rPr>
+              <a:t>JOIN buch b ON </a:t>
+            </a:r>
+            <a:r>
+              <a:rPr lang="de-DE" sz="1000" dirty="0" err="1">
+                <a:solidFill>
+                  <a:srgbClr val="000000"/>
+                </a:solidFill>
+              </a:rPr>
+              <a:t>b.buch_id</a:t>
+            </a:r>
+            <a:r>
+              <a:rPr lang="de-DE" sz="1000" dirty="0">
+                <a:solidFill>
+                  <a:srgbClr val="000000"/>
+                </a:solidFill>
+              </a:rPr>
+              <a:t> = </a:t>
+            </a:r>
+            <a:r>
+              <a:rPr lang="de-DE" sz="1000" dirty="0" err="1">
+                <a:solidFill>
+                  <a:srgbClr val="000000"/>
+                </a:solidFill>
+              </a:rPr>
+              <a:t>e.buch_id</a:t>
+            </a:r>
+            <a:endParaRPr lang="de-DE" sz="1000" dirty="0">
+              <a:solidFill>
+                <a:srgbClr val="000000"/>
+              </a:solidFill>
+            </a:endParaRPr>
+          </a:p>
+          <a:p>
+            <a:r>
+              <a:rPr lang="de-DE" sz="1000" dirty="0">
+                <a:solidFill>
+                  <a:srgbClr val="000000"/>
+                </a:solidFill>
+              </a:rPr>
+              <a:t>JOIN </a:t>
+            </a:r>
+            <a:r>
+              <a:rPr lang="de-DE" sz="1000" dirty="0" err="1">
+                <a:solidFill>
+                  <a:srgbClr val="000000"/>
+                </a:solidFill>
+              </a:rPr>
+              <a:t>nutzer</a:t>
+            </a:r>
+            <a:r>
+              <a:rPr lang="de-DE" sz="1000" dirty="0">
+                <a:solidFill>
+                  <a:srgbClr val="000000"/>
+                </a:solidFill>
+              </a:rPr>
+              <a:t> n ON </a:t>
+            </a:r>
+            <a:r>
+              <a:rPr lang="de-DE" sz="1000" dirty="0" err="1">
+                <a:solidFill>
+                  <a:srgbClr val="000000"/>
+                </a:solidFill>
+              </a:rPr>
+              <a:t>n.nutzer_id</a:t>
+            </a:r>
+            <a:r>
+              <a:rPr lang="de-DE" sz="1000" dirty="0">
+                <a:solidFill>
+                  <a:srgbClr val="000000"/>
+                </a:solidFill>
+              </a:rPr>
+              <a:t> = </a:t>
+            </a:r>
+            <a:r>
+              <a:rPr lang="de-DE" sz="1000" dirty="0" err="1">
+                <a:solidFill>
+                  <a:srgbClr val="000000"/>
+                </a:solidFill>
+              </a:rPr>
+              <a:t>an.leiher_id</a:t>
+            </a:r>
+            <a:endParaRPr lang="de-DE" sz="1000" dirty="0">
+              <a:solidFill>
+                <a:srgbClr val="000000"/>
+              </a:solidFill>
+            </a:endParaRPr>
+          </a:p>
+          <a:p>
+            <a:r>
+              <a:rPr lang="de-DE" sz="1000" dirty="0">
+                <a:solidFill>
+                  <a:srgbClr val="000000"/>
+                </a:solidFill>
+              </a:rPr>
+              <a:t>WHERE </a:t>
+            </a:r>
+            <a:r>
+              <a:rPr lang="de-DE" sz="1000" dirty="0" err="1">
+                <a:solidFill>
+                  <a:srgbClr val="000000"/>
+                </a:solidFill>
+              </a:rPr>
+              <a:t>a.status</a:t>
+            </a:r>
+            <a:r>
+              <a:rPr lang="de-DE" sz="1000" dirty="0">
+                <a:solidFill>
+                  <a:srgbClr val="000000"/>
+                </a:solidFill>
+              </a:rPr>
+              <a:t> = 'LAUFEND'</a:t>
+            </a:r>
+          </a:p>
+          <a:p>
+            <a:r>
+              <a:rPr lang="de-DE" sz="1000" dirty="0">
+                <a:solidFill>
+                  <a:srgbClr val="000000"/>
+                </a:solidFill>
+              </a:rPr>
+              <a:t>AND </a:t>
+            </a:r>
+            <a:r>
+              <a:rPr lang="de-DE" sz="1000" dirty="0" err="1">
+                <a:solidFill>
+                  <a:srgbClr val="000000"/>
+                </a:solidFill>
+              </a:rPr>
+              <a:t>a.geplantes_rueckgabedatum</a:t>
+            </a:r>
+            <a:r>
+              <a:rPr lang="de-DE" sz="1000" dirty="0">
+                <a:solidFill>
+                  <a:srgbClr val="000000"/>
+                </a:solidFill>
+              </a:rPr>
+              <a:t> &lt; SYSDATE</a:t>
+            </a:r>
+          </a:p>
+          <a:p>
+            <a:r>
+              <a:rPr lang="de-DE" sz="1000" dirty="0">
+                <a:solidFill>
+                  <a:srgbClr val="000000"/>
+                </a:solidFill>
+              </a:rPr>
+              <a:t>ORDER BY </a:t>
+            </a:r>
+            <a:r>
+              <a:rPr lang="de-DE" sz="1000" dirty="0" err="1">
+                <a:solidFill>
+                  <a:srgbClr val="000000"/>
+                </a:solidFill>
+              </a:rPr>
+              <a:t>tage_ueberfaellig</a:t>
+            </a:r>
+            <a:r>
+              <a:rPr lang="de-DE" sz="1000" dirty="0">
+                <a:solidFill>
+                  <a:srgbClr val="000000"/>
+                </a:solidFill>
+              </a:rPr>
+              <a:t> DESC;</a:t>
+            </a:r>
           </a:p>
         </p:txBody>
       </p:sp>
@@ -12676,7 +15320,7 @@
         <p:spPr>
           <a:xfrm>
             <a:off x="7472038" y="684640"/>
-            <a:ext cx="3172475" cy="2496709"/>
+            <a:ext cx="3172475" cy="2637294"/>
           </a:xfrm>
           <a:prstGeom prst="rect">
             <a:avLst/>
@@ -12873,7 +15517,25 @@
             </a:pPr>
             <a:r>
               <a:rPr lang="de-DE" sz="1400" dirty="0"/>
-              <a:t>Jeder… </a:t>
+              <a:t>Ein Ausleihe-Datensatz wird angelegt, wenn eine Anfrage bestätigt wird.</a:t>
+            </a:r>
+          </a:p>
+          <a:p>
+            <a:pPr marL="0" indent="0">
+              <a:buNone/>
+            </a:pPr>
+            <a:r>
+              <a:rPr lang="de-DE" sz="1400" dirty="0"/>
+              <a:t>Der Status wechselt auf ABGESCHLOSSEN, sobald das Exemplar zurückgegeben wurde.</a:t>
+            </a:r>
+          </a:p>
+          <a:p>
+            <a:pPr marL="0" indent="0">
+              <a:buNone/>
+            </a:pPr>
+            <a:r>
+              <a:rPr lang="de-DE" sz="1400" dirty="0"/>
+              <a:t>Die Abfrage zeigt laufende Ausleihen, deren Rückgabedatum überschritten ist, um beispielsweise automatische Mahnungen zu versenden.</a:t>
             </a:r>
           </a:p>
         </p:txBody>
@@ -12892,7 +15554,7 @@
         </p:nvSpPr>
         <p:spPr>
           <a:xfrm>
-            <a:off x="3469411" y="5272897"/>
+            <a:off x="917193" y="5353919"/>
             <a:ext cx="644375" cy="503227"/>
           </a:xfrm>
           <a:prstGeom prst="rightArrow">
@@ -12930,6 +15592,36 @@
           </a:p>
         </p:txBody>
       </p:sp>
+      <p:pic>
+        <p:nvPicPr>
+          <p:cNvPr id="8" name="Grafik 7">
+            <a:extLst>
+              <a:ext uri="{FF2B5EF4-FFF2-40B4-BE49-F238E27FC236}">
+                <a16:creationId xmlns:a16="http://schemas.microsoft.com/office/drawing/2014/main" id="{821B902E-7584-8E25-FDDC-B8279AB4F77E}"/>
+              </a:ext>
+            </a:extLst>
+          </p:cNvPr>
+          <p:cNvPicPr>
+            <a:picLocks noChangeAspect="1"/>
+          </p:cNvPicPr>
+          <p:nvPr/>
+        </p:nvPicPr>
+        <p:blipFill>
+          <a:blip r:embed="rId2"/>
+          <a:stretch>
+            <a:fillRect/>
+          </a:stretch>
+        </p:blipFill>
+        <p:spPr>
+          <a:xfrm>
+            <a:off x="1811129" y="5408672"/>
+            <a:ext cx="7296525" cy="393720"/>
+          </a:xfrm>
+          <a:prstGeom prst="rect">
+            <a:avLst/>
+          </a:prstGeom>
+        </p:spPr>
+      </p:pic>
     </p:spTree>
     <p:extLst>
       <p:ext uri="{BB962C8B-B14F-4D97-AF65-F5344CB8AC3E}">
@@ -12944,6 +15636,1324 @@
 </file>
 
 <file path=ppt/slides/slide17.xml><?xml version="1.0" encoding="utf-8"?>
+<p:sld xmlns:a="http://schemas.openxmlformats.org/drawingml/2006/main" xmlns:r="http://schemas.openxmlformats.org/officeDocument/2006/relationships" xmlns:p="http://schemas.openxmlformats.org/presentationml/2006/main">
+  <p:cSld>
+    <p:spTree>
+      <p:nvGrpSpPr>
+        <p:cNvPr id="1" name="">
+          <a:extLst>
+            <a:ext uri="{FF2B5EF4-FFF2-40B4-BE49-F238E27FC236}">
+              <a16:creationId xmlns:a16="http://schemas.microsoft.com/office/drawing/2014/main" id="{D2CBE675-40A8-1556-A2C7-87C2B94ACAD9}"/>
+            </a:ext>
+          </a:extLst>
+        </p:cNvPr>
+        <p:cNvGrpSpPr/>
+        <p:nvPr/>
+      </p:nvGrpSpPr>
+      <p:grpSpPr>
+        <a:xfrm>
+          <a:off x="0" y="0"/>
+          <a:ext cx="0" cy="0"/>
+          <a:chOff x="0" y="0"/>
+          <a:chExt cx="0" cy="0"/>
+        </a:xfrm>
+      </p:grpSpPr>
+      <p:sp>
+        <p:nvSpPr>
+          <p:cNvPr id="5" name="Inhaltsplatzhalter 4">
+            <a:extLst>
+              <a:ext uri="{FF2B5EF4-FFF2-40B4-BE49-F238E27FC236}">
+                <a16:creationId xmlns:a16="http://schemas.microsoft.com/office/drawing/2014/main" id="{EF921A23-5134-6B5C-9CED-E3C0E43F22FA}"/>
+              </a:ext>
+            </a:extLst>
+          </p:cNvPr>
+          <p:cNvSpPr>
+            <a:spLocks noGrp="1"/>
+          </p:cNvSpPr>
+          <p:nvPr>
+            <p:ph idx="1"/>
+          </p:nvPr>
+        </p:nvSpPr>
+        <p:spPr>
+          <a:xfrm>
+            <a:off x="0" y="432000"/>
+            <a:ext cx="5832000" cy="6426000"/>
+          </a:xfrm>
+          <a:solidFill>
+            <a:srgbClr val="BBFFB8"/>
+          </a:solidFill>
+        </p:spPr>
+        <p:txBody>
+          <a:bodyPr>
+            <a:noAutofit/>
+          </a:bodyPr>
+          <a:lstStyle/>
+          <a:p>
+            <a:pPr marL="0" indent="0">
+              <a:lnSpc>
+                <a:spcPct val="100000"/>
+              </a:lnSpc>
+              <a:spcBef>
+                <a:spcPts val="0"/>
+              </a:spcBef>
+              <a:buNone/>
+            </a:pPr>
+            <a:endParaRPr lang="de-DE" sz="1400" dirty="0"/>
+          </a:p>
+          <a:p>
+            <a:pPr marL="0" indent="0">
+              <a:lnSpc>
+                <a:spcPct val="100000"/>
+              </a:lnSpc>
+              <a:spcBef>
+                <a:spcPts val="0"/>
+              </a:spcBef>
+              <a:buNone/>
+            </a:pPr>
+            <a:endParaRPr lang="de-DE" sz="1400" dirty="0"/>
+          </a:p>
+          <a:p>
+            <a:pPr marL="0" indent="0">
+              <a:lnSpc>
+                <a:spcPct val="100000"/>
+              </a:lnSpc>
+              <a:spcBef>
+                <a:spcPts val="0"/>
+              </a:spcBef>
+              <a:buNone/>
+            </a:pPr>
+            <a:endParaRPr lang="de-DE" sz="1400" dirty="0"/>
+          </a:p>
+        </p:txBody>
+      </p:sp>
+      <p:sp>
+        <p:nvSpPr>
+          <p:cNvPr id="2" name="Textfeld 1">
+            <a:extLst>
+              <a:ext uri="{FF2B5EF4-FFF2-40B4-BE49-F238E27FC236}">
+                <a16:creationId xmlns:a16="http://schemas.microsoft.com/office/drawing/2014/main" id="{E6FC786A-8C47-4AFF-31B6-F48291723A0D}"/>
+              </a:ext>
+            </a:extLst>
+          </p:cNvPr>
+          <p:cNvSpPr txBox="1"/>
+          <p:nvPr/>
+        </p:nvSpPr>
+        <p:spPr>
+          <a:xfrm>
+            <a:off x="331640" y="684640"/>
+            <a:ext cx="5168720" cy="3016210"/>
+          </a:xfrm>
+          <a:prstGeom prst="rect">
+            <a:avLst/>
+          </a:prstGeom>
+          <a:noFill/>
+          <a:ln w="25400">
+            <a:noFill/>
+          </a:ln>
+        </p:spPr>
+        <p:txBody>
+          <a:bodyPr wrap="square" rtlCol="0">
+            <a:spAutoFit/>
+          </a:bodyPr>
+          <a:lstStyle/>
+          <a:p>
+            <a:r>
+              <a:rPr lang="en-US" sz="1000" dirty="0">
+                <a:solidFill>
+                  <a:srgbClr val="000000"/>
+                </a:solidFill>
+              </a:rPr>
+              <a:t>CREATE SEQUENCE </a:t>
+            </a:r>
+            <a:r>
+              <a:rPr lang="en-US" sz="1000" dirty="0" err="1">
+                <a:solidFill>
+                  <a:srgbClr val="000000"/>
+                </a:solidFill>
+              </a:rPr>
+              <a:t>seq_rueckgabe</a:t>
+            </a:r>
+            <a:r>
+              <a:rPr lang="en-US" sz="1000" dirty="0">
+                <a:solidFill>
+                  <a:srgbClr val="000000"/>
+                </a:solidFill>
+              </a:rPr>
+              <a:t> START WITH 1000 INCREMENT BY 1 NOCACHE;</a:t>
+            </a:r>
+          </a:p>
+          <a:p>
+            <a:endParaRPr lang="en-US" sz="1000" dirty="0">
+              <a:solidFill>
+                <a:srgbClr val="000000"/>
+              </a:solidFill>
+            </a:endParaRPr>
+          </a:p>
+          <a:p>
+            <a:r>
+              <a:rPr lang="de-DE" sz="1000" dirty="0">
+                <a:solidFill>
+                  <a:srgbClr val="000000"/>
+                </a:solidFill>
+              </a:rPr>
+              <a:t>CREATE TABLE </a:t>
+            </a:r>
+            <a:r>
+              <a:rPr lang="de-DE" sz="1000" dirty="0" err="1">
+                <a:solidFill>
+                  <a:srgbClr val="000000"/>
+                </a:solidFill>
+              </a:rPr>
+              <a:t>rueckgabe</a:t>
+            </a:r>
+            <a:r>
+              <a:rPr lang="de-DE" sz="1000" dirty="0">
+                <a:solidFill>
+                  <a:srgbClr val="000000"/>
+                </a:solidFill>
+              </a:rPr>
+              <a:t> (</a:t>
+            </a:r>
+          </a:p>
+          <a:p>
+            <a:r>
+              <a:rPr lang="de-DE" sz="1000" dirty="0">
+                <a:solidFill>
+                  <a:srgbClr val="000000"/>
+                </a:solidFill>
+              </a:rPr>
+              <a:t>    </a:t>
+            </a:r>
+            <a:r>
+              <a:rPr lang="de-DE" sz="1000" dirty="0" err="1">
+                <a:solidFill>
+                  <a:srgbClr val="000000"/>
+                </a:solidFill>
+              </a:rPr>
+              <a:t>rueckgabe_id</a:t>
+            </a:r>
+            <a:r>
+              <a:rPr lang="de-DE" sz="1000" dirty="0">
+                <a:solidFill>
+                  <a:srgbClr val="000000"/>
+                </a:solidFill>
+              </a:rPr>
+              <a:t>            NUMBER          DEFAULT </a:t>
+            </a:r>
+            <a:r>
+              <a:rPr lang="de-DE" sz="1000" dirty="0" err="1">
+                <a:solidFill>
+                  <a:srgbClr val="000000"/>
+                </a:solidFill>
+              </a:rPr>
+              <a:t>seq_rueckgabe.NEXTVAL</a:t>
+            </a:r>
+            <a:r>
+              <a:rPr lang="de-DE" sz="1000" dirty="0">
+                <a:solidFill>
+                  <a:srgbClr val="000000"/>
+                </a:solidFill>
+              </a:rPr>
+              <a:t> PRIMARY KEY,</a:t>
+            </a:r>
+          </a:p>
+          <a:p>
+            <a:r>
+              <a:rPr lang="de-DE" sz="1000" dirty="0">
+                <a:solidFill>
+                  <a:srgbClr val="000000"/>
+                </a:solidFill>
+              </a:rPr>
+              <a:t>    </a:t>
+            </a:r>
+            <a:r>
+              <a:rPr lang="de-DE" sz="1000" dirty="0" err="1">
+                <a:solidFill>
+                  <a:srgbClr val="000000"/>
+                </a:solidFill>
+              </a:rPr>
+              <a:t>ausleihe_id</a:t>
+            </a:r>
+            <a:r>
+              <a:rPr lang="de-DE" sz="1000" dirty="0">
+                <a:solidFill>
+                  <a:srgbClr val="000000"/>
+                </a:solidFill>
+              </a:rPr>
+              <a:t>             NUMBER          NOT NULL UNIQUE REFERENCES ausleihe(</a:t>
+            </a:r>
+            <a:r>
+              <a:rPr lang="de-DE" sz="1000" dirty="0" err="1">
+                <a:solidFill>
+                  <a:srgbClr val="000000"/>
+                </a:solidFill>
+              </a:rPr>
+              <a:t>ausleihe_id</a:t>
+            </a:r>
+            <a:r>
+              <a:rPr lang="de-DE" sz="1000" dirty="0">
+                <a:solidFill>
+                  <a:srgbClr val="000000"/>
+                </a:solidFill>
+              </a:rPr>
+              <a:t>),</a:t>
+            </a:r>
+          </a:p>
+          <a:p>
+            <a:r>
+              <a:rPr lang="de-DE" sz="1000" dirty="0">
+                <a:solidFill>
+                  <a:srgbClr val="000000"/>
+                </a:solidFill>
+              </a:rPr>
+              <a:t>    </a:t>
+            </a:r>
+            <a:r>
+              <a:rPr lang="de-DE" sz="1000" dirty="0" err="1">
+                <a:solidFill>
+                  <a:srgbClr val="000000"/>
+                </a:solidFill>
+              </a:rPr>
+              <a:t>exemplar_id</a:t>
+            </a:r>
+            <a:r>
+              <a:rPr lang="de-DE" sz="1000" dirty="0">
+                <a:solidFill>
+                  <a:srgbClr val="000000"/>
+                </a:solidFill>
+              </a:rPr>
+              <a:t>             NUMBER          NOT NULL REFERENCES </a:t>
+            </a:r>
+            <a:r>
+              <a:rPr lang="de-DE" sz="1000" dirty="0" err="1">
+                <a:solidFill>
+                  <a:srgbClr val="000000"/>
+                </a:solidFill>
+              </a:rPr>
+              <a:t>exemplar</a:t>
+            </a:r>
+            <a:r>
+              <a:rPr lang="de-DE" sz="1000" dirty="0">
+                <a:solidFill>
+                  <a:srgbClr val="000000"/>
+                </a:solidFill>
+              </a:rPr>
+              <a:t>(</a:t>
+            </a:r>
+            <a:r>
+              <a:rPr lang="de-DE" sz="1000" dirty="0" err="1">
+                <a:solidFill>
+                  <a:srgbClr val="000000"/>
+                </a:solidFill>
+              </a:rPr>
+              <a:t>exemplar_id</a:t>
+            </a:r>
+            <a:r>
+              <a:rPr lang="de-DE" sz="1000" dirty="0">
+                <a:solidFill>
+                  <a:srgbClr val="000000"/>
+                </a:solidFill>
+              </a:rPr>
+              <a:t>),</a:t>
+            </a:r>
+          </a:p>
+          <a:p>
+            <a:r>
+              <a:rPr lang="de-DE" sz="1000" dirty="0">
+                <a:solidFill>
+                  <a:srgbClr val="000000"/>
+                </a:solidFill>
+              </a:rPr>
+              <a:t>    </a:t>
+            </a:r>
+            <a:r>
+              <a:rPr lang="de-DE" sz="1000" dirty="0" err="1">
+                <a:solidFill>
+                  <a:srgbClr val="000000"/>
+                </a:solidFill>
+              </a:rPr>
+              <a:t>rueckgabedatum</a:t>
+            </a:r>
+            <a:r>
+              <a:rPr lang="de-DE" sz="1000" dirty="0">
+                <a:solidFill>
+                  <a:srgbClr val="000000"/>
+                </a:solidFill>
+              </a:rPr>
+              <a:t>          DATE            DEFAULT SYSDATE NOT NULL,</a:t>
+            </a:r>
+          </a:p>
+          <a:p>
+            <a:r>
+              <a:rPr lang="de-DE" sz="1000" dirty="0">
+                <a:solidFill>
+                  <a:srgbClr val="000000"/>
+                </a:solidFill>
+              </a:rPr>
+              <a:t>    </a:t>
+            </a:r>
+            <a:r>
+              <a:rPr lang="de-DE" sz="1000" dirty="0" err="1">
+                <a:solidFill>
+                  <a:srgbClr val="000000"/>
+                </a:solidFill>
+              </a:rPr>
+              <a:t>zustand_bei_rueckgabe</a:t>
+            </a:r>
+            <a:r>
+              <a:rPr lang="de-DE" sz="1000" dirty="0">
+                <a:solidFill>
+                  <a:srgbClr val="000000"/>
+                </a:solidFill>
+              </a:rPr>
+              <a:t>   VARCHAR2(20)    NOT NULL CHECK (</a:t>
+            </a:r>
+            <a:r>
+              <a:rPr lang="de-DE" sz="1000" dirty="0" err="1">
+                <a:solidFill>
+                  <a:srgbClr val="000000"/>
+                </a:solidFill>
+              </a:rPr>
+              <a:t>zustand_bei_rueckgabe</a:t>
+            </a:r>
+            <a:r>
+              <a:rPr lang="de-DE" sz="1000" dirty="0">
+                <a:solidFill>
+                  <a:srgbClr val="000000"/>
+                </a:solidFill>
+              </a:rPr>
+              <a:t> IN ('NEU','GUT','AKZEPTABEL','SCHLECHT'))</a:t>
+            </a:r>
+          </a:p>
+          <a:p>
+            <a:r>
+              <a:rPr lang="de-DE" sz="1000" dirty="0">
+                <a:solidFill>
+                  <a:srgbClr val="000000"/>
+                </a:solidFill>
+              </a:rPr>
+              <a:t>);</a:t>
+            </a:r>
+          </a:p>
+          <a:p>
+            <a:endParaRPr lang="de-DE" sz="1000" dirty="0">
+              <a:solidFill>
+                <a:srgbClr val="000000"/>
+              </a:solidFill>
+            </a:endParaRPr>
+          </a:p>
+          <a:p>
+            <a:r>
+              <a:rPr lang="de-DE" sz="1000" dirty="0">
+                <a:solidFill>
+                  <a:srgbClr val="000000"/>
+                </a:solidFill>
+              </a:rPr>
+              <a:t>SELECT </a:t>
+            </a:r>
+            <a:r>
+              <a:rPr lang="de-DE" sz="1000" dirty="0" err="1">
+                <a:solidFill>
+                  <a:srgbClr val="000000"/>
+                </a:solidFill>
+              </a:rPr>
+              <a:t>r.rueckgabedatum</a:t>
+            </a:r>
+            <a:r>
+              <a:rPr lang="de-DE" sz="1000" dirty="0">
+                <a:solidFill>
+                  <a:srgbClr val="000000"/>
+                </a:solidFill>
+              </a:rPr>
+              <a:t>, </a:t>
+            </a:r>
+            <a:r>
+              <a:rPr lang="de-DE" sz="1000" dirty="0" err="1">
+                <a:solidFill>
+                  <a:srgbClr val="000000"/>
+                </a:solidFill>
+              </a:rPr>
+              <a:t>r.zustand_bei_rueckgabe</a:t>
+            </a:r>
+            <a:r>
+              <a:rPr lang="de-DE" sz="1000" dirty="0">
+                <a:solidFill>
+                  <a:srgbClr val="000000"/>
+                </a:solidFill>
+              </a:rPr>
+              <a:t>,</a:t>
+            </a:r>
+          </a:p>
+          <a:p>
+            <a:r>
+              <a:rPr lang="de-DE" sz="1000" dirty="0">
+                <a:solidFill>
+                  <a:srgbClr val="000000"/>
+                </a:solidFill>
+              </a:rPr>
+              <a:t>       </a:t>
+            </a:r>
+            <a:r>
+              <a:rPr lang="de-DE" sz="1000" dirty="0" err="1">
+                <a:solidFill>
+                  <a:srgbClr val="000000"/>
+                </a:solidFill>
+              </a:rPr>
+              <a:t>n.vorname</a:t>
+            </a:r>
+            <a:r>
+              <a:rPr lang="de-DE" sz="1000" dirty="0">
+                <a:solidFill>
+                  <a:srgbClr val="000000"/>
+                </a:solidFill>
+              </a:rPr>
+              <a:t> || ' ' || </a:t>
+            </a:r>
+            <a:r>
+              <a:rPr lang="de-DE" sz="1000" dirty="0" err="1">
+                <a:solidFill>
+                  <a:srgbClr val="000000"/>
+                </a:solidFill>
+              </a:rPr>
+              <a:t>n.nachname</a:t>
+            </a:r>
+            <a:r>
+              <a:rPr lang="de-DE" sz="1000" dirty="0">
+                <a:solidFill>
+                  <a:srgbClr val="000000"/>
+                </a:solidFill>
+              </a:rPr>
+              <a:t> AS </a:t>
+            </a:r>
+            <a:r>
+              <a:rPr lang="de-DE" sz="1000" dirty="0" err="1">
+                <a:solidFill>
+                  <a:srgbClr val="000000"/>
+                </a:solidFill>
+              </a:rPr>
+              <a:t>leiher</a:t>
+            </a:r>
+            <a:endParaRPr lang="de-DE" sz="1000" dirty="0">
+              <a:solidFill>
+                <a:srgbClr val="000000"/>
+              </a:solidFill>
+            </a:endParaRPr>
+          </a:p>
+          <a:p>
+            <a:r>
+              <a:rPr lang="de-DE" sz="1000" dirty="0">
+                <a:solidFill>
+                  <a:srgbClr val="000000"/>
+                </a:solidFill>
+              </a:rPr>
+              <a:t>FROM </a:t>
+            </a:r>
+            <a:r>
+              <a:rPr lang="de-DE" sz="1000" dirty="0" err="1">
+                <a:solidFill>
+                  <a:srgbClr val="000000"/>
+                </a:solidFill>
+              </a:rPr>
+              <a:t>rueckgabe</a:t>
+            </a:r>
+            <a:r>
+              <a:rPr lang="de-DE" sz="1000" dirty="0">
+                <a:solidFill>
+                  <a:srgbClr val="000000"/>
+                </a:solidFill>
+              </a:rPr>
+              <a:t> r</a:t>
+            </a:r>
+          </a:p>
+          <a:p>
+            <a:r>
+              <a:rPr lang="de-DE" sz="1000" dirty="0">
+                <a:solidFill>
+                  <a:srgbClr val="000000"/>
+                </a:solidFill>
+              </a:rPr>
+              <a:t>JOIN ausleihe a ON </a:t>
+            </a:r>
+            <a:r>
+              <a:rPr lang="de-DE" sz="1000" dirty="0" err="1">
+                <a:solidFill>
+                  <a:srgbClr val="000000"/>
+                </a:solidFill>
+              </a:rPr>
+              <a:t>a.ausleihe_id</a:t>
+            </a:r>
+            <a:r>
+              <a:rPr lang="de-DE" sz="1000" dirty="0">
+                <a:solidFill>
+                  <a:srgbClr val="000000"/>
+                </a:solidFill>
+              </a:rPr>
+              <a:t> = </a:t>
+            </a:r>
+            <a:r>
+              <a:rPr lang="de-DE" sz="1000" dirty="0" err="1">
+                <a:solidFill>
+                  <a:srgbClr val="000000"/>
+                </a:solidFill>
+              </a:rPr>
+              <a:t>r.ausleihe_id</a:t>
+            </a:r>
+            <a:endParaRPr lang="de-DE" sz="1000" dirty="0">
+              <a:solidFill>
+                <a:srgbClr val="000000"/>
+              </a:solidFill>
+            </a:endParaRPr>
+          </a:p>
+          <a:p>
+            <a:r>
+              <a:rPr lang="de-DE" sz="1000" dirty="0">
+                <a:solidFill>
+                  <a:srgbClr val="000000"/>
+                </a:solidFill>
+              </a:rPr>
+              <a:t>JOIN ausleihanfrage an ON </a:t>
+            </a:r>
+            <a:r>
+              <a:rPr lang="de-DE" sz="1000" dirty="0" err="1">
+                <a:solidFill>
+                  <a:srgbClr val="000000"/>
+                </a:solidFill>
+              </a:rPr>
+              <a:t>an.anfrage_id</a:t>
+            </a:r>
+            <a:r>
+              <a:rPr lang="de-DE" sz="1000" dirty="0">
+                <a:solidFill>
+                  <a:srgbClr val="000000"/>
+                </a:solidFill>
+              </a:rPr>
+              <a:t> = </a:t>
+            </a:r>
+            <a:r>
+              <a:rPr lang="de-DE" sz="1000" dirty="0" err="1">
+                <a:solidFill>
+                  <a:srgbClr val="000000"/>
+                </a:solidFill>
+              </a:rPr>
+              <a:t>a.anfrage_id</a:t>
+            </a:r>
+            <a:endParaRPr lang="de-DE" sz="1000" dirty="0">
+              <a:solidFill>
+                <a:srgbClr val="000000"/>
+              </a:solidFill>
+            </a:endParaRPr>
+          </a:p>
+          <a:p>
+            <a:r>
+              <a:rPr lang="de-DE" sz="1000" dirty="0">
+                <a:solidFill>
+                  <a:srgbClr val="000000"/>
+                </a:solidFill>
+              </a:rPr>
+              <a:t>JOIN </a:t>
+            </a:r>
+            <a:r>
+              <a:rPr lang="de-DE" sz="1000" dirty="0" err="1">
+                <a:solidFill>
+                  <a:srgbClr val="000000"/>
+                </a:solidFill>
+              </a:rPr>
+              <a:t>nutzer</a:t>
+            </a:r>
+            <a:r>
+              <a:rPr lang="de-DE" sz="1000" dirty="0">
+                <a:solidFill>
+                  <a:srgbClr val="000000"/>
+                </a:solidFill>
+              </a:rPr>
+              <a:t> n ON </a:t>
+            </a:r>
+            <a:r>
+              <a:rPr lang="de-DE" sz="1000" dirty="0" err="1">
+                <a:solidFill>
+                  <a:srgbClr val="000000"/>
+                </a:solidFill>
+              </a:rPr>
+              <a:t>n.nutzer_id</a:t>
+            </a:r>
+            <a:r>
+              <a:rPr lang="de-DE" sz="1000" dirty="0">
+                <a:solidFill>
+                  <a:srgbClr val="000000"/>
+                </a:solidFill>
+              </a:rPr>
+              <a:t> = </a:t>
+            </a:r>
+            <a:r>
+              <a:rPr lang="de-DE" sz="1000" dirty="0" err="1">
+                <a:solidFill>
+                  <a:srgbClr val="000000"/>
+                </a:solidFill>
+              </a:rPr>
+              <a:t>an.leiher_id</a:t>
+            </a:r>
+            <a:endParaRPr lang="de-DE" sz="1000" dirty="0">
+              <a:solidFill>
+                <a:srgbClr val="000000"/>
+              </a:solidFill>
+            </a:endParaRPr>
+          </a:p>
+          <a:p>
+            <a:r>
+              <a:rPr lang="de-DE" sz="1000" dirty="0">
+                <a:solidFill>
+                  <a:srgbClr val="000000"/>
+                </a:solidFill>
+              </a:rPr>
+              <a:t>WHERE </a:t>
+            </a:r>
+            <a:r>
+              <a:rPr lang="de-DE" sz="1000" dirty="0" err="1">
+                <a:solidFill>
+                  <a:srgbClr val="000000"/>
+                </a:solidFill>
+              </a:rPr>
+              <a:t>r.exemplar_id</a:t>
+            </a:r>
+            <a:r>
+              <a:rPr lang="de-DE" sz="1000" dirty="0">
+                <a:solidFill>
+                  <a:srgbClr val="000000"/>
+                </a:solidFill>
+              </a:rPr>
+              <a:t> = 5</a:t>
+            </a:r>
+          </a:p>
+          <a:p>
+            <a:r>
+              <a:rPr lang="de-DE" sz="1000" dirty="0">
+                <a:solidFill>
+                  <a:srgbClr val="000000"/>
+                </a:solidFill>
+              </a:rPr>
+              <a:t>ORDER BY </a:t>
+            </a:r>
+            <a:r>
+              <a:rPr lang="de-DE" sz="1000" dirty="0" err="1">
+                <a:solidFill>
+                  <a:srgbClr val="000000"/>
+                </a:solidFill>
+              </a:rPr>
+              <a:t>r.rueckgabedatum</a:t>
+            </a:r>
+            <a:r>
+              <a:rPr lang="de-DE" sz="1000" dirty="0">
+                <a:solidFill>
+                  <a:srgbClr val="000000"/>
+                </a:solidFill>
+              </a:rPr>
+              <a:t>;</a:t>
+            </a:r>
+          </a:p>
+        </p:txBody>
+      </p:sp>
+      <p:sp>
+        <p:nvSpPr>
+          <p:cNvPr id="6" name="Inhaltsplatzhalter 4">
+            <a:extLst>
+              <a:ext uri="{FF2B5EF4-FFF2-40B4-BE49-F238E27FC236}">
+                <a16:creationId xmlns:a16="http://schemas.microsoft.com/office/drawing/2014/main" id="{5A1AEC29-E85B-6B4A-945E-FC45A6C26FE0}"/>
+              </a:ext>
+            </a:extLst>
+          </p:cNvPr>
+          <p:cNvSpPr txBox="1">
+            <a:spLocks/>
+          </p:cNvSpPr>
+          <p:nvPr/>
+        </p:nvSpPr>
+        <p:spPr>
+          <a:xfrm>
+            <a:off x="5924551" y="432000"/>
+            <a:ext cx="6267450" cy="6426000"/>
+          </a:xfrm>
+          <a:prstGeom prst="rect">
+            <a:avLst/>
+          </a:prstGeom>
+          <a:solidFill>
+            <a:srgbClr val="BBFFB8"/>
+          </a:solidFill>
+        </p:spPr>
+        <p:txBody>
+          <a:bodyPr vert="horz" lIns="180000" tIns="180000" rIns="91440" bIns="45720" rtlCol="0">
+            <a:noAutofit/>
+          </a:bodyPr>
+          <a:lstStyle>
+            <a:lvl1pPr marL="228600" indent="-228600" algn="l" defTabSz="914400" rtl="0" eaLnBrk="1" latinLnBrk="0" hangingPunct="1">
+              <a:lnSpc>
+                <a:spcPct val="90000"/>
+              </a:lnSpc>
+              <a:spcBef>
+                <a:spcPts val="1000"/>
+              </a:spcBef>
+              <a:buFont typeface="Wingdings" panose="05000000000000000000" pitchFamily="2" charset="2"/>
+              <a:buChar char="§"/>
+              <a:defRPr sz="2800" b="0" kern="1200">
+                <a:solidFill>
+                  <a:srgbClr val="000000"/>
+                </a:solidFill>
+                <a:latin typeface="+mn-lt"/>
+                <a:ea typeface="+mn-ea"/>
+                <a:cs typeface="+mn-cs"/>
+              </a:defRPr>
+            </a:lvl1pPr>
+            <a:lvl2pPr marL="685800" indent="-228600" algn="l" defTabSz="914400" rtl="0" eaLnBrk="1" latinLnBrk="0" hangingPunct="1">
+              <a:lnSpc>
+                <a:spcPct val="90000"/>
+              </a:lnSpc>
+              <a:spcBef>
+                <a:spcPts val="500"/>
+              </a:spcBef>
+              <a:buFont typeface="Wingdings" panose="05000000000000000000" pitchFamily="2" charset="2"/>
+              <a:buChar char="§"/>
+              <a:defRPr sz="2400" b="0" kern="1200">
+                <a:solidFill>
+                  <a:srgbClr val="000000"/>
+                </a:solidFill>
+                <a:latin typeface="+mn-lt"/>
+                <a:ea typeface="+mn-ea"/>
+                <a:cs typeface="+mn-cs"/>
+              </a:defRPr>
+            </a:lvl2pPr>
+            <a:lvl3pPr marL="1143000" indent="-228600" algn="l" defTabSz="914400" rtl="0" eaLnBrk="1" latinLnBrk="0" hangingPunct="1">
+              <a:lnSpc>
+                <a:spcPct val="90000"/>
+              </a:lnSpc>
+              <a:spcBef>
+                <a:spcPts val="500"/>
+              </a:spcBef>
+              <a:buFont typeface="Wingdings" panose="05000000000000000000" pitchFamily="2" charset="2"/>
+              <a:buChar char="§"/>
+              <a:defRPr sz="2000" b="0" kern="1200">
+                <a:solidFill>
+                  <a:srgbClr val="000000"/>
+                </a:solidFill>
+                <a:latin typeface="+mn-lt"/>
+                <a:ea typeface="+mn-ea"/>
+                <a:cs typeface="+mn-cs"/>
+              </a:defRPr>
+            </a:lvl3pPr>
+            <a:lvl4pPr marL="1600200" indent="-228600" algn="l" defTabSz="914400" rtl="0" eaLnBrk="1" latinLnBrk="0" hangingPunct="1">
+              <a:lnSpc>
+                <a:spcPct val="90000"/>
+              </a:lnSpc>
+              <a:spcBef>
+                <a:spcPts val="500"/>
+              </a:spcBef>
+              <a:buFont typeface="Wingdings" panose="05000000000000000000" pitchFamily="2" charset="2"/>
+              <a:buChar char="§"/>
+              <a:defRPr sz="1800" b="0" kern="1200">
+                <a:solidFill>
+                  <a:srgbClr val="000000"/>
+                </a:solidFill>
+                <a:latin typeface="+mn-lt"/>
+                <a:ea typeface="+mn-ea"/>
+                <a:cs typeface="+mn-cs"/>
+              </a:defRPr>
+            </a:lvl4pPr>
+            <a:lvl5pPr marL="2057400" indent="-228600" algn="l" defTabSz="914400" rtl="0" eaLnBrk="1" latinLnBrk="0" hangingPunct="1">
+              <a:lnSpc>
+                <a:spcPct val="90000"/>
+              </a:lnSpc>
+              <a:spcBef>
+                <a:spcPts val="500"/>
+              </a:spcBef>
+              <a:buFont typeface="Wingdings" panose="05000000000000000000" pitchFamily="2" charset="2"/>
+              <a:buChar char="§"/>
+              <a:defRPr sz="1800" b="0" kern="1200">
+                <a:solidFill>
+                  <a:srgbClr val="000000"/>
+                </a:solidFill>
+                <a:latin typeface="+mn-lt"/>
+                <a:ea typeface="+mn-ea"/>
+                <a:cs typeface="+mn-cs"/>
+              </a:defRPr>
+            </a:lvl5pPr>
+            <a:lvl6pPr marL="2514600" indent="-228600" algn="l" defTabSz="914400" rtl="0" eaLnBrk="1" latinLnBrk="0" hangingPunct="1">
+              <a:lnSpc>
+                <a:spcPct val="90000"/>
+              </a:lnSpc>
+              <a:spcBef>
+                <a:spcPts val="500"/>
+              </a:spcBef>
+              <a:buFont typeface="Arial" panose="020B0604020202020204" pitchFamily="34" charset="0"/>
+              <a:buChar char="•"/>
+              <a:defRPr sz="1800" kern="1200">
+                <a:solidFill>
+                  <a:schemeClr val="tx1"/>
+                </a:solidFill>
+                <a:latin typeface="+mn-lt"/>
+                <a:ea typeface="+mn-ea"/>
+                <a:cs typeface="+mn-cs"/>
+              </a:defRPr>
+            </a:lvl6pPr>
+            <a:lvl7pPr marL="2971800" indent="-228600" algn="l" defTabSz="914400" rtl="0" eaLnBrk="1" latinLnBrk="0" hangingPunct="1">
+              <a:lnSpc>
+                <a:spcPct val="90000"/>
+              </a:lnSpc>
+              <a:spcBef>
+                <a:spcPts val="500"/>
+              </a:spcBef>
+              <a:buFont typeface="Arial" panose="020B0604020202020204" pitchFamily="34" charset="0"/>
+              <a:buChar char="•"/>
+              <a:defRPr sz="1800" kern="1200">
+                <a:solidFill>
+                  <a:schemeClr val="tx1"/>
+                </a:solidFill>
+                <a:latin typeface="+mn-lt"/>
+                <a:ea typeface="+mn-ea"/>
+                <a:cs typeface="+mn-cs"/>
+              </a:defRPr>
+            </a:lvl7pPr>
+            <a:lvl8pPr marL="3429000" indent="-228600" algn="l" defTabSz="914400" rtl="0" eaLnBrk="1" latinLnBrk="0" hangingPunct="1">
+              <a:lnSpc>
+                <a:spcPct val="90000"/>
+              </a:lnSpc>
+              <a:spcBef>
+                <a:spcPts val="500"/>
+              </a:spcBef>
+              <a:buFont typeface="Arial" panose="020B0604020202020204" pitchFamily="34" charset="0"/>
+              <a:buChar char="•"/>
+              <a:defRPr sz="1800" kern="1200">
+                <a:solidFill>
+                  <a:schemeClr val="tx1"/>
+                </a:solidFill>
+                <a:latin typeface="+mn-lt"/>
+                <a:ea typeface="+mn-ea"/>
+                <a:cs typeface="+mn-cs"/>
+              </a:defRPr>
+            </a:lvl8pPr>
+            <a:lvl9pPr marL="3886200" indent="-228600" algn="l" defTabSz="914400" rtl="0" eaLnBrk="1" latinLnBrk="0" hangingPunct="1">
+              <a:lnSpc>
+                <a:spcPct val="90000"/>
+              </a:lnSpc>
+              <a:spcBef>
+                <a:spcPts val="500"/>
+              </a:spcBef>
+              <a:buFont typeface="Arial" panose="020B0604020202020204" pitchFamily="34" charset="0"/>
+              <a:buChar char="•"/>
+              <a:defRPr sz="1800" kern="1200">
+                <a:solidFill>
+                  <a:schemeClr val="tx1"/>
+                </a:solidFill>
+                <a:latin typeface="+mn-lt"/>
+                <a:ea typeface="+mn-ea"/>
+                <a:cs typeface="+mn-cs"/>
+              </a:defRPr>
+            </a:lvl9pPr>
+          </a:lstStyle>
+          <a:p>
+            <a:pPr marL="0" indent="0">
+              <a:lnSpc>
+                <a:spcPct val="100000"/>
+              </a:lnSpc>
+              <a:spcBef>
+                <a:spcPts val="0"/>
+              </a:spcBef>
+              <a:buFont typeface="Wingdings" panose="05000000000000000000" pitchFamily="2" charset="2"/>
+              <a:buNone/>
+            </a:pPr>
+            <a:endParaRPr lang="de-DE" sz="1400"/>
+          </a:p>
+          <a:p>
+            <a:pPr marL="0" indent="0">
+              <a:lnSpc>
+                <a:spcPct val="100000"/>
+              </a:lnSpc>
+              <a:spcBef>
+                <a:spcPts val="0"/>
+              </a:spcBef>
+              <a:buFont typeface="Wingdings" panose="05000000000000000000" pitchFamily="2" charset="2"/>
+              <a:buNone/>
+            </a:pPr>
+            <a:endParaRPr lang="de-DE" sz="1400"/>
+          </a:p>
+          <a:p>
+            <a:pPr marL="0" indent="0">
+              <a:lnSpc>
+                <a:spcPct val="100000"/>
+              </a:lnSpc>
+              <a:spcBef>
+                <a:spcPts val="0"/>
+              </a:spcBef>
+              <a:buFont typeface="Wingdings" panose="05000000000000000000" pitchFamily="2" charset="2"/>
+              <a:buNone/>
+            </a:pPr>
+            <a:endParaRPr lang="de-DE" sz="1400" dirty="0"/>
+          </a:p>
+        </p:txBody>
+      </p:sp>
+      <p:sp>
+        <p:nvSpPr>
+          <p:cNvPr id="4" name="Titel 3">
+            <a:extLst>
+              <a:ext uri="{FF2B5EF4-FFF2-40B4-BE49-F238E27FC236}">
+                <a16:creationId xmlns:a16="http://schemas.microsoft.com/office/drawing/2014/main" id="{440D81F5-E894-02D5-DA11-0F73A44B4FE6}"/>
+              </a:ext>
+            </a:extLst>
+          </p:cNvPr>
+          <p:cNvSpPr>
+            <a:spLocks noGrp="1"/>
+          </p:cNvSpPr>
+          <p:nvPr>
+            <p:ph type="title"/>
+          </p:nvPr>
+        </p:nvSpPr>
+        <p:spPr>
+          <a:xfrm>
+            <a:off x="0" y="0"/>
+            <a:ext cx="12192000" cy="432000"/>
+          </a:xfrm>
+          <a:solidFill>
+            <a:srgbClr val="79B747"/>
+          </a:solidFill>
+        </p:spPr>
+        <p:txBody>
+          <a:bodyPr>
+            <a:noAutofit/>
+          </a:bodyPr>
+          <a:lstStyle/>
+          <a:p>
+            <a:r>
+              <a:rPr lang="de-DE" sz="2800" dirty="0"/>
+              <a:t>Tabelle: </a:t>
+            </a:r>
+            <a:r>
+              <a:rPr lang="de-DE" sz="2800" dirty="0" err="1"/>
+              <a:t>Rueckgabe</a:t>
+            </a:r>
+            <a:endParaRPr lang="de-DE" sz="2800" dirty="0"/>
+          </a:p>
+        </p:txBody>
+      </p:sp>
+      <p:sp>
+        <p:nvSpPr>
+          <p:cNvPr id="7" name="Textplatzhalter 1">
+            <a:extLst>
+              <a:ext uri="{FF2B5EF4-FFF2-40B4-BE49-F238E27FC236}">
+                <a16:creationId xmlns:a16="http://schemas.microsoft.com/office/drawing/2014/main" id="{0D1033BA-8F25-2525-2512-5DFABC918163}"/>
+              </a:ext>
+            </a:extLst>
+          </p:cNvPr>
+          <p:cNvSpPr txBox="1">
+            <a:spLocks/>
+          </p:cNvSpPr>
+          <p:nvPr/>
+        </p:nvSpPr>
+        <p:spPr>
+          <a:xfrm>
+            <a:off x="7472038" y="684641"/>
+            <a:ext cx="3172475" cy="2110646"/>
+          </a:xfrm>
+          <a:prstGeom prst="rect">
+            <a:avLst/>
+          </a:prstGeom>
+          <a:solidFill>
+            <a:srgbClr val="FFFFFF"/>
+          </a:solidFill>
+          <a:ln w="12700">
+            <a:solidFill>
+              <a:srgbClr val="79B747"/>
+            </a:solidFill>
+          </a:ln>
+        </p:spPr>
+        <p:txBody>
+          <a:bodyPr lIns="180000" tIns="180000" anchor="t" anchorCtr="0">
+            <a:noAutofit/>
+          </a:bodyPr>
+          <a:lstStyle>
+            <a:lvl1pPr marL="228600" indent="-228600" algn="l" defTabSz="914400" rtl="0" eaLnBrk="1" latinLnBrk="0" hangingPunct="1">
+              <a:lnSpc>
+                <a:spcPct val="90000"/>
+              </a:lnSpc>
+              <a:spcBef>
+                <a:spcPts val="1000"/>
+              </a:spcBef>
+              <a:buFont typeface="Wingdings" panose="05000000000000000000" pitchFamily="2" charset="2"/>
+              <a:buChar char="§"/>
+              <a:defRPr sz="2800" kern="1200">
+                <a:solidFill>
+                  <a:srgbClr val="000000"/>
+                </a:solidFill>
+                <a:latin typeface="+mn-lt"/>
+                <a:ea typeface="+mn-ea"/>
+                <a:cs typeface="+mn-cs"/>
+              </a:defRPr>
+            </a:lvl1pPr>
+            <a:lvl2pPr marL="685800" indent="-228600" algn="l" defTabSz="914400" rtl="0" eaLnBrk="1" latinLnBrk="0" hangingPunct="1">
+              <a:lnSpc>
+                <a:spcPct val="90000"/>
+              </a:lnSpc>
+              <a:spcBef>
+                <a:spcPts val="500"/>
+              </a:spcBef>
+              <a:buFont typeface="Wingdings" panose="05000000000000000000" pitchFamily="2" charset="2"/>
+              <a:buChar char="§"/>
+              <a:defRPr sz="2400" kern="1200">
+                <a:solidFill>
+                  <a:srgbClr val="000000"/>
+                </a:solidFill>
+                <a:latin typeface="+mn-lt"/>
+                <a:ea typeface="+mn-ea"/>
+                <a:cs typeface="+mn-cs"/>
+              </a:defRPr>
+            </a:lvl2pPr>
+            <a:lvl3pPr marL="1143000" indent="-228600" algn="l" defTabSz="914400" rtl="0" eaLnBrk="1" latinLnBrk="0" hangingPunct="1">
+              <a:lnSpc>
+                <a:spcPct val="90000"/>
+              </a:lnSpc>
+              <a:spcBef>
+                <a:spcPts val="500"/>
+              </a:spcBef>
+              <a:buFont typeface="Wingdings" panose="05000000000000000000" pitchFamily="2" charset="2"/>
+              <a:buChar char="§"/>
+              <a:defRPr sz="2000" kern="1200">
+                <a:solidFill>
+                  <a:srgbClr val="000000"/>
+                </a:solidFill>
+                <a:latin typeface="+mn-lt"/>
+                <a:ea typeface="+mn-ea"/>
+                <a:cs typeface="+mn-cs"/>
+              </a:defRPr>
+            </a:lvl3pPr>
+            <a:lvl4pPr marL="1600200" indent="-228600" algn="l" defTabSz="914400" rtl="0" eaLnBrk="1" latinLnBrk="0" hangingPunct="1">
+              <a:lnSpc>
+                <a:spcPct val="90000"/>
+              </a:lnSpc>
+              <a:spcBef>
+                <a:spcPts val="500"/>
+              </a:spcBef>
+              <a:buFont typeface="Wingdings" panose="05000000000000000000" pitchFamily="2" charset="2"/>
+              <a:buChar char="§"/>
+              <a:defRPr sz="1800" kern="1200">
+                <a:solidFill>
+                  <a:srgbClr val="000000"/>
+                </a:solidFill>
+                <a:latin typeface="+mn-lt"/>
+                <a:ea typeface="+mn-ea"/>
+                <a:cs typeface="+mn-cs"/>
+              </a:defRPr>
+            </a:lvl4pPr>
+            <a:lvl5pPr marL="2057400" indent="-228600" algn="l" defTabSz="914400" rtl="0" eaLnBrk="1" latinLnBrk="0" hangingPunct="1">
+              <a:lnSpc>
+                <a:spcPct val="90000"/>
+              </a:lnSpc>
+              <a:spcBef>
+                <a:spcPts val="500"/>
+              </a:spcBef>
+              <a:buFont typeface="Wingdings" panose="05000000000000000000" pitchFamily="2" charset="2"/>
+              <a:buChar char="§"/>
+              <a:defRPr sz="1800" kern="1200">
+                <a:solidFill>
+                  <a:srgbClr val="000000"/>
+                </a:solidFill>
+                <a:latin typeface="+mn-lt"/>
+                <a:ea typeface="+mn-ea"/>
+                <a:cs typeface="+mn-cs"/>
+              </a:defRPr>
+            </a:lvl5pPr>
+            <a:lvl6pPr marL="2514600" indent="-228600" algn="l" defTabSz="914400" rtl="0" eaLnBrk="1" latinLnBrk="0" hangingPunct="1">
+              <a:lnSpc>
+                <a:spcPct val="90000"/>
+              </a:lnSpc>
+              <a:spcBef>
+                <a:spcPts val="500"/>
+              </a:spcBef>
+              <a:buFont typeface="Arial" panose="020B0604020202020204" pitchFamily="34" charset="0"/>
+              <a:buChar char="•"/>
+              <a:defRPr sz="1800" kern="1200">
+                <a:solidFill>
+                  <a:schemeClr val="tx1"/>
+                </a:solidFill>
+                <a:latin typeface="+mn-lt"/>
+                <a:ea typeface="+mn-ea"/>
+                <a:cs typeface="+mn-cs"/>
+              </a:defRPr>
+            </a:lvl6pPr>
+            <a:lvl7pPr marL="2971800" indent="-228600" algn="l" defTabSz="914400" rtl="0" eaLnBrk="1" latinLnBrk="0" hangingPunct="1">
+              <a:lnSpc>
+                <a:spcPct val="90000"/>
+              </a:lnSpc>
+              <a:spcBef>
+                <a:spcPts val="500"/>
+              </a:spcBef>
+              <a:buFont typeface="Arial" panose="020B0604020202020204" pitchFamily="34" charset="0"/>
+              <a:buChar char="•"/>
+              <a:defRPr sz="1800" kern="1200">
+                <a:solidFill>
+                  <a:schemeClr val="tx1"/>
+                </a:solidFill>
+                <a:latin typeface="+mn-lt"/>
+                <a:ea typeface="+mn-ea"/>
+                <a:cs typeface="+mn-cs"/>
+              </a:defRPr>
+            </a:lvl7pPr>
+            <a:lvl8pPr marL="3429000" indent="-228600" algn="l" defTabSz="914400" rtl="0" eaLnBrk="1" latinLnBrk="0" hangingPunct="1">
+              <a:lnSpc>
+                <a:spcPct val="90000"/>
+              </a:lnSpc>
+              <a:spcBef>
+                <a:spcPts val="500"/>
+              </a:spcBef>
+              <a:buFont typeface="Arial" panose="020B0604020202020204" pitchFamily="34" charset="0"/>
+              <a:buChar char="•"/>
+              <a:defRPr sz="1800" kern="1200">
+                <a:solidFill>
+                  <a:schemeClr val="tx1"/>
+                </a:solidFill>
+                <a:latin typeface="+mn-lt"/>
+                <a:ea typeface="+mn-ea"/>
+                <a:cs typeface="+mn-cs"/>
+              </a:defRPr>
+            </a:lvl8pPr>
+            <a:lvl9pPr marL="3886200" indent="-228600" algn="l" defTabSz="914400" rtl="0" eaLnBrk="1" latinLnBrk="0" hangingPunct="1">
+              <a:lnSpc>
+                <a:spcPct val="90000"/>
+              </a:lnSpc>
+              <a:spcBef>
+                <a:spcPts val="500"/>
+              </a:spcBef>
+              <a:buFont typeface="Arial" panose="020B0604020202020204" pitchFamily="34" charset="0"/>
+              <a:buChar char="•"/>
+              <a:defRPr sz="1800" kern="1200">
+                <a:solidFill>
+                  <a:schemeClr val="tx1"/>
+                </a:solidFill>
+                <a:latin typeface="+mn-lt"/>
+                <a:ea typeface="+mn-ea"/>
+                <a:cs typeface="+mn-cs"/>
+              </a:defRPr>
+            </a:lvl9pPr>
+          </a:lstStyle>
+          <a:p>
+            <a:pPr marL="0" indent="0">
+              <a:buNone/>
+            </a:pPr>
+            <a:r>
+              <a:rPr lang="de-DE" sz="1400" b="1" dirty="0"/>
+              <a:t>Rückgaben</a:t>
+            </a:r>
+          </a:p>
+          <a:p>
+            <a:pPr marL="0" indent="0">
+              <a:buNone/>
+            </a:pPr>
+            <a:r>
+              <a:rPr lang="de-DE" sz="1400" dirty="0"/>
+              <a:t>Ein Rückgabeeintrag bestätigt, dass ein Exemplar zurückgegeben wurde und hält den Zustand zum Rückgabezeitpunkt fest.</a:t>
+            </a:r>
+          </a:p>
+          <a:p>
+            <a:pPr marL="0" indent="0">
+              <a:buNone/>
+            </a:pPr>
+            <a:r>
+              <a:rPr lang="de-DE" sz="1400" dirty="0"/>
+              <a:t>Die Abfrage zeigt die Rückgabehistorie eines Exemplars über mehrere Ausleihen.</a:t>
+            </a:r>
+          </a:p>
+        </p:txBody>
+      </p:sp>
+      <p:sp>
+        <p:nvSpPr>
+          <p:cNvPr id="11" name="Pfeil: nach rechts 10">
+            <a:extLst>
+              <a:ext uri="{FF2B5EF4-FFF2-40B4-BE49-F238E27FC236}">
+                <a16:creationId xmlns:a16="http://schemas.microsoft.com/office/drawing/2014/main" id="{0632EC11-1F0B-9C1B-9B07-669E03A0DA4A}"/>
+              </a:ext>
+            </a:extLst>
+          </p:cNvPr>
+          <p:cNvSpPr/>
+          <p:nvPr/>
+        </p:nvSpPr>
+        <p:spPr>
+          <a:xfrm>
+            <a:off x="1076462" y="4249555"/>
+            <a:ext cx="644375" cy="503227"/>
+          </a:xfrm>
+          <a:prstGeom prst="rightArrow">
+            <a:avLst/>
+          </a:prstGeom>
+          <a:solidFill>
+            <a:srgbClr val="79B747"/>
+          </a:solidFill>
+          <a:ln>
+            <a:noFill/>
+          </a:ln>
+        </p:spPr>
+        <p:style>
+          <a:lnRef idx="2">
+            <a:schemeClr val="accent1">
+              <a:shade val="15000"/>
+            </a:schemeClr>
+          </a:lnRef>
+          <a:fillRef idx="1">
+            <a:schemeClr val="accent1"/>
+          </a:fillRef>
+          <a:effectRef idx="0">
+            <a:schemeClr val="accent1"/>
+          </a:effectRef>
+          <a:fontRef idx="minor">
+            <a:schemeClr val="lt1"/>
+          </a:fontRef>
+        </p:style>
+        <p:txBody>
+          <a:bodyPr rtlCol="0" anchor="ctr"/>
+          <a:lstStyle/>
+          <a:p>
+            <a:pPr algn="ctr"/>
+            <a:endParaRPr lang="de-DE"/>
+          </a:p>
+        </p:txBody>
+      </p:sp>
+      <p:pic>
+        <p:nvPicPr>
+          <p:cNvPr id="8" name="Grafik 7">
+            <a:extLst>
+              <a:ext uri="{FF2B5EF4-FFF2-40B4-BE49-F238E27FC236}">
+                <a16:creationId xmlns:a16="http://schemas.microsoft.com/office/drawing/2014/main" id="{D48A7ECC-A4A5-B697-89E2-BF826D1A3D14}"/>
+              </a:ext>
+            </a:extLst>
+          </p:cNvPr>
+          <p:cNvPicPr>
+            <a:picLocks noChangeAspect="1"/>
+          </p:cNvPicPr>
+          <p:nvPr/>
+        </p:nvPicPr>
+        <p:blipFill>
+          <a:blip r:embed="rId2"/>
+          <a:stretch>
+            <a:fillRect/>
+          </a:stretch>
+        </p:blipFill>
+        <p:spPr>
+          <a:xfrm>
+            <a:off x="1926268" y="4132850"/>
+            <a:ext cx="3733992" cy="736638"/>
+          </a:xfrm>
+          <a:prstGeom prst="rect">
+            <a:avLst/>
+          </a:prstGeom>
+        </p:spPr>
+      </p:pic>
+    </p:spTree>
+    <p:extLst>
+      <p:ext uri="{BB962C8B-B14F-4D97-AF65-F5344CB8AC3E}">
+        <p14:creationId xmlns:p14="http://schemas.microsoft.com/office/powerpoint/2010/main" val="124267234"/>
+      </p:ext>
+    </p:extLst>
+  </p:cSld>
+  <p:clrMapOvr>
+    <a:masterClrMapping/>
+  </p:clrMapOvr>
+</p:sld>
+</file>
+
+<file path=ppt/slides/slide18.xml><?xml version="1.0" encoding="utf-8"?>
 <p:sld xmlns:a="http://schemas.openxmlformats.org/drawingml/2006/main" xmlns:r="http://schemas.openxmlformats.org/officeDocument/2006/relationships" xmlns:p="http://schemas.openxmlformats.org/presentationml/2006/main">
   <p:cSld>
     <p:spTree>
@@ -13049,7 +17059,7 @@
         <p:spPr>
           <a:xfrm>
             <a:off x="331640" y="684640"/>
-            <a:ext cx="5168720" cy="246221"/>
+            <a:ext cx="5168720" cy="3477875"/>
           </a:xfrm>
           <a:prstGeom prst="rect">
             <a:avLst/>
@@ -13066,18 +17076,712 @@
           <a:lstStyle/>
           <a:p>
             <a:r>
-              <a:rPr lang="en-US" sz="1000">
-                <a:solidFill>
-                  <a:srgbClr val="000000"/>
-                </a:solidFill>
-              </a:rPr>
-              <a:t>CREATE SEQUENCE seq_anfrage_nachricht START WITH 1000 INCREMENT BY 1 NOCACHE;</a:t>
+              <a:rPr lang="en-US" sz="1000" dirty="0">
+                <a:solidFill>
+                  <a:srgbClr val="000000"/>
+                </a:solidFill>
+              </a:rPr>
+              <a:t>CREATE SEQUENCE </a:t>
+            </a:r>
+            <a:r>
+              <a:rPr lang="en-US" sz="1000" dirty="0" err="1">
+                <a:solidFill>
+                  <a:srgbClr val="000000"/>
+                </a:solidFill>
+              </a:rPr>
+              <a:t>seq_anfrage_nachricht</a:t>
+            </a:r>
+            <a:r>
+              <a:rPr lang="en-US" sz="1000" dirty="0">
+                <a:solidFill>
+                  <a:srgbClr val="000000"/>
+                </a:solidFill>
+              </a:rPr>
+              <a:t> START WITH 1000 INCREMENT BY 1 NOCACHE;</a:t>
+            </a:r>
+            <a:br>
+              <a:rPr lang="en-US" sz="1000" dirty="0">
+                <a:solidFill>
+                  <a:srgbClr val="000000"/>
+                </a:solidFill>
+              </a:rPr>
+            </a:br>
+            <a:br>
+              <a:rPr lang="en-US" sz="1000" dirty="0">
+                <a:solidFill>
+                  <a:srgbClr val="000000"/>
+                </a:solidFill>
+              </a:rPr>
+            </a:br>
+            <a:r>
+              <a:rPr lang="en-US" sz="1000" dirty="0">
+                <a:solidFill>
+                  <a:srgbClr val="000000"/>
+                </a:solidFill>
+              </a:rPr>
+              <a:t>CREATE TABLE </a:t>
+            </a:r>
+            <a:r>
+              <a:rPr lang="en-US" sz="1000" dirty="0" err="1">
+                <a:solidFill>
+                  <a:srgbClr val="000000"/>
+                </a:solidFill>
+              </a:rPr>
+              <a:t>anfrage_nachricht</a:t>
+            </a:r>
+            <a:r>
+              <a:rPr lang="en-US" sz="1000" dirty="0">
+                <a:solidFill>
+                  <a:srgbClr val="000000"/>
+                </a:solidFill>
+              </a:rPr>
+              <a:t> (</a:t>
+            </a:r>
+          </a:p>
+          <a:p>
+            <a:r>
+              <a:rPr lang="en-US" sz="1000" dirty="0">
+                <a:solidFill>
+                  <a:srgbClr val="000000"/>
+                </a:solidFill>
+              </a:rPr>
+              <a:t>    </a:t>
+            </a:r>
+            <a:r>
+              <a:rPr lang="en-US" sz="1000" dirty="0" err="1">
+                <a:solidFill>
+                  <a:srgbClr val="000000"/>
+                </a:solidFill>
+              </a:rPr>
+              <a:t>nachricht_id</a:t>
+            </a:r>
+            <a:r>
+              <a:rPr lang="en-US" sz="1000" dirty="0">
+                <a:solidFill>
+                  <a:srgbClr val="000000"/>
+                </a:solidFill>
+              </a:rPr>
+              <a:t>    NUMBER          DEFAULT </a:t>
+            </a:r>
+            <a:r>
+              <a:rPr lang="en-US" sz="1000" dirty="0" err="1">
+                <a:solidFill>
+                  <a:srgbClr val="000000"/>
+                </a:solidFill>
+              </a:rPr>
+              <a:t>seq_anfrage_nachricht.NEXTVAL</a:t>
+            </a:r>
+            <a:r>
+              <a:rPr lang="en-US" sz="1000" dirty="0">
+                <a:solidFill>
+                  <a:srgbClr val="000000"/>
+                </a:solidFill>
+              </a:rPr>
+              <a:t> PRIMARY KEY,</a:t>
+            </a:r>
+          </a:p>
+          <a:p>
+            <a:r>
+              <a:rPr lang="en-US" sz="1000" dirty="0">
+                <a:solidFill>
+                  <a:srgbClr val="000000"/>
+                </a:solidFill>
+              </a:rPr>
+              <a:t>    </a:t>
+            </a:r>
+            <a:r>
+              <a:rPr lang="en-US" sz="1000" dirty="0" err="1">
+                <a:solidFill>
+                  <a:srgbClr val="000000"/>
+                </a:solidFill>
+              </a:rPr>
+              <a:t>anfrage_id</a:t>
+            </a:r>
+            <a:r>
+              <a:rPr lang="en-US" sz="1000" dirty="0">
+                <a:solidFill>
+                  <a:srgbClr val="000000"/>
+                </a:solidFill>
+              </a:rPr>
+              <a:t>      NUMBER          NOT NULL REFERENCES </a:t>
+            </a:r>
+            <a:r>
+              <a:rPr lang="en-US" sz="1000" dirty="0" err="1">
+                <a:solidFill>
+                  <a:srgbClr val="000000"/>
+                </a:solidFill>
+              </a:rPr>
+              <a:t>ausleihanfrage</a:t>
+            </a:r>
+            <a:r>
+              <a:rPr lang="en-US" sz="1000" dirty="0">
+                <a:solidFill>
+                  <a:srgbClr val="000000"/>
+                </a:solidFill>
+              </a:rPr>
+              <a:t>(</a:t>
+            </a:r>
+            <a:r>
+              <a:rPr lang="en-US" sz="1000" dirty="0" err="1">
+                <a:solidFill>
+                  <a:srgbClr val="000000"/>
+                </a:solidFill>
+              </a:rPr>
+              <a:t>anfrage_id</a:t>
+            </a:r>
+            <a:r>
+              <a:rPr lang="en-US" sz="1000" dirty="0">
+                <a:solidFill>
+                  <a:srgbClr val="000000"/>
+                </a:solidFill>
+              </a:rPr>
+              <a:t>),</a:t>
+            </a:r>
+          </a:p>
+          <a:p>
+            <a:r>
+              <a:rPr lang="en-US" sz="1000" dirty="0">
+                <a:solidFill>
+                  <a:srgbClr val="000000"/>
+                </a:solidFill>
+              </a:rPr>
+              <a:t>    </a:t>
+            </a:r>
+            <a:r>
+              <a:rPr lang="en-US" sz="1000" dirty="0" err="1">
+                <a:solidFill>
+                  <a:srgbClr val="000000"/>
+                </a:solidFill>
+              </a:rPr>
+              <a:t>sender_id</a:t>
+            </a:r>
+            <a:r>
+              <a:rPr lang="en-US" sz="1000" dirty="0">
+                <a:solidFill>
+                  <a:srgbClr val="000000"/>
+                </a:solidFill>
+              </a:rPr>
+              <a:t>       NUMBER          NOT NULL REFERENCES </a:t>
+            </a:r>
+            <a:r>
+              <a:rPr lang="en-US" sz="1000" dirty="0" err="1">
+                <a:solidFill>
+                  <a:srgbClr val="000000"/>
+                </a:solidFill>
+              </a:rPr>
+              <a:t>nutzer</a:t>
+            </a:r>
+            <a:r>
+              <a:rPr lang="en-US" sz="1000" dirty="0">
+                <a:solidFill>
+                  <a:srgbClr val="000000"/>
+                </a:solidFill>
+              </a:rPr>
+              <a:t>(</a:t>
+            </a:r>
+            <a:r>
+              <a:rPr lang="en-US" sz="1000" dirty="0" err="1">
+                <a:solidFill>
+                  <a:srgbClr val="000000"/>
+                </a:solidFill>
+              </a:rPr>
+              <a:t>nutzer_id</a:t>
+            </a:r>
+            <a:r>
+              <a:rPr lang="en-US" sz="1000" dirty="0">
+                <a:solidFill>
+                  <a:srgbClr val="000000"/>
+                </a:solidFill>
+              </a:rPr>
+              <a:t>),</a:t>
+            </a:r>
+          </a:p>
+          <a:p>
+            <a:r>
+              <a:rPr lang="en-US" sz="1000" dirty="0">
+                <a:solidFill>
+                  <a:srgbClr val="000000"/>
+                </a:solidFill>
+              </a:rPr>
+              <a:t>    </a:t>
+            </a:r>
+            <a:r>
+              <a:rPr lang="en-US" sz="1000" dirty="0" err="1">
+                <a:solidFill>
+                  <a:srgbClr val="000000"/>
+                </a:solidFill>
+              </a:rPr>
+              <a:t>inhalt</a:t>
+            </a:r>
+            <a:r>
+              <a:rPr lang="en-US" sz="1000" dirty="0">
+                <a:solidFill>
+                  <a:srgbClr val="000000"/>
+                </a:solidFill>
+              </a:rPr>
+              <a:t>          VARCHAR2(2000)  NOT NULL,</a:t>
+            </a:r>
+          </a:p>
+          <a:p>
+            <a:r>
+              <a:rPr lang="en-US" sz="1000" dirty="0">
+                <a:solidFill>
+                  <a:srgbClr val="000000"/>
+                </a:solidFill>
+              </a:rPr>
+              <a:t>    </a:t>
+            </a:r>
+            <a:r>
+              <a:rPr lang="en-US" sz="1000" dirty="0" err="1">
+                <a:solidFill>
+                  <a:srgbClr val="000000"/>
+                </a:solidFill>
+              </a:rPr>
+              <a:t>gesendet_am</a:t>
+            </a:r>
+            <a:r>
+              <a:rPr lang="en-US" sz="1000" dirty="0">
+                <a:solidFill>
+                  <a:srgbClr val="000000"/>
+                </a:solidFill>
+              </a:rPr>
+              <a:t>     DATE            DEFAULT SYSDATE NOT NULL,</a:t>
+            </a:r>
+          </a:p>
+          <a:p>
+            <a:r>
+              <a:rPr lang="en-US" sz="1000" dirty="0">
+                <a:solidFill>
+                  <a:srgbClr val="000000"/>
+                </a:solidFill>
+              </a:rPr>
+              <a:t>    </a:t>
+            </a:r>
+            <a:r>
+              <a:rPr lang="en-US" sz="1000" dirty="0" err="1">
+                <a:solidFill>
+                  <a:srgbClr val="000000"/>
+                </a:solidFill>
+              </a:rPr>
+              <a:t>gelesen</a:t>
+            </a:r>
+            <a:r>
+              <a:rPr lang="en-US" sz="1000" dirty="0">
+                <a:solidFill>
+                  <a:srgbClr val="000000"/>
+                </a:solidFill>
+              </a:rPr>
+              <a:t>         NUMBER(1)       DEFAULT 0 NOT NULL CHECK (</a:t>
+            </a:r>
+            <a:r>
+              <a:rPr lang="en-US" sz="1000" dirty="0" err="1">
+                <a:solidFill>
+                  <a:srgbClr val="000000"/>
+                </a:solidFill>
+              </a:rPr>
+              <a:t>gelesen</a:t>
+            </a:r>
+            <a:r>
+              <a:rPr lang="en-US" sz="1000" dirty="0">
+                <a:solidFill>
+                  <a:srgbClr val="000000"/>
+                </a:solidFill>
+              </a:rPr>
+              <a:t> IN (0,1))</a:t>
+            </a:r>
+          </a:p>
+          <a:p>
+            <a:r>
+              <a:rPr lang="en-US" sz="1000" dirty="0">
+                <a:solidFill>
+                  <a:srgbClr val="000000"/>
+                </a:solidFill>
+              </a:rPr>
+              <a:t>);</a:t>
+            </a:r>
+          </a:p>
+          <a:p>
+            <a:endParaRPr lang="en-US" sz="1000" dirty="0">
+              <a:solidFill>
+                <a:srgbClr val="000000"/>
+              </a:solidFill>
+            </a:endParaRPr>
+          </a:p>
+          <a:p>
+            <a:r>
+              <a:rPr lang="de-DE" sz="1000" dirty="0">
+                <a:solidFill>
+                  <a:srgbClr val="000000"/>
+                </a:solidFill>
+              </a:rPr>
+              <a:t>SELECT </a:t>
+            </a:r>
+            <a:r>
+              <a:rPr lang="de-DE" sz="1000" dirty="0" err="1">
+                <a:solidFill>
+                  <a:srgbClr val="000000"/>
+                </a:solidFill>
+              </a:rPr>
+              <a:t>n.nachricht_id</a:t>
+            </a:r>
+            <a:r>
+              <a:rPr lang="de-DE" sz="1000" dirty="0">
+                <a:solidFill>
+                  <a:srgbClr val="000000"/>
+                </a:solidFill>
+              </a:rPr>
+              <a:t>, </a:t>
+            </a:r>
+            <a:r>
+              <a:rPr lang="de-DE" sz="1000" dirty="0" err="1">
+                <a:solidFill>
+                  <a:srgbClr val="000000"/>
+                </a:solidFill>
+              </a:rPr>
+              <a:t>n.gesendet_am</a:t>
+            </a:r>
+            <a:r>
+              <a:rPr lang="de-DE" sz="1000" dirty="0">
+                <a:solidFill>
+                  <a:srgbClr val="000000"/>
+                </a:solidFill>
+              </a:rPr>
+              <a:t>, </a:t>
+            </a:r>
+            <a:r>
+              <a:rPr lang="de-DE" sz="1000" dirty="0" err="1">
+                <a:solidFill>
+                  <a:srgbClr val="000000"/>
+                </a:solidFill>
+              </a:rPr>
+              <a:t>n.inhalt</a:t>
+            </a:r>
+            <a:r>
+              <a:rPr lang="de-DE" sz="1000" dirty="0">
+                <a:solidFill>
+                  <a:srgbClr val="000000"/>
+                </a:solidFill>
+              </a:rPr>
+              <a:t>,</a:t>
+            </a:r>
+          </a:p>
+          <a:p>
+            <a:r>
+              <a:rPr lang="de-DE" sz="1000" dirty="0">
+                <a:solidFill>
+                  <a:srgbClr val="000000"/>
+                </a:solidFill>
+              </a:rPr>
+              <a:t>       </a:t>
+            </a:r>
+            <a:r>
+              <a:rPr lang="de-DE" sz="1000" dirty="0" err="1">
+                <a:solidFill>
+                  <a:srgbClr val="000000"/>
+                </a:solidFill>
+              </a:rPr>
+              <a:t>s.vorname</a:t>
+            </a:r>
+            <a:r>
+              <a:rPr lang="de-DE" sz="1000" dirty="0">
+                <a:solidFill>
+                  <a:srgbClr val="000000"/>
+                </a:solidFill>
+              </a:rPr>
+              <a:t> || ' ' || </a:t>
+            </a:r>
+            <a:r>
+              <a:rPr lang="de-DE" sz="1000" dirty="0" err="1">
+                <a:solidFill>
+                  <a:srgbClr val="000000"/>
+                </a:solidFill>
+              </a:rPr>
+              <a:t>s.nachname</a:t>
+            </a:r>
+            <a:r>
+              <a:rPr lang="de-DE" sz="1000" dirty="0">
+                <a:solidFill>
+                  <a:srgbClr val="000000"/>
+                </a:solidFill>
+              </a:rPr>
+              <a:t> AS </a:t>
+            </a:r>
+            <a:r>
+              <a:rPr lang="de-DE" sz="1000" dirty="0" err="1">
+                <a:solidFill>
+                  <a:srgbClr val="000000"/>
+                </a:solidFill>
+              </a:rPr>
+              <a:t>absender</a:t>
+            </a:r>
+            <a:r>
+              <a:rPr lang="de-DE" sz="1000" dirty="0">
+                <a:solidFill>
+                  <a:srgbClr val="000000"/>
+                </a:solidFill>
+              </a:rPr>
+              <a:t>,</a:t>
+            </a:r>
+          </a:p>
+          <a:p>
+            <a:r>
+              <a:rPr lang="de-DE" sz="1000" dirty="0">
+                <a:solidFill>
+                  <a:srgbClr val="000000"/>
+                </a:solidFill>
+              </a:rPr>
+              <a:t>       </a:t>
+            </a:r>
+            <a:r>
+              <a:rPr lang="de-DE" sz="1000" dirty="0" err="1">
+                <a:solidFill>
+                  <a:srgbClr val="000000"/>
+                </a:solidFill>
+              </a:rPr>
+              <a:t>n.anfrage_id</a:t>
             </a:r>
             <a:endParaRPr lang="de-DE" sz="1000" dirty="0">
               <a:solidFill>
                 <a:srgbClr val="000000"/>
               </a:solidFill>
             </a:endParaRPr>
+          </a:p>
+          <a:p>
+            <a:r>
+              <a:rPr lang="de-DE" sz="1000" dirty="0">
+                <a:solidFill>
+                  <a:srgbClr val="000000"/>
+                </a:solidFill>
+              </a:rPr>
+              <a:t>FROM </a:t>
+            </a:r>
+            <a:r>
+              <a:rPr lang="de-DE" sz="1000" dirty="0" err="1">
+                <a:solidFill>
+                  <a:srgbClr val="000000"/>
+                </a:solidFill>
+              </a:rPr>
+              <a:t>anfrage_nachricht</a:t>
+            </a:r>
+            <a:r>
+              <a:rPr lang="de-DE" sz="1000" dirty="0">
+                <a:solidFill>
+                  <a:srgbClr val="000000"/>
+                </a:solidFill>
+              </a:rPr>
+              <a:t> n</a:t>
+            </a:r>
+          </a:p>
+          <a:p>
+            <a:r>
+              <a:rPr lang="de-DE" sz="1000" dirty="0">
+                <a:solidFill>
+                  <a:srgbClr val="000000"/>
+                </a:solidFill>
+              </a:rPr>
+              <a:t>JOIN </a:t>
+            </a:r>
+            <a:r>
+              <a:rPr lang="de-DE" sz="1000" dirty="0" err="1">
+                <a:solidFill>
+                  <a:srgbClr val="000000"/>
+                </a:solidFill>
+              </a:rPr>
+              <a:t>nutzer</a:t>
+            </a:r>
+            <a:r>
+              <a:rPr lang="de-DE" sz="1000" dirty="0">
+                <a:solidFill>
+                  <a:srgbClr val="000000"/>
+                </a:solidFill>
+              </a:rPr>
+              <a:t> s ON </a:t>
+            </a:r>
+            <a:r>
+              <a:rPr lang="de-DE" sz="1000" dirty="0" err="1">
+                <a:solidFill>
+                  <a:srgbClr val="000000"/>
+                </a:solidFill>
+              </a:rPr>
+              <a:t>s.nutzer_id</a:t>
+            </a:r>
+            <a:r>
+              <a:rPr lang="de-DE" sz="1000" dirty="0">
+                <a:solidFill>
+                  <a:srgbClr val="000000"/>
+                </a:solidFill>
+              </a:rPr>
+              <a:t> = </a:t>
+            </a:r>
+            <a:r>
+              <a:rPr lang="de-DE" sz="1000" dirty="0" err="1">
+                <a:solidFill>
+                  <a:srgbClr val="000000"/>
+                </a:solidFill>
+              </a:rPr>
+              <a:t>n.sender_id</a:t>
+            </a:r>
+            <a:endParaRPr lang="de-DE" sz="1000" dirty="0">
+              <a:solidFill>
+                <a:srgbClr val="000000"/>
+              </a:solidFill>
+            </a:endParaRPr>
+          </a:p>
+          <a:p>
+            <a:r>
+              <a:rPr lang="de-DE" sz="1000" dirty="0">
+                <a:solidFill>
+                  <a:srgbClr val="000000"/>
+                </a:solidFill>
+              </a:rPr>
+              <a:t>WHERE </a:t>
+            </a:r>
+            <a:r>
+              <a:rPr lang="de-DE" sz="1000" dirty="0" err="1">
+                <a:solidFill>
+                  <a:srgbClr val="000000"/>
+                </a:solidFill>
+              </a:rPr>
+              <a:t>n.gelesen</a:t>
+            </a:r>
+            <a:r>
+              <a:rPr lang="de-DE" sz="1000" dirty="0">
+                <a:solidFill>
+                  <a:srgbClr val="000000"/>
+                </a:solidFill>
+              </a:rPr>
+              <a:t> = 0</a:t>
+            </a:r>
+          </a:p>
+          <a:p>
+            <a:r>
+              <a:rPr lang="de-DE" sz="1000" dirty="0">
+                <a:solidFill>
+                  <a:srgbClr val="000000"/>
+                </a:solidFill>
+              </a:rPr>
+              <a:t>AND </a:t>
+            </a:r>
+            <a:r>
+              <a:rPr lang="de-DE" sz="1000" dirty="0" err="1">
+                <a:solidFill>
+                  <a:srgbClr val="000000"/>
+                </a:solidFill>
+              </a:rPr>
+              <a:t>n.anfrage_id</a:t>
+            </a:r>
+            <a:r>
+              <a:rPr lang="de-DE" sz="1000" dirty="0">
+                <a:solidFill>
+                  <a:srgbClr val="000000"/>
+                </a:solidFill>
+              </a:rPr>
+              <a:t> IN (</a:t>
+            </a:r>
+          </a:p>
+          <a:p>
+            <a:r>
+              <a:rPr lang="de-DE" sz="1000" dirty="0">
+                <a:solidFill>
+                  <a:srgbClr val="000000"/>
+                </a:solidFill>
+              </a:rPr>
+              <a:t>    SELECT </a:t>
+            </a:r>
+            <a:r>
+              <a:rPr lang="de-DE" sz="1000" dirty="0" err="1">
+                <a:solidFill>
+                  <a:srgbClr val="000000"/>
+                </a:solidFill>
+              </a:rPr>
+              <a:t>anfrage_id</a:t>
+            </a:r>
+            <a:r>
+              <a:rPr lang="de-DE" sz="1000" dirty="0">
+                <a:solidFill>
+                  <a:srgbClr val="000000"/>
+                </a:solidFill>
+              </a:rPr>
+              <a:t> FROM ausleihanfrage</a:t>
+            </a:r>
+          </a:p>
+          <a:p>
+            <a:r>
+              <a:rPr lang="de-DE" sz="1000" dirty="0">
+                <a:solidFill>
+                  <a:srgbClr val="000000"/>
+                </a:solidFill>
+              </a:rPr>
+              <a:t>    WHERE </a:t>
+            </a:r>
+            <a:r>
+              <a:rPr lang="de-DE" sz="1000" dirty="0" err="1">
+                <a:solidFill>
+                  <a:srgbClr val="000000"/>
+                </a:solidFill>
+              </a:rPr>
+              <a:t>verleiher_id</a:t>
+            </a:r>
+            <a:r>
+              <a:rPr lang="de-DE" sz="1000" dirty="0">
+                <a:solidFill>
+                  <a:srgbClr val="000000"/>
+                </a:solidFill>
+              </a:rPr>
+              <a:t> = 25 OR </a:t>
+            </a:r>
+            <a:r>
+              <a:rPr lang="de-DE" sz="1000" dirty="0" err="1">
+                <a:solidFill>
+                  <a:srgbClr val="000000"/>
+                </a:solidFill>
+              </a:rPr>
+              <a:t>leiher_id</a:t>
+            </a:r>
+            <a:r>
+              <a:rPr lang="de-DE" sz="1000" dirty="0">
+                <a:solidFill>
+                  <a:srgbClr val="000000"/>
+                </a:solidFill>
+              </a:rPr>
+              <a:t> = 25</a:t>
+            </a:r>
+          </a:p>
+          <a:p>
+            <a:r>
+              <a:rPr lang="de-DE" sz="1000" dirty="0">
+                <a:solidFill>
+                  <a:srgbClr val="000000"/>
+                </a:solidFill>
+              </a:rPr>
+              <a:t>)</a:t>
+            </a:r>
+          </a:p>
+          <a:p>
+            <a:r>
+              <a:rPr lang="de-DE" sz="1000" dirty="0">
+                <a:solidFill>
+                  <a:srgbClr val="000000"/>
+                </a:solidFill>
+              </a:rPr>
+              <a:t>ORDER BY </a:t>
+            </a:r>
+            <a:r>
+              <a:rPr lang="de-DE" sz="1000" dirty="0" err="1">
+                <a:solidFill>
+                  <a:srgbClr val="000000"/>
+                </a:solidFill>
+              </a:rPr>
+              <a:t>n.gesendet_am</a:t>
+            </a:r>
+            <a:r>
+              <a:rPr lang="de-DE" sz="1000" dirty="0">
+                <a:solidFill>
+                  <a:srgbClr val="000000"/>
+                </a:solidFill>
+              </a:rPr>
+              <a:t>;</a:t>
+            </a:r>
           </a:p>
         </p:txBody>
       </p:sp>
@@ -13573,7 +18277,24 @@
             </a:pPr>
             <a:r>
               <a:rPr lang="de-DE" sz="1400" dirty="0"/>
-              <a:t>Jeder… </a:t>
+              <a:t>Die Nachrichten-Tabelle dient der Kommunikation zwischen </a:t>
+            </a:r>
+            <a:r>
+              <a:rPr lang="de-DE" sz="1400" dirty="0" err="1"/>
+              <a:t>Leiher</a:t>
+            </a:r>
+            <a:r>
+              <a:rPr lang="de-DE" sz="1400" dirty="0"/>
+              <a:t> und Verleiher während des Ausleihprozesses.</a:t>
+            </a:r>
+          </a:p>
+          <a:p>
+            <a:pPr marL="0" indent="0">
+              <a:buNone/>
+            </a:pPr>
+            <a:r>
+              <a:rPr lang="de-DE" sz="1400" dirty="0"/>
+              <a:t>Die Abfrage zeigt den Posteingang des Benutzers mit der Id 25, also die ungelesenen Nachrichten aus seinen Anfragen.</a:t>
             </a:r>
           </a:p>
         </p:txBody>
@@ -13592,7 +18313,7 @@
         </p:nvSpPr>
         <p:spPr>
           <a:xfrm>
-            <a:off x="3469411" y="5272897"/>
+            <a:off x="1883680" y="4415155"/>
             <a:ext cx="644375" cy="503227"/>
           </a:xfrm>
           <a:prstGeom prst="rightArrow">
@@ -13630,710 +18351,40 @@
           </a:p>
         </p:txBody>
       </p:sp>
+      <p:pic>
+        <p:nvPicPr>
+          <p:cNvPr id="8" name="Grafik 7">
+            <a:extLst>
+              <a:ext uri="{FF2B5EF4-FFF2-40B4-BE49-F238E27FC236}">
+                <a16:creationId xmlns:a16="http://schemas.microsoft.com/office/drawing/2014/main" id="{DF8983F6-90DA-6BAB-34DC-29737C950E34}"/>
+              </a:ext>
+            </a:extLst>
+          </p:cNvPr>
+          <p:cNvPicPr>
+            <a:picLocks noChangeAspect="1"/>
+          </p:cNvPicPr>
+          <p:nvPr/>
+        </p:nvPicPr>
+        <p:blipFill>
+          <a:blip r:embed="rId2"/>
+          <a:stretch>
+            <a:fillRect/>
+          </a:stretch>
+        </p:blipFill>
+        <p:spPr>
+          <a:xfrm>
+            <a:off x="2727333" y="4279398"/>
+            <a:ext cx="5950256" cy="774740"/>
+          </a:xfrm>
+          <a:prstGeom prst="rect">
+            <a:avLst/>
+          </a:prstGeom>
+        </p:spPr>
+      </p:pic>
     </p:spTree>
     <p:extLst>
       <p:ext uri="{BB962C8B-B14F-4D97-AF65-F5344CB8AC3E}">
         <p14:creationId xmlns:p14="http://schemas.microsoft.com/office/powerpoint/2010/main" val="1035098154"/>
-      </p:ext>
-    </p:extLst>
-  </p:cSld>
-  <p:clrMapOvr>
-    <a:masterClrMapping/>
-  </p:clrMapOvr>
-</p:sld>
-</file>
-
-<file path=ppt/slides/slide18.xml><?xml version="1.0" encoding="utf-8"?>
-<p:sld xmlns:a="http://schemas.openxmlformats.org/drawingml/2006/main" xmlns:r="http://schemas.openxmlformats.org/officeDocument/2006/relationships" xmlns:p="http://schemas.openxmlformats.org/presentationml/2006/main">
-  <p:cSld>
-    <p:spTree>
-      <p:nvGrpSpPr>
-        <p:cNvPr id="1" name="">
-          <a:extLst>
-            <a:ext uri="{FF2B5EF4-FFF2-40B4-BE49-F238E27FC236}">
-              <a16:creationId xmlns:a16="http://schemas.microsoft.com/office/drawing/2014/main" id="{D2CBE675-40A8-1556-A2C7-87C2B94ACAD9}"/>
-            </a:ext>
-          </a:extLst>
-        </p:cNvPr>
-        <p:cNvGrpSpPr/>
-        <p:nvPr/>
-      </p:nvGrpSpPr>
-      <p:grpSpPr>
-        <a:xfrm>
-          <a:off x="0" y="0"/>
-          <a:ext cx="0" cy="0"/>
-          <a:chOff x="0" y="0"/>
-          <a:chExt cx="0" cy="0"/>
-        </a:xfrm>
-      </p:grpSpPr>
-      <p:sp>
-        <p:nvSpPr>
-          <p:cNvPr id="5" name="Inhaltsplatzhalter 4">
-            <a:extLst>
-              <a:ext uri="{FF2B5EF4-FFF2-40B4-BE49-F238E27FC236}">
-                <a16:creationId xmlns:a16="http://schemas.microsoft.com/office/drawing/2014/main" id="{EF921A23-5134-6B5C-9CED-E3C0E43F22FA}"/>
-              </a:ext>
-            </a:extLst>
-          </p:cNvPr>
-          <p:cNvSpPr>
-            <a:spLocks noGrp="1"/>
-          </p:cNvSpPr>
-          <p:nvPr>
-            <p:ph idx="1"/>
-          </p:nvPr>
-        </p:nvSpPr>
-        <p:spPr>
-          <a:xfrm>
-            <a:off x="0" y="432000"/>
-            <a:ext cx="5832000" cy="6426000"/>
-          </a:xfrm>
-          <a:solidFill>
-            <a:srgbClr val="BBFFB8"/>
-          </a:solidFill>
-        </p:spPr>
-        <p:txBody>
-          <a:bodyPr>
-            <a:noAutofit/>
-          </a:bodyPr>
-          <a:lstStyle/>
-          <a:p>
-            <a:pPr marL="0" indent="0">
-              <a:lnSpc>
-                <a:spcPct val="100000"/>
-              </a:lnSpc>
-              <a:spcBef>
-                <a:spcPts val="0"/>
-              </a:spcBef>
-              <a:buNone/>
-            </a:pPr>
-            <a:endParaRPr lang="de-DE" sz="1400" dirty="0"/>
-          </a:p>
-          <a:p>
-            <a:pPr marL="0" indent="0">
-              <a:lnSpc>
-                <a:spcPct val="100000"/>
-              </a:lnSpc>
-              <a:spcBef>
-                <a:spcPts val="0"/>
-              </a:spcBef>
-              <a:buNone/>
-            </a:pPr>
-            <a:endParaRPr lang="de-DE" sz="1400" dirty="0"/>
-          </a:p>
-          <a:p>
-            <a:pPr marL="0" indent="0">
-              <a:lnSpc>
-                <a:spcPct val="100000"/>
-              </a:lnSpc>
-              <a:spcBef>
-                <a:spcPts val="0"/>
-              </a:spcBef>
-              <a:buNone/>
-            </a:pPr>
-            <a:endParaRPr lang="de-DE" sz="1400" dirty="0"/>
-          </a:p>
-        </p:txBody>
-      </p:sp>
-      <p:sp>
-        <p:nvSpPr>
-          <p:cNvPr id="2" name="Textfeld 1">
-            <a:extLst>
-              <a:ext uri="{FF2B5EF4-FFF2-40B4-BE49-F238E27FC236}">
-                <a16:creationId xmlns:a16="http://schemas.microsoft.com/office/drawing/2014/main" id="{E6FC786A-8C47-4AFF-31B6-F48291723A0D}"/>
-              </a:ext>
-            </a:extLst>
-          </p:cNvPr>
-          <p:cNvSpPr txBox="1"/>
-          <p:nvPr/>
-        </p:nvSpPr>
-        <p:spPr>
-          <a:xfrm>
-            <a:off x="331640" y="684640"/>
-            <a:ext cx="5168720" cy="246221"/>
-          </a:xfrm>
-          <a:prstGeom prst="rect">
-            <a:avLst/>
-          </a:prstGeom>
-          <a:noFill/>
-          <a:ln w="25400">
-            <a:noFill/>
-          </a:ln>
-        </p:spPr>
-        <p:txBody>
-          <a:bodyPr wrap="square" rtlCol="0">
-            <a:spAutoFit/>
-          </a:bodyPr>
-          <a:lstStyle/>
-          <a:p>
-            <a:r>
-              <a:rPr lang="en-US" sz="1000">
-                <a:solidFill>
-                  <a:srgbClr val="000000"/>
-                </a:solidFill>
-              </a:rPr>
-              <a:t>CREATE SEQUENCE seq_rueckgabe START WITH 1000 INCREMENT BY 1 NOCACHE;</a:t>
-            </a:r>
-            <a:endParaRPr lang="de-DE" sz="1000" dirty="0">
-              <a:solidFill>
-                <a:srgbClr val="000000"/>
-              </a:solidFill>
-            </a:endParaRPr>
-          </a:p>
-        </p:txBody>
-      </p:sp>
-      <p:sp>
-        <p:nvSpPr>
-          <p:cNvPr id="6" name="Inhaltsplatzhalter 4">
-            <a:extLst>
-              <a:ext uri="{FF2B5EF4-FFF2-40B4-BE49-F238E27FC236}">
-                <a16:creationId xmlns:a16="http://schemas.microsoft.com/office/drawing/2014/main" id="{5A1AEC29-E85B-6B4A-945E-FC45A6C26FE0}"/>
-              </a:ext>
-            </a:extLst>
-          </p:cNvPr>
-          <p:cNvSpPr txBox="1">
-            <a:spLocks/>
-          </p:cNvSpPr>
-          <p:nvPr/>
-        </p:nvSpPr>
-        <p:spPr>
-          <a:xfrm>
-            <a:off x="5924551" y="432000"/>
-            <a:ext cx="6267450" cy="6426000"/>
-          </a:xfrm>
-          <a:prstGeom prst="rect">
-            <a:avLst/>
-          </a:prstGeom>
-          <a:solidFill>
-            <a:srgbClr val="BBFFB8"/>
-          </a:solidFill>
-        </p:spPr>
-        <p:txBody>
-          <a:bodyPr vert="horz" lIns="180000" tIns="180000" rIns="91440" bIns="45720" rtlCol="0">
-            <a:noAutofit/>
-          </a:bodyPr>
-          <a:lstStyle>
-            <a:lvl1pPr marL="228600" indent="-228600" algn="l" defTabSz="914400" rtl="0" eaLnBrk="1" latinLnBrk="0" hangingPunct="1">
-              <a:lnSpc>
-                <a:spcPct val="90000"/>
-              </a:lnSpc>
-              <a:spcBef>
-                <a:spcPts val="1000"/>
-              </a:spcBef>
-              <a:buFont typeface="Wingdings" panose="05000000000000000000" pitchFamily="2" charset="2"/>
-              <a:buChar char="§"/>
-              <a:defRPr sz="2800" b="0" kern="1200">
-                <a:solidFill>
-                  <a:srgbClr val="000000"/>
-                </a:solidFill>
-                <a:latin typeface="+mn-lt"/>
-                <a:ea typeface="+mn-ea"/>
-                <a:cs typeface="+mn-cs"/>
-              </a:defRPr>
-            </a:lvl1pPr>
-            <a:lvl2pPr marL="685800" indent="-228600" algn="l" defTabSz="914400" rtl="0" eaLnBrk="1" latinLnBrk="0" hangingPunct="1">
-              <a:lnSpc>
-                <a:spcPct val="90000"/>
-              </a:lnSpc>
-              <a:spcBef>
-                <a:spcPts val="500"/>
-              </a:spcBef>
-              <a:buFont typeface="Wingdings" panose="05000000000000000000" pitchFamily="2" charset="2"/>
-              <a:buChar char="§"/>
-              <a:defRPr sz="2400" b="0" kern="1200">
-                <a:solidFill>
-                  <a:srgbClr val="000000"/>
-                </a:solidFill>
-                <a:latin typeface="+mn-lt"/>
-                <a:ea typeface="+mn-ea"/>
-                <a:cs typeface="+mn-cs"/>
-              </a:defRPr>
-            </a:lvl2pPr>
-            <a:lvl3pPr marL="1143000" indent="-228600" algn="l" defTabSz="914400" rtl="0" eaLnBrk="1" latinLnBrk="0" hangingPunct="1">
-              <a:lnSpc>
-                <a:spcPct val="90000"/>
-              </a:lnSpc>
-              <a:spcBef>
-                <a:spcPts val="500"/>
-              </a:spcBef>
-              <a:buFont typeface="Wingdings" panose="05000000000000000000" pitchFamily="2" charset="2"/>
-              <a:buChar char="§"/>
-              <a:defRPr sz="2000" b="0" kern="1200">
-                <a:solidFill>
-                  <a:srgbClr val="000000"/>
-                </a:solidFill>
-                <a:latin typeface="+mn-lt"/>
-                <a:ea typeface="+mn-ea"/>
-                <a:cs typeface="+mn-cs"/>
-              </a:defRPr>
-            </a:lvl3pPr>
-            <a:lvl4pPr marL="1600200" indent="-228600" algn="l" defTabSz="914400" rtl="0" eaLnBrk="1" latinLnBrk="0" hangingPunct="1">
-              <a:lnSpc>
-                <a:spcPct val="90000"/>
-              </a:lnSpc>
-              <a:spcBef>
-                <a:spcPts val="500"/>
-              </a:spcBef>
-              <a:buFont typeface="Wingdings" panose="05000000000000000000" pitchFamily="2" charset="2"/>
-              <a:buChar char="§"/>
-              <a:defRPr sz="1800" b="0" kern="1200">
-                <a:solidFill>
-                  <a:srgbClr val="000000"/>
-                </a:solidFill>
-                <a:latin typeface="+mn-lt"/>
-                <a:ea typeface="+mn-ea"/>
-                <a:cs typeface="+mn-cs"/>
-              </a:defRPr>
-            </a:lvl4pPr>
-            <a:lvl5pPr marL="2057400" indent="-228600" algn="l" defTabSz="914400" rtl="0" eaLnBrk="1" latinLnBrk="0" hangingPunct="1">
-              <a:lnSpc>
-                <a:spcPct val="90000"/>
-              </a:lnSpc>
-              <a:spcBef>
-                <a:spcPts val="500"/>
-              </a:spcBef>
-              <a:buFont typeface="Wingdings" panose="05000000000000000000" pitchFamily="2" charset="2"/>
-              <a:buChar char="§"/>
-              <a:defRPr sz="1800" b="0" kern="1200">
-                <a:solidFill>
-                  <a:srgbClr val="000000"/>
-                </a:solidFill>
-                <a:latin typeface="+mn-lt"/>
-                <a:ea typeface="+mn-ea"/>
-                <a:cs typeface="+mn-cs"/>
-              </a:defRPr>
-            </a:lvl5pPr>
-            <a:lvl6pPr marL="2514600" indent="-228600" algn="l" defTabSz="914400" rtl="0" eaLnBrk="1" latinLnBrk="0" hangingPunct="1">
-              <a:lnSpc>
-                <a:spcPct val="90000"/>
-              </a:lnSpc>
-              <a:spcBef>
-                <a:spcPts val="500"/>
-              </a:spcBef>
-              <a:buFont typeface="Arial" panose="020B0604020202020204" pitchFamily="34" charset="0"/>
-              <a:buChar char="•"/>
-              <a:defRPr sz="1800" kern="1200">
-                <a:solidFill>
-                  <a:schemeClr val="tx1"/>
-                </a:solidFill>
-                <a:latin typeface="+mn-lt"/>
-                <a:ea typeface="+mn-ea"/>
-                <a:cs typeface="+mn-cs"/>
-              </a:defRPr>
-            </a:lvl6pPr>
-            <a:lvl7pPr marL="2971800" indent="-228600" algn="l" defTabSz="914400" rtl="0" eaLnBrk="1" latinLnBrk="0" hangingPunct="1">
-              <a:lnSpc>
-                <a:spcPct val="90000"/>
-              </a:lnSpc>
-              <a:spcBef>
-                <a:spcPts val="500"/>
-              </a:spcBef>
-              <a:buFont typeface="Arial" panose="020B0604020202020204" pitchFamily="34" charset="0"/>
-              <a:buChar char="•"/>
-              <a:defRPr sz="1800" kern="1200">
-                <a:solidFill>
-                  <a:schemeClr val="tx1"/>
-                </a:solidFill>
-                <a:latin typeface="+mn-lt"/>
-                <a:ea typeface="+mn-ea"/>
-                <a:cs typeface="+mn-cs"/>
-              </a:defRPr>
-            </a:lvl7pPr>
-            <a:lvl8pPr marL="3429000" indent="-228600" algn="l" defTabSz="914400" rtl="0" eaLnBrk="1" latinLnBrk="0" hangingPunct="1">
-              <a:lnSpc>
-                <a:spcPct val="90000"/>
-              </a:lnSpc>
-              <a:spcBef>
-                <a:spcPts val="500"/>
-              </a:spcBef>
-              <a:buFont typeface="Arial" panose="020B0604020202020204" pitchFamily="34" charset="0"/>
-              <a:buChar char="•"/>
-              <a:defRPr sz="1800" kern="1200">
-                <a:solidFill>
-                  <a:schemeClr val="tx1"/>
-                </a:solidFill>
-                <a:latin typeface="+mn-lt"/>
-                <a:ea typeface="+mn-ea"/>
-                <a:cs typeface="+mn-cs"/>
-              </a:defRPr>
-            </a:lvl8pPr>
-            <a:lvl9pPr marL="3886200" indent="-228600" algn="l" defTabSz="914400" rtl="0" eaLnBrk="1" latinLnBrk="0" hangingPunct="1">
-              <a:lnSpc>
-                <a:spcPct val="90000"/>
-              </a:lnSpc>
-              <a:spcBef>
-                <a:spcPts val="500"/>
-              </a:spcBef>
-              <a:buFont typeface="Arial" panose="020B0604020202020204" pitchFamily="34" charset="0"/>
-              <a:buChar char="•"/>
-              <a:defRPr sz="1800" kern="1200">
-                <a:solidFill>
-                  <a:schemeClr val="tx1"/>
-                </a:solidFill>
-                <a:latin typeface="+mn-lt"/>
-                <a:ea typeface="+mn-ea"/>
-                <a:cs typeface="+mn-cs"/>
-              </a:defRPr>
-            </a:lvl9pPr>
-          </a:lstStyle>
-          <a:p>
-            <a:pPr marL="0" indent="0">
-              <a:lnSpc>
-                <a:spcPct val="100000"/>
-              </a:lnSpc>
-              <a:spcBef>
-                <a:spcPts val="0"/>
-              </a:spcBef>
-              <a:buFont typeface="Wingdings" panose="05000000000000000000" pitchFamily="2" charset="2"/>
-              <a:buNone/>
-            </a:pPr>
-            <a:endParaRPr lang="de-DE" sz="1400"/>
-          </a:p>
-          <a:p>
-            <a:pPr marL="0" indent="0">
-              <a:lnSpc>
-                <a:spcPct val="100000"/>
-              </a:lnSpc>
-              <a:spcBef>
-                <a:spcPts val="0"/>
-              </a:spcBef>
-              <a:buFont typeface="Wingdings" panose="05000000000000000000" pitchFamily="2" charset="2"/>
-              <a:buNone/>
-            </a:pPr>
-            <a:endParaRPr lang="de-DE" sz="1400"/>
-          </a:p>
-          <a:p>
-            <a:pPr marL="0" indent="0">
-              <a:lnSpc>
-                <a:spcPct val="100000"/>
-              </a:lnSpc>
-              <a:spcBef>
-                <a:spcPts val="0"/>
-              </a:spcBef>
-              <a:buFont typeface="Wingdings" panose="05000000000000000000" pitchFamily="2" charset="2"/>
-              <a:buNone/>
-            </a:pPr>
-            <a:endParaRPr lang="de-DE" sz="1400" dirty="0"/>
-          </a:p>
-        </p:txBody>
-      </p:sp>
-      <p:sp>
-        <p:nvSpPr>
-          <p:cNvPr id="4" name="Titel 3">
-            <a:extLst>
-              <a:ext uri="{FF2B5EF4-FFF2-40B4-BE49-F238E27FC236}">
-                <a16:creationId xmlns:a16="http://schemas.microsoft.com/office/drawing/2014/main" id="{440D81F5-E894-02D5-DA11-0F73A44B4FE6}"/>
-              </a:ext>
-            </a:extLst>
-          </p:cNvPr>
-          <p:cNvSpPr>
-            <a:spLocks noGrp="1"/>
-          </p:cNvSpPr>
-          <p:nvPr>
-            <p:ph type="title"/>
-          </p:nvPr>
-        </p:nvSpPr>
-        <p:spPr>
-          <a:xfrm>
-            <a:off x="0" y="0"/>
-            <a:ext cx="12192000" cy="432000"/>
-          </a:xfrm>
-          <a:solidFill>
-            <a:srgbClr val="79B747"/>
-          </a:solidFill>
-        </p:spPr>
-        <p:txBody>
-          <a:bodyPr>
-            <a:noAutofit/>
-          </a:bodyPr>
-          <a:lstStyle/>
-          <a:p>
-            <a:r>
-              <a:rPr lang="de-DE" sz="2800" dirty="0"/>
-              <a:t>Tabelle: </a:t>
-            </a:r>
-            <a:r>
-              <a:rPr lang="de-DE" sz="2800" dirty="0" err="1"/>
-              <a:t>Rueckgabe</a:t>
-            </a:r>
-            <a:endParaRPr lang="de-DE" sz="2800" dirty="0"/>
-          </a:p>
-        </p:txBody>
-      </p:sp>
-      <p:sp>
-        <p:nvSpPr>
-          <p:cNvPr id="7" name="Textplatzhalter 1">
-            <a:extLst>
-              <a:ext uri="{FF2B5EF4-FFF2-40B4-BE49-F238E27FC236}">
-                <a16:creationId xmlns:a16="http://schemas.microsoft.com/office/drawing/2014/main" id="{0D1033BA-8F25-2525-2512-5DFABC918163}"/>
-              </a:ext>
-            </a:extLst>
-          </p:cNvPr>
-          <p:cNvSpPr txBox="1">
-            <a:spLocks/>
-          </p:cNvSpPr>
-          <p:nvPr/>
-        </p:nvSpPr>
-        <p:spPr>
-          <a:xfrm>
-            <a:off x="7472038" y="684640"/>
-            <a:ext cx="3172475" cy="2496709"/>
-          </a:xfrm>
-          <a:prstGeom prst="rect">
-            <a:avLst/>
-          </a:prstGeom>
-          <a:solidFill>
-            <a:srgbClr val="FFFFFF"/>
-          </a:solidFill>
-          <a:ln w="12700">
-            <a:solidFill>
-              <a:srgbClr val="79B747"/>
-            </a:solidFill>
-          </a:ln>
-        </p:spPr>
-        <p:txBody>
-          <a:bodyPr lIns="180000" tIns="180000" anchor="t" anchorCtr="0">
-            <a:noAutofit/>
-          </a:bodyPr>
-          <a:lstStyle>
-            <a:lvl1pPr marL="228600" indent="-228600" algn="l" defTabSz="914400" rtl="0" eaLnBrk="1" latinLnBrk="0" hangingPunct="1">
-              <a:lnSpc>
-                <a:spcPct val="90000"/>
-              </a:lnSpc>
-              <a:spcBef>
-                <a:spcPts val="1000"/>
-              </a:spcBef>
-              <a:buFont typeface="Wingdings" panose="05000000000000000000" pitchFamily="2" charset="2"/>
-              <a:buChar char="§"/>
-              <a:defRPr sz="2800" kern="1200">
-                <a:solidFill>
-                  <a:srgbClr val="000000"/>
-                </a:solidFill>
-                <a:latin typeface="+mn-lt"/>
-                <a:ea typeface="+mn-ea"/>
-                <a:cs typeface="+mn-cs"/>
-              </a:defRPr>
-            </a:lvl1pPr>
-            <a:lvl2pPr marL="685800" indent="-228600" algn="l" defTabSz="914400" rtl="0" eaLnBrk="1" latinLnBrk="0" hangingPunct="1">
-              <a:lnSpc>
-                <a:spcPct val="90000"/>
-              </a:lnSpc>
-              <a:spcBef>
-                <a:spcPts val="500"/>
-              </a:spcBef>
-              <a:buFont typeface="Wingdings" panose="05000000000000000000" pitchFamily="2" charset="2"/>
-              <a:buChar char="§"/>
-              <a:defRPr sz="2400" kern="1200">
-                <a:solidFill>
-                  <a:srgbClr val="000000"/>
-                </a:solidFill>
-                <a:latin typeface="+mn-lt"/>
-                <a:ea typeface="+mn-ea"/>
-                <a:cs typeface="+mn-cs"/>
-              </a:defRPr>
-            </a:lvl2pPr>
-            <a:lvl3pPr marL="1143000" indent="-228600" algn="l" defTabSz="914400" rtl="0" eaLnBrk="1" latinLnBrk="0" hangingPunct="1">
-              <a:lnSpc>
-                <a:spcPct val="90000"/>
-              </a:lnSpc>
-              <a:spcBef>
-                <a:spcPts val="500"/>
-              </a:spcBef>
-              <a:buFont typeface="Wingdings" panose="05000000000000000000" pitchFamily="2" charset="2"/>
-              <a:buChar char="§"/>
-              <a:defRPr sz="2000" kern="1200">
-                <a:solidFill>
-                  <a:srgbClr val="000000"/>
-                </a:solidFill>
-                <a:latin typeface="+mn-lt"/>
-                <a:ea typeface="+mn-ea"/>
-                <a:cs typeface="+mn-cs"/>
-              </a:defRPr>
-            </a:lvl3pPr>
-            <a:lvl4pPr marL="1600200" indent="-228600" algn="l" defTabSz="914400" rtl="0" eaLnBrk="1" latinLnBrk="0" hangingPunct="1">
-              <a:lnSpc>
-                <a:spcPct val="90000"/>
-              </a:lnSpc>
-              <a:spcBef>
-                <a:spcPts val="500"/>
-              </a:spcBef>
-              <a:buFont typeface="Wingdings" panose="05000000000000000000" pitchFamily="2" charset="2"/>
-              <a:buChar char="§"/>
-              <a:defRPr sz="1800" kern="1200">
-                <a:solidFill>
-                  <a:srgbClr val="000000"/>
-                </a:solidFill>
-                <a:latin typeface="+mn-lt"/>
-                <a:ea typeface="+mn-ea"/>
-                <a:cs typeface="+mn-cs"/>
-              </a:defRPr>
-            </a:lvl4pPr>
-            <a:lvl5pPr marL="2057400" indent="-228600" algn="l" defTabSz="914400" rtl="0" eaLnBrk="1" latinLnBrk="0" hangingPunct="1">
-              <a:lnSpc>
-                <a:spcPct val="90000"/>
-              </a:lnSpc>
-              <a:spcBef>
-                <a:spcPts val="500"/>
-              </a:spcBef>
-              <a:buFont typeface="Wingdings" panose="05000000000000000000" pitchFamily="2" charset="2"/>
-              <a:buChar char="§"/>
-              <a:defRPr sz="1800" kern="1200">
-                <a:solidFill>
-                  <a:srgbClr val="000000"/>
-                </a:solidFill>
-                <a:latin typeface="+mn-lt"/>
-                <a:ea typeface="+mn-ea"/>
-                <a:cs typeface="+mn-cs"/>
-              </a:defRPr>
-            </a:lvl5pPr>
-            <a:lvl6pPr marL="2514600" indent="-228600" algn="l" defTabSz="914400" rtl="0" eaLnBrk="1" latinLnBrk="0" hangingPunct="1">
-              <a:lnSpc>
-                <a:spcPct val="90000"/>
-              </a:lnSpc>
-              <a:spcBef>
-                <a:spcPts val="500"/>
-              </a:spcBef>
-              <a:buFont typeface="Arial" panose="020B0604020202020204" pitchFamily="34" charset="0"/>
-              <a:buChar char="•"/>
-              <a:defRPr sz="1800" kern="1200">
-                <a:solidFill>
-                  <a:schemeClr val="tx1"/>
-                </a:solidFill>
-                <a:latin typeface="+mn-lt"/>
-                <a:ea typeface="+mn-ea"/>
-                <a:cs typeface="+mn-cs"/>
-              </a:defRPr>
-            </a:lvl6pPr>
-            <a:lvl7pPr marL="2971800" indent="-228600" algn="l" defTabSz="914400" rtl="0" eaLnBrk="1" latinLnBrk="0" hangingPunct="1">
-              <a:lnSpc>
-                <a:spcPct val="90000"/>
-              </a:lnSpc>
-              <a:spcBef>
-                <a:spcPts val="500"/>
-              </a:spcBef>
-              <a:buFont typeface="Arial" panose="020B0604020202020204" pitchFamily="34" charset="0"/>
-              <a:buChar char="•"/>
-              <a:defRPr sz="1800" kern="1200">
-                <a:solidFill>
-                  <a:schemeClr val="tx1"/>
-                </a:solidFill>
-                <a:latin typeface="+mn-lt"/>
-                <a:ea typeface="+mn-ea"/>
-                <a:cs typeface="+mn-cs"/>
-              </a:defRPr>
-            </a:lvl7pPr>
-            <a:lvl8pPr marL="3429000" indent="-228600" algn="l" defTabSz="914400" rtl="0" eaLnBrk="1" latinLnBrk="0" hangingPunct="1">
-              <a:lnSpc>
-                <a:spcPct val="90000"/>
-              </a:lnSpc>
-              <a:spcBef>
-                <a:spcPts val="500"/>
-              </a:spcBef>
-              <a:buFont typeface="Arial" panose="020B0604020202020204" pitchFamily="34" charset="0"/>
-              <a:buChar char="•"/>
-              <a:defRPr sz="1800" kern="1200">
-                <a:solidFill>
-                  <a:schemeClr val="tx1"/>
-                </a:solidFill>
-                <a:latin typeface="+mn-lt"/>
-                <a:ea typeface="+mn-ea"/>
-                <a:cs typeface="+mn-cs"/>
-              </a:defRPr>
-            </a:lvl8pPr>
-            <a:lvl9pPr marL="3886200" indent="-228600" algn="l" defTabSz="914400" rtl="0" eaLnBrk="1" latinLnBrk="0" hangingPunct="1">
-              <a:lnSpc>
-                <a:spcPct val="90000"/>
-              </a:lnSpc>
-              <a:spcBef>
-                <a:spcPts val="500"/>
-              </a:spcBef>
-              <a:buFont typeface="Arial" panose="020B0604020202020204" pitchFamily="34" charset="0"/>
-              <a:buChar char="•"/>
-              <a:defRPr sz="1800" kern="1200">
-                <a:solidFill>
-                  <a:schemeClr val="tx1"/>
-                </a:solidFill>
-                <a:latin typeface="+mn-lt"/>
-                <a:ea typeface="+mn-ea"/>
-                <a:cs typeface="+mn-cs"/>
-              </a:defRPr>
-            </a:lvl9pPr>
-          </a:lstStyle>
-          <a:p>
-            <a:pPr marL="0" indent="0">
-              <a:buNone/>
-            </a:pPr>
-            <a:r>
-              <a:rPr lang="de-DE" sz="1400" b="1" dirty="0"/>
-              <a:t>Rückgaben</a:t>
-            </a:r>
-          </a:p>
-          <a:p>
-            <a:pPr marL="0" indent="0">
-              <a:buNone/>
-            </a:pPr>
-            <a:r>
-              <a:rPr lang="de-DE" sz="1400" dirty="0"/>
-              <a:t>Jeder… </a:t>
-            </a:r>
-          </a:p>
-        </p:txBody>
-      </p:sp>
-      <p:sp>
-        <p:nvSpPr>
-          <p:cNvPr id="11" name="Pfeil: nach rechts 10">
-            <a:extLst>
-              <a:ext uri="{FF2B5EF4-FFF2-40B4-BE49-F238E27FC236}">
-                <a16:creationId xmlns:a16="http://schemas.microsoft.com/office/drawing/2014/main" id="{0632EC11-1F0B-9C1B-9B07-669E03A0DA4A}"/>
-              </a:ext>
-            </a:extLst>
-          </p:cNvPr>
-          <p:cNvSpPr/>
-          <p:nvPr/>
-        </p:nvSpPr>
-        <p:spPr>
-          <a:xfrm>
-            <a:off x="3469411" y="5272897"/>
-            <a:ext cx="644375" cy="503227"/>
-          </a:xfrm>
-          <a:prstGeom prst="rightArrow">
-            <a:avLst/>
-          </a:prstGeom>
-          <a:solidFill>
-            <a:srgbClr val="79B747"/>
-          </a:solidFill>
-          <a:ln>
-            <a:noFill/>
-          </a:ln>
-        </p:spPr>
-        <p:style>
-          <a:lnRef idx="2">
-            <a:schemeClr val="accent1">
-              <a:shade val="15000"/>
-            </a:schemeClr>
-          </a:lnRef>
-          <a:fillRef idx="1">
-            <a:schemeClr val="accent1"/>
-          </a:fillRef>
-          <a:effectRef idx="0">
-            <a:schemeClr val="accent1"/>
-          </a:effectRef>
-          <a:fontRef idx="minor">
-            <a:schemeClr val="lt1"/>
-          </a:fontRef>
-        </p:style>
-        <p:txBody>
-          <a:bodyPr rtlCol="0" anchor="ctr"/>
-          <a:lstStyle/>
-          <a:p>
-            <a:pPr algn="ctr"/>
-            <a:endParaRPr lang="de-DE"/>
-          </a:p>
-        </p:txBody>
-      </p:sp>
-    </p:spTree>
-    <p:extLst>
-      <p:ext uri="{BB962C8B-B14F-4D97-AF65-F5344CB8AC3E}">
-        <p14:creationId xmlns:p14="http://schemas.microsoft.com/office/powerpoint/2010/main" val="124267234"/>
       </p:ext>
     </p:extLst>
   </p:cSld>
@@ -14449,7 +18500,7 @@
         <p:spPr>
           <a:xfrm>
             <a:off x="331640" y="684640"/>
-            <a:ext cx="5168720" cy="246221"/>
+            <a:ext cx="5168720" cy="3785652"/>
           </a:xfrm>
           <a:prstGeom prst="rect">
             <a:avLst/>
@@ -14466,18 +18517,865 @@
           <a:lstStyle/>
           <a:p>
             <a:r>
-              <a:rPr lang="en-US" sz="1000">
-                <a:solidFill>
-                  <a:srgbClr val="000000"/>
-                </a:solidFill>
-              </a:rPr>
-              <a:t>CREATE SEQUENCE seq_bewertung START WITH 1000 INCREMENT BY 1 NOCACHE;</a:t>
+              <a:rPr lang="en-US" sz="1000" dirty="0">
+                <a:solidFill>
+                  <a:srgbClr val="000000"/>
+                </a:solidFill>
+              </a:rPr>
+              <a:t>CREATE SEQUENCE </a:t>
+            </a:r>
+            <a:r>
+              <a:rPr lang="en-US" sz="1000" dirty="0" err="1">
+                <a:solidFill>
+                  <a:srgbClr val="000000"/>
+                </a:solidFill>
+              </a:rPr>
+              <a:t>seq_bewertung</a:t>
+            </a:r>
+            <a:r>
+              <a:rPr lang="en-US" sz="1000" dirty="0">
+                <a:solidFill>
+                  <a:srgbClr val="000000"/>
+                </a:solidFill>
+              </a:rPr>
+              <a:t> START WITH 1000 INCREMENT BY 1 NOCACHE;</a:t>
+            </a:r>
+          </a:p>
+          <a:p>
+            <a:endParaRPr lang="en-US" sz="1000" dirty="0">
+              <a:solidFill>
+                <a:srgbClr val="000000"/>
+              </a:solidFill>
+            </a:endParaRPr>
+          </a:p>
+          <a:p>
+            <a:r>
+              <a:rPr lang="en-US" sz="1000" dirty="0">
+                <a:solidFill>
+                  <a:srgbClr val="000000"/>
+                </a:solidFill>
+              </a:rPr>
+              <a:t>CREATE TABLE </a:t>
+            </a:r>
+            <a:r>
+              <a:rPr lang="en-US" sz="1000" dirty="0" err="1">
+                <a:solidFill>
+                  <a:srgbClr val="000000"/>
+                </a:solidFill>
+              </a:rPr>
+              <a:t>bewertung</a:t>
+            </a:r>
+            <a:r>
+              <a:rPr lang="en-US" sz="1000" dirty="0">
+                <a:solidFill>
+                  <a:srgbClr val="000000"/>
+                </a:solidFill>
+              </a:rPr>
+              <a:t> (</a:t>
+            </a:r>
+          </a:p>
+          <a:p>
+            <a:r>
+              <a:rPr lang="en-US" sz="1000" dirty="0">
+                <a:solidFill>
+                  <a:srgbClr val="000000"/>
+                </a:solidFill>
+              </a:rPr>
+              <a:t>    </a:t>
+            </a:r>
+            <a:r>
+              <a:rPr lang="en-US" sz="1000" dirty="0" err="1">
+                <a:solidFill>
+                  <a:srgbClr val="000000"/>
+                </a:solidFill>
+              </a:rPr>
+              <a:t>bewertung_id</a:t>
+            </a:r>
+            <a:r>
+              <a:rPr lang="en-US" sz="1000" dirty="0">
+                <a:solidFill>
+                  <a:srgbClr val="000000"/>
+                </a:solidFill>
+              </a:rPr>
+              <a:t>            NUMBER          DEFAULT </a:t>
+            </a:r>
+            <a:r>
+              <a:rPr lang="en-US" sz="1000" dirty="0" err="1">
+                <a:solidFill>
+                  <a:srgbClr val="000000"/>
+                </a:solidFill>
+              </a:rPr>
+              <a:t>seq_bewertung.NEXTVAL</a:t>
+            </a:r>
+            <a:r>
+              <a:rPr lang="en-US" sz="1000" dirty="0">
+                <a:solidFill>
+                  <a:srgbClr val="000000"/>
+                </a:solidFill>
+              </a:rPr>
+              <a:t> PRIMARY KEY,</a:t>
+            </a:r>
+          </a:p>
+          <a:p>
+            <a:r>
+              <a:rPr lang="en-US" sz="1000" dirty="0">
+                <a:solidFill>
+                  <a:srgbClr val="000000"/>
+                </a:solidFill>
+              </a:rPr>
+              <a:t>    </a:t>
+            </a:r>
+            <a:r>
+              <a:rPr lang="en-US" sz="1000" dirty="0" err="1">
+                <a:solidFill>
+                  <a:srgbClr val="000000"/>
+                </a:solidFill>
+              </a:rPr>
+              <a:t>ausleihe_id</a:t>
+            </a:r>
+            <a:r>
+              <a:rPr lang="en-US" sz="1000" dirty="0">
+                <a:solidFill>
+                  <a:srgbClr val="000000"/>
+                </a:solidFill>
+              </a:rPr>
+              <a:t>             NUMBER          NOT NULL REFERENCES </a:t>
+            </a:r>
+            <a:r>
+              <a:rPr lang="en-US" sz="1000" dirty="0" err="1">
+                <a:solidFill>
+                  <a:srgbClr val="000000"/>
+                </a:solidFill>
+              </a:rPr>
+              <a:t>ausleihe</a:t>
+            </a:r>
+            <a:r>
+              <a:rPr lang="en-US" sz="1000" dirty="0">
+                <a:solidFill>
+                  <a:srgbClr val="000000"/>
+                </a:solidFill>
+              </a:rPr>
+              <a:t>(</a:t>
+            </a:r>
+            <a:r>
+              <a:rPr lang="en-US" sz="1000" dirty="0" err="1">
+                <a:solidFill>
+                  <a:srgbClr val="000000"/>
+                </a:solidFill>
+              </a:rPr>
+              <a:t>ausleihe_id</a:t>
+            </a:r>
+            <a:r>
+              <a:rPr lang="en-US" sz="1000" dirty="0">
+                <a:solidFill>
+                  <a:srgbClr val="000000"/>
+                </a:solidFill>
+              </a:rPr>
+              <a:t>),</a:t>
+            </a:r>
+          </a:p>
+          <a:p>
+            <a:r>
+              <a:rPr lang="en-US" sz="1000" dirty="0">
+                <a:solidFill>
+                  <a:srgbClr val="000000"/>
+                </a:solidFill>
+              </a:rPr>
+              <a:t>    </a:t>
+            </a:r>
+            <a:r>
+              <a:rPr lang="en-US" sz="1000" dirty="0" err="1">
+                <a:solidFill>
+                  <a:srgbClr val="000000"/>
+                </a:solidFill>
+              </a:rPr>
+              <a:t>bewerter_id</a:t>
+            </a:r>
+            <a:r>
+              <a:rPr lang="en-US" sz="1000" dirty="0">
+                <a:solidFill>
+                  <a:srgbClr val="000000"/>
+                </a:solidFill>
+              </a:rPr>
+              <a:t>             NUMBER          NOT NULL REFERENCES </a:t>
+            </a:r>
+            <a:r>
+              <a:rPr lang="en-US" sz="1000" dirty="0" err="1">
+                <a:solidFill>
+                  <a:srgbClr val="000000"/>
+                </a:solidFill>
+              </a:rPr>
+              <a:t>nutzer</a:t>
+            </a:r>
+            <a:r>
+              <a:rPr lang="en-US" sz="1000" dirty="0">
+                <a:solidFill>
+                  <a:srgbClr val="000000"/>
+                </a:solidFill>
+              </a:rPr>
+              <a:t>(</a:t>
+            </a:r>
+            <a:r>
+              <a:rPr lang="en-US" sz="1000" dirty="0" err="1">
+                <a:solidFill>
+                  <a:srgbClr val="000000"/>
+                </a:solidFill>
+              </a:rPr>
+              <a:t>nutzer_id</a:t>
+            </a:r>
+            <a:r>
+              <a:rPr lang="en-US" sz="1000" dirty="0">
+                <a:solidFill>
+                  <a:srgbClr val="000000"/>
+                </a:solidFill>
+              </a:rPr>
+              <a:t>),</a:t>
+            </a:r>
+          </a:p>
+          <a:p>
+            <a:r>
+              <a:rPr lang="en-US" sz="1000" dirty="0">
+                <a:solidFill>
+                  <a:srgbClr val="000000"/>
+                </a:solidFill>
+              </a:rPr>
+              <a:t>    </a:t>
+            </a:r>
+            <a:r>
+              <a:rPr lang="en-US" sz="1000" dirty="0" err="1">
+                <a:solidFill>
+                  <a:srgbClr val="000000"/>
+                </a:solidFill>
+              </a:rPr>
+              <a:t>bewerteter_nutzer_id</a:t>
+            </a:r>
+            <a:r>
+              <a:rPr lang="en-US" sz="1000" dirty="0">
+                <a:solidFill>
+                  <a:srgbClr val="000000"/>
+                </a:solidFill>
+              </a:rPr>
+              <a:t>    NUMBER          REFERENCES </a:t>
+            </a:r>
+            <a:r>
+              <a:rPr lang="en-US" sz="1000" dirty="0" err="1">
+                <a:solidFill>
+                  <a:srgbClr val="000000"/>
+                </a:solidFill>
+              </a:rPr>
+              <a:t>nutzer</a:t>
+            </a:r>
+            <a:r>
+              <a:rPr lang="en-US" sz="1000" dirty="0">
+                <a:solidFill>
+                  <a:srgbClr val="000000"/>
+                </a:solidFill>
+              </a:rPr>
+              <a:t>(</a:t>
+            </a:r>
+            <a:r>
+              <a:rPr lang="en-US" sz="1000" dirty="0" err="1">
+                <a:solidFill>
+                  <a:srgbClr val="000000"/>
+                </a:solidFill>
+              </a:rPr>
+              <a:t>nutzer_id</a:t>
+            </a:r>
+            <a:r>
+              <a:rPr lang="en-US" sz="1000" dirty="0">
+                <a:solidFill>
+                  <a:srgbClr val="000000"/>
+                </a:solidFill>
+              </a:rPr>
+              <a:t>),   -- nullable: </a:t>
+            </a:r>
+            <a:r>
+              <a:rPr lang="en-US" sz="1000" dirty="0" err="1">
+                <a:solidFill>
+                  <a:srgbClr val="000000"/>
+                </a:solidFill>
+              </a:rPr>
+              <a:t>Nutzerbewertung</a:t>
+            </a:r>
+            <a:endParaRPr lang="en-US" sz="1000" dirty="0">
+              <a:solidFill>
+                <a:srgbClr val="000000"/>
+              </a:solidFill>
+            </a:endParaRPr>
+          </a:p>
+          <a:p>
+            <a:r>
+              <a:rPr lang="en-US" sz="1000" dirty="0">
+                <a:solidFill>
+                  <a:srgbClr val="000000"/>
+                </a:solidFill>
+              </a:rPr>
+              <a:t>    </a:t>
+            </a:r>
+            <a:r>
+              <a:rPr lang="en-US" sz="1000" dirty="0" err="1">
+                <a:solidFill>
+                  <a:srgbClr val="000000"/>
+                </a:solidFill>
+              </a:rPr>
+              <a:t>buch_id</a:t>
+            </a:r>
+            <a:r>
+              <a:rPr lang="en-US" sz="1000" dirty="0">
+                <a:solidFill>
+                  <a:srgbClr val="000000"/>
+                </a:solidFill>
+              </a:rPr>
+              <a:t>                 NUMBER          REFERENCES </a:t>
+            </a:r>
+            <a:r>
+              <a:rPr lang="en-US" sz="1000" dirty="0" err="1">
+                <a:solidFill>
+                  <a:srgbClr val="000000"/>
+                </a:solidFill>
+              </a:rPr>
+              <a:t>buch</a:t>
+            </a:r>
+            <a:r>
+              <a:rPr lang="en-US" sz="1000" dirty="0">
+                <a:solidFill>
+                  <a:srgbClr val="000000"/>
+                </a:solidFill>
+              </a:rPr>
+              <a:t>(</a:t>
+            </a:r>
+            <a:r>
+              <a:rPr lang="en-US" sz="1000" dirty="0" err="1">
+                <a:solidFill>
+                  <a:srgbClr val="000000"/>
+                </a:solidFill>
+              </a:rPr>
+              <a:t>buch_id</a:t>
+            </a:r>
+            <a:r>
+              <a:rPr lang="en-US" sz="1000" dirty="0">
+                <a:solidFill>
+                  <a:srgbClr val="000000"/>
+                </a:solidFill>
+              </a:rPr>
+              <a:t>),       -- nullable: </a:t>
+            </a:r>
+            <a:r>
+              <a:rPr lang="en-US" sz="1000" dirty="0" err="1">
+                <a:solidFill>
+                  <a:srgbClr val="000000"/>
+                </a:solidFill>
+              </a:rPr>
+              <a:t>Buchbewertung</a:t>
+            </a:r>
+            <a:endParaRPr lang="en-US" sz="1000" dirty="0">
+              <a:solidFill>
+                <a:srgbClr val="000000"/>
+              </a:solidFill>
+            </a:endParaRPr>
+          </a:p>
+          <a:p>
+            <a:r>
+              <a:rPr lang="en-US" sz="1000" dirty="0">
+                <a:solidFill>
+                  <a:srgbClr val="000000"/>
+                </a:solidFill>
+              </a:rPr>
+              <a:t>    </a:t>
+            </a:r>
+            <a:r>
+              <a:rPr lang="en-US" sz="1000" dirty="0" err="1">
+                <a:solidFill>
+                  <a:srgbClr val="000000"/>
+                </a:solidFill>
+              </a:rPr>
+              <a:t>sterne</a:t>
+            </a:r>
+            <a:r>
+              <a:rPr lang="en-US" sz="1000" dirty="0">
+                <a:solidFill>
+                  <a:srgbClr val="000000"/>
+                </a:solidFill>
+              </a:rPr>
+              <a:t>                  NUMBER(1)       NOT NULL CHECK (</a:t>
+            </a:r>
+            <a:r>
+              <a:rPr lang="en-US" sz="1000" dirty="0" err="1">
+                <a:solidFill>
+                  <a:srgbClr val="000000"/>
+                </a:solidFill>
+              </a:rPr>
+              <a:t>sterne</a:t>
+            </a:r>
+            <a:r>
+              <a:rPr lang="en-US" sz="1000" dirty="0">
+                <a:solidFill>
+                  <a:srgbClr val="000000"/>
+                </a:solidFill>
+              </a:rPr>
+              <a:t> BETWEEN 1 AND 5),</a:t>
+            </a:r>
+          </a:p>
+          <a:p>
+            <a:r>
+              <a:rPr lang="en-US" sz="1000" dirty="0">
+                <a:solidFill>
+                  <a:srgbClr val="000000"/>
+                </a:solidFill>
+              </a:rPr>
+              <a:t>    </a:t>
+            </a:r>
+            <a:r>
+              <a:rPr lang="en-US" sz="1000" dirty="0" err="1">
+                <a:solidFill>
+                  <a:srgbClr val="000000"/>
+                </a:solidFill>
+              </a:rPr>
+              <a:t>kommentar</a:t>
+            </a:r>
+            <a:r>
+              <a:rPr lang="en-US" sz="1000" dirty="0">
+                <a:solidFill>
+                  <a:srgbClr val="000000"/>
+                </a:solidFill>
+              </a:rPr>
+              <a:t>               VARCHAR2(2000),</a:t>
+            </a:r>
+          </a:p>
+          <a:p>
+            <a:r>
+              <a:rPr lang="en-US" sz="1000" dirty="0">
+                <a:solidFill>
+                  <a:srgbClr val="000000"/>
+                </a:solidFill>
+              </a:rPr>
+              <a:t>    datum                   DATE            DEFAULT SYSDATE NOT NULL,</a:t>
+            </a:r>
+          </a:p>
+          <a:p>
+            <a:r>
+              <a:rPr lang="en-US" sz="1000" dirty="0">
+                <a:solidFill>
+                  <a:srgbClr val="000000"/>
+                </a:solidFill>
+              </a:rPr>
+              <a:t>    -- </a:t>
+            </a:r>
+            <a:r>
+              <a:rPr lang="en-US" sz="1000" dirty="0" err="1">
+                <a:solidFill>
+                  <a:srgbClr val="000000"/>
+                </a:solidFill>
+              </a:rPr>
+              <a:t>Entweder</a:t>
+            </a:r>
+            <a:r>
+              <a:rPr lang="en-US" sz="1000" dirty="0">
+                <a:solidFill>
+                  <a:srgbClr val="000000"/>
+                </a:solidFill>
+              </a:rPr>
+              <a:t> Buch </a:t>
+            </a:r>
+            <a:r>
+              <a:rPr lang="en-US" sz="1000" dirty="0" err="1">
+                <a:solidFill>
+                  <a:srgbClr val="000000"/>
+                </a:solidFill>
+              </a:rPr>
+              <a:t>oder</a:t>
+            </a:r>
+            <a:r>
+              <a:rPr lang="en-US" sz="1000" dirty="0">
+                <a:solidFill>
+                  <a:srgbClr val="000000"/>
+                </a:solidFill>
+              </a:rPr>
+              <a:t> </a:t>
+            </a:r>
+            <a:r>
+              <a:rPr lang="en-US" sz="1000" dirty="0" err="1">
+                <a:solidFill>
+                  <a:srgbClr val="000000"/>
+                </a:solidFill>
+              </a:rPr>
+              <a:t>Nutzer</a:t>
+            </a:r>
+            <a:r>
+              <a:rPr lang="en-US" sz="1000" dirty="0">
+                <a:solidFill>
+                  <a:srgbClr val="000000"/>
+                </a:solidFill>
+              </a:rPr>
+              <a:t> </a:t>
+            </a:r>
+            <a:r>
+              <a:rPr lang="en-US" sz="1000" dirty="0" err="1">
+                <a:solidFill>
+                  <a:srgbClr val="000000"/>
+                </a:solidFill>
+              </a:rPr>
+              <a:t>wird</a:t>
+            </a:r>
+            <a:r>
+              <a:rPr lang="en-US" sz="1000" dirty="0">
+                <a:solidFill>
+                  <a:srgbClr val="000000"/>
+                </a:solidFill>
+              </a:rPr>
+              <a:t> </a:t>
+            </a:r>
+            <a:r>
+              <a:rPr lang="en-US" sz="1000" dirty="0" err="1">
+                <a:solidFill>
+                  <a:srgbClr val="000000"/>
+                </a:solidFill>
+              </a:rPr>
+              <a:t>bewertet</a:t>
+            </a:r>
+            <a:r>
+              <a:rPr lang="en-US" sz="1000" dirty="0">
+                <a:solidFill>
+                  <a:srgbClr val="000000"/>
+                </a:solidFill>
+              </a:rPr>
+              <a:t>, nicht </a:t>
+            </a:r>
+            <a:r>
+              <a:rPr lang="en-US" sz="1000" dirty="0" err="1">
+                <a:solidFill>
+                  <a:srgbClr val="000000"/>
+                </a:solidFill>
+              </a:rPr>
+              <a:t>beides</a:t>
+            </a:r>
+            <a:endParaRPr lang="en-US" sz="1000" dirty="0">
+              <a:solidFill>
+                <a:srgbClr val="000000"/>
+              </a:solidFill>
+            </a:endParaRPr>
+          </a:p>
+          <a:p>
+            <a:r>
+              <a:rPr lang="en-US" sz="1000" dirty="0">
+                <a:solidFill>
+                  <a:srgbClr val="000000"/>
+                </a:solidFill>
+              </a:rPr>
+              <a:t>    CONSTRAINT </a:t>
+            </a:r>
+            <a:r>
+              <a:rPr lang="en-US" sz="1000" dirty="0" err="1">
+                <a:solidFill>
+                  <a:srgbClr val="000000"/>
+                </a:solidFill>
+              </a:rPr>
+              <a:t>chk_bewertung_ziel</a:t>
+            </a:r>
+            <a:r>
+              <a:rPr lang="en-US" sz="1000" dirty="0">
+                <a:solidFill>
+                  <a:srgbClr val="000000"/>
+                </a:solidFill>
+              </a:rPr>
+              <a:t> CHECK (</a:t>
+            </a:r>
+          </a:p>
+          <a:p>
+            <a:r>
+              <a:rPr lang="en-US" sz="1000" dirty="0">
+                <a:solidFill>
+                  <a:srgbClr val="000000"/>
+                </a:solidFill>
+              </a:rPr>
+              <a:t>        (</a:t>
+            </a:r>
+            <a:r>
+              <a:rPr lang="en-US" sz="1000" dirty="0" err="1">
+                <a:solidFill>
+                  <a:srgbClr val="000000"/>
+                </a:solidFill>
+              </a:rPr>
+              <a:t>buch_id</a:t>
+            </a:r>
+            <a:r>
+              <a:rPr lang="en-US" sz="1000" dirty="0">
+                <a:solidFill>
+                  <a:srgbClr val="000000"/>
+                </a:solidFill>
+              </a:rPr>
+              <a:t> IS NOT NULL AND </a:t>
+            </a:r>
+            <a:r>
+              <a:rPr lang="en-US" sz="1000" dirty="0" err="1">
+                <a:solidFill>
+                  <a:srgbClr val="000000"/>
+                </a:solidFill>
+              </a:rPr>
+              <a:t>bewerteter_nutzer_id</a:t>
+            </a:r>
+            <a:r>
+              <a:rPr lang="en-US" sz="1000" dirty="0">
+                <a:solidFill>
+                  <a:srgbClr val="000000"/>
+                </a:solidFill>
+              </a:rPr>
+              <a:t> IS NULL) OR</a:t>
+            </a:r>
+          </a:p>
+          <a:p>
+            <a:r>
+              <a:rPr lang="en-US" sz="1000" dirty="0">
+                <a:solidFill>
+                  <a:srgbClr val="000000"/>
+                </a:solidFill>
+              </a:rPr>
+              <a:t>        (</a:t>
+            </a:r>
+            <a:r>
+              <a:rPr lang="en-US" sz="1000" dirty="0" err="1">
+                <a:solidFill>
+                  <a:srgbClr val="000000"/>
+                </a:solidFill>
+              </a:rPr>
+              <a:t>buch_id</a:t>
+            </a:r>
+            <a:r>
+              <a:rPr lang="en-US" sz="1000" dirty="0">
+                <a:solidFill>
+                  <a:srgbClr val="000000"/>
+                </a:solidFill>
+              </a:rPr>
+              <a:t> IS NULL AND </a:t>
+            </a:r>
+            <a:r>
+              <a:rPr lang="en-US" sz="1000" dirty="0" err="1">
+                <a:solidFill>
+                  <a:srgbClr val="000000"/>
+                </a:solidFill>
+              </a:rPr>
+              <a:t>bewerteter_nutzer_id</a:t>
+            </a:r>
+            <a:r>
+              <a:rPr lang="en-US" sz="1000" dirty="0">
+                <a:solidFill>
+                  <a:srgbClr val="000000"/>
+                </a:solidFill>
+              </a:rPr>
+              <a:t> IS NOT NULL)</a:t>
+            </a:r>
+          </a:p>
+          <a:p>
+            <a:r>
+              <a:rPr lang="en-US" sz="1000" dirty="0">
+                <a:solidFill>
+                  <a:srgbClr val="000000"/>
+                </a:solidFill>
+              </a:rPr>
+              <a:t>    )</a:t>
+            </a:r>
+          </a:p>
+          <a:p>
+            <a:r>
+              <a:rPr lang="en-US" sz="1000" dirty="0">
+                <a:solidFill>
+                  <a:srgbClr val="000000"/>
+                </a:solidFill>
+              </a:rPr>
+              <a:t>);</a:t>
+            </a:r>
+          </a:p>
+          <a:p>
+            <a:endParaRPr lang="en-US" sz="1000" dirty="0">
+              <a:solidFill>
+                <a:srgbClr val="000000"/>
+              </a:solidFill>
+            </a:endParaRPr>
+          </a:p>
+          <a:p>
+            <a:r>
+              <a:rPr lang="de-DE" sz="1000" dirty="0">
+                <a:solidFill>
+                  <a:srgbClr val="000000"/>
+                </a:solidFill>
+              </a:rPr>
+              <a:t>SELECT </a:t>
+            </a:r>
+            <a:r>
+              <a:rPr lang="de-DE" sz="1000" dirty="0" err="1">
+                <a:solidFill>
+                  <a:srgbClr val="000000"/>
+                </a:solidFill>
+              </a:rPr>
+              <a:t>b.titel</a:t>
+            </a:r>
+            <a:r>
+              <a:rPr lang="de-DE" sz="1000" dirty="0">
+                <a:solidFill>
+                  <a:srgbClr val="000000"/>
+                </a:solidFill>
+              </a:rPr>
+              <a:t>, AVG(</a:t>
+            </a:r>
+            <a:r>
+              <a:rPr lang="de-DE" sz="1000" dirty="0" err="1">
+                <a:solidFill>
+                  <a:srgbClr val="000000"/>
+                </a:solidFill>
+              </a:rPr>
+              <a:t>bw.sterne</a:t>
+            </a:r>
+            <a:r>
+              <a:rPr lang="de-DE" sz="1000" dirty="0">
+                <a:solidFill>
+                  <a:srgbClr val="000000"/>
+                </a:solidFill>
+              </a:rPr>
+              <a:t>) AS durchschnitt, COUNT(*) AS </a:t>
+            </a:r>
+            <a:r>
+              <a:rPr lang="de-DE" sz="1000" dirty="0" err="1">
+                <a:solidFill>
+                  <a:srgbClr val="000000"/>
+                </a:solidFill>
+              </a:rPr>
+              <a:t>anzahl_bewertungen</a:t>
             </a:r>
             <a:endParaRPr lang="de-DE" sz="1000" dirty="0">
               <a:solidFill>
                 <a:srgbClr val="000000"/>
               </a:solidFill>
             </a:endParaRPr>
+          </a:p>
+          <a:p>
+            <a:r>
+              <a:rPr lang="de-DE" sz="1000" dirty="0">
+                <a:solidFill>
+                  <a:srgbClr val="000000"/>
+                </a:solidFill>
+              </a:rPr>
+              <a:t>FROM </a:t>
+            </a:r>
+            <a:r>
+              <a:rPr lang="de-DE" sz="1000" dirty="0" err="1">
+                <a:solidFill>
+                  <a:srgbClr val="000000"/>
+                </a:solidFill>
+              </a:rPr>
+              <a:t>bewertung</a:t>
+            </a:r>
+            <a:r>
+              <a:rPr lang="de-DE" sz="1000" dirty="0">
+                <a:solidFill>
+                  <a:srgbClr val="000000"/>
+                </a:solidFill>
+              </a:rPr>
+              <a:t> </a:t>
+            </a:r>
+            <a:r>
+              <a:rPr lang="de-DE" sz="1000" dirty="0" err="1">
+                <a:solidFill>
+                  <a:srgbClr val="000000"/>
+                </a:solidFill>
+              </a:rPr>
+              <a:t>bw</a:t>
+            </a:r>
+            <a:endParaRPr lang="de-DE" sz="1000" dirty="0">
+              <a:solidFill>
+                <a:srgbClr val="000000"/>
+              </a:solidFill>
+            </a:endParaRPr>
+          </a:p>
+          <a:p>
+            <a:r>
+              <a:rPr lang="de-DE" sz="1000" dirty="0">
+                <a:solidFill>
+                  <a:srgbClr val="000000"/>
+                </a:solidFill>
+              </a:rPr>
+              <a:t>JOIN buch b ON </a:t>
+            </a:r>
+            <a:r>
+              <a:rPr lang="de-DE" sz="1000" dirty="0" err="1">
+                <a:solidFill>
+                  <a:srgbClr val="000000"/>
+                </a:solidFill>
+              </a:rPr>
+              <a:t>b.buch_id</a:t>
+            </a:r>
+            <a:r>
+              <a:rPr lang="de-DE" sz="1000" dirty="0">
+                <a:solidFill>
+                  <a:srgbClr val="000000"/>
+                </a:solidFill>
+              </a:rPr>
+              <a:t> = </a:t>
+            </a:r>
+            <a:r>
+              <a:rPr lang="de-DE" sz="1000" dirty="0" err="1">
+                <a:solidFill>
+                  <a:srgbClr val="000000"/>
+                </a:solidFill>
+              </a:rPr>
+              <a:t>bw.buch_id</a:t>
+            </a:r>
+            <a:endParaRPr lang="de-DE" sz="1000" dirty="0">
+              <a:solidFill>
+                <a:srgbClr val="000000"/>
+              </a:solidFill>
+            </a:endParaRPr>
+          </a:p>
+          <a:p>
+            <a:r>
+              <a:rPr lang="de-DE" sz="1000" dirty="0">
+                <a:solidFill>
+                  <a:srgbClr val="000000"/>
+                </a:solidFill>
+              </a:rPr>
+              <a:t>WHERE </a:t>
+            </a:r>
+            <a:r>
+              <a:rPr lang="de-DE" sz="1000" dirty="0" err="1">
+                <a:solidFill>
+                  <a:srgbClr val="000000"/>
+                </a:solidFill>
+              </a:rPr>
+              <a:t>bw.buch_id</a:t>
+            </a:r>
+            <a:r>
+              <a:rPr lang="de-DE" sz="1000" dirty="0">
+                <a:solidFill>
+                  <a:srgbClr val="000000"/>
+                </a:solidFill>
+              </a:rPr>
+              <a:t> = 5</a:t>
+            </a:r>
+          </a:p>
+          <a:p>
+            <a:r>
+              <a:rPr lang="de-DE" sz="1000" dirty="0">
+                <a:solidFill>
+                  <a:srgbClr val="000000"/>
+                </a:solidFill>
+              </a:rPr>
+              <a:t>GROUP BY </a:t>
+            </a:r>
+            <a:r>
+              <a:rPr lang="de-DE" sz="1000" dirty="0" err="1">
+                <a:solidFill>
+                  <a:srgbClr val="000000"/>
+                </a:solidFill>
+              </a:rPr>
+              <a:t>b.titel</a:t>
+            </a:r>
+            <a:r>
+              <a:rPr lang="de-DE" sz="1000" dirty="0">
+                <a:solidFill>
+                  <a:srgbClr val="000000"/>
+                </a:solidFill>
+              </a:rPr>
+              <a:t>;</a:t>
+            </a:r>
           </a:p>
         </p:txBody>
       </p:sp>
@@ -14968,7 +19866,24 @@
             </a:pPr>
             <a:r>
               <a:rPr lang="de-DE" sz="1400" dirty="0"/>
-              <a:t>Jeder… </a:t>
+              <a:t>Eine Bewertung bezieht sich entweder auf ein Buch oder auf einen Nutzer, nie auf beides.</a:t>
+            </a:r>
+          </a:p>
+          <a:p>
+            <a:pPr marL="0" indent="0">
+              <a:buNone/>
+            </a:pPr>
+            <a:r>
+              <a:rPr lang="de-DE" sz="1400" dirty="0"/>
+              <a:t>Die Abfrage zeigt die Durchschnittsbewertung und Anzahl der Bewertungen </a:t>
+            </a:r>
+            <a:r>
+              <a:rPr lang="de-DE" sz="1400"/>
+              <a:t>für das Buch mit der Id 5 </a:t>
+            </a:r>
+            <a:r>
+              <a:rPr lang="de-DE" sz="1400" dirty="0"/>
+              <a:t>„The Cruel Prince“.</a:t>
             </a:r>
           </a:p>
         </p:txBody>
@@ -14987,7 +19902,7 @@
         </p:nvSpPr>
         <p:spPr>
           <a:xfrm>
-            <a:off x="3469411" y="5272897"/>
+            <a:off x="4030783" y="5412532"/>
             <a:ext cx="644375" cy="503227"/>
           </a:xfrm>
           <a:prstGeom prst="rightArrow">
@@ -15025,6 +19940,36 @@
           </a:p>
         </p:txBody>
       </p:sp>
+      <p:pic>
+        <p:nvPicPr>
+          <p:cNvPr id="8" name="Grafik 7">
+            <a:extLst>
+              <a:ext uri="{FF2B5EF4-FFF2-40B4-BE49-F238E27FC236}">
+                <a16:creationId xmlns:a16="http://schemas.microsoft.com/office/drawing/2014/main" id="{E8A97E15-8C0A-684A-2279-3197E8C74ED0}"/>
+              </a:ext>
+            </a:extLst>
+          </p:cNvPr>
+          <p:cNvPicPr>
+            <a:picLocks noChangeAspect="1"/>
+          </p:cNvPicPr>
+          <p:nvPr/>
+        </p:nvPicPr>
+        <p:blipFill>
+          <a:blip r:embed="rId2"/>
+          <a:stretch>
+            <a:fillRect/>
+          </a:stretch>
+        </p:blipFill>
+        <p:spPr>
+          <a:xfrm>
+            <a:off x="4974353" y="3463943"/>
+            <a:ext cx="5785147" cy="2876698"/>
+          </a:xfrm>
+          <a:prstGeom prst="rect">
+            <a:avLst/>
+          </a:prstGeom>
+        </p:spPr>
+      </p:pic>
     </p:spTree>
     <p:extLst>
       <p:ext uri="{BB962C8B-B14F-4D97-AF65-F5344CB8AC3E}">
@@ -15736,7 +20681,7 @@
             </a:pPr>
             <a:r>
               <a:rPr lang="de-DE" sz="1400" dirty="0"/>
-              <a:t>Registrierte Plattformnutzer mit Authentifizierungs- und Statusdaten.</a:t>
+              <a:t>Die Nutzer-Tabelle enthält registrierte Plattformnutzer mit Authentifizierungs- und Statusdaten.</a:t>
             </a:r>
           </a:p>
           <a:p>
@@ -16499,10 +21444,10 @@
       </p:sp>
       <p:pic>
         <p:nvPicPr>
-          <p:cNvPr id="13" name="Grafik 12">
+          <p:cNvPr id="9" name="Grafik 8">
             <a:extLst>
               <a:ext uri="{FF2B5EF4-FFF2-40B4-BE49-F238E27FC236}">
-                <a16:creationId xmlns:a16="http://schemas.microsoft.com/office/drawing/2014/main" id="{D749D02E-1452-D953-393B-E3FF76992C29}"/>
+                <a16:creationId xmlns:a16="http://schemas.microsoft.com/office/drawing/2014/main" id="{A4C41E69-FB36-43F7-42D0-98585E8DFF7E}"/>
               </a:ext>
             </a:extLst>
           </p:cNvPr>
@@ -16519,8 +21464,8 @@
         </p:blipFill>
         <p:spPr>
           <a:xfrm>
-            <a:off x="0" y="4745057"/>
-            <a:ext cx="12192000" cy="2112943"/>
+            <a:off x="0" y="4759842"/>
+            <a:ext cx="12192000" cy="2098157"/>
           </a:xfrm>
           <a:prstGeom prst="rect">
             <a:avLst/>
@@ -18257,36 +23202,6 @@
           </a:p>
         </p:txBody>
       </p:sp>
-      <p:pic>
-        <p:nvPicPr>
-          <p:cNvPr id="10" name="Grafik 9">
-            <a:extLst>
-              <a:ext uri="{FF2B5EF4-FFF2-40B4-BE49-F238E27FC236}">
-                <a16:creationId xmlns:a16="http://schemas.microsoft.com/office/drawing/2014/main" id="{3077D849-5F14-B420-71F2-CE88DDF0D4B5}"/>
-              </a:ext>
-            </a:extLst>
-          </p:cNvPr>
-          <p:cNvPicPr>
-            <a:picLocks noChangeAspect="1"/>
-          </p:cNvPicPr>
-          <p:nvPr/>
-        </p:nvPicPr>
-        <p:blipFill>
-          <a:blip r:embed="rId2"/>
-          <a:stretch>
-            <a:fillRect/>
-          </a:stretch>
-        </p:blipFill>
-        <p:spPr>
-          <a:xfrm>
-            <a:off x="4601793" y="3860646"/>
-            <a:ext cx="7067913" cy="2997354"/>
-          </a:xfrm>
-          <a:prstGeom prst="rect">
-            <a:avLst/>
-          </a:prstGeom>
-        </p:spPr>
-      </p:pic>
       <p:sp>
         <p:nvSpPr>
           <p:cNvPr id="11" name="Pfeil: nach rechts 10">
@@ -18339,6 +23254,36 @@
           </a:p>
         </p:txBody>
       </p:sp>
+      <p:pic>
+        <p:nvPicPr>
+          <p:cNvPr id="9" name="Grafik 8">
+            <a:extLst>
+              <a:ext uri="{FF2B5EF4-FFF2-40B4-BE49-F238E27FC236}">
+                <a16:creationId xmlns:a16="http://schemas.microsoft.com/office/drawing/2014/main" id="{CFC73674-AF61-FFB5-4082-E9082363C10F}"/>
+              </a:ext>
+            </a:extLst>
+          </p:cNvPr>
+          <p:cNvPicPr>
+            <a:picLocks noChangeAspect="1"/>
+          </p:cNvPicPr>
+          <p:nvPr/>
+        </p:nvPicPr>
+        <p:blipFill>
+          <a:blip r:embed="rId2"/>
+          <a:stretch>
+            <a:fillRect/>
+          </a:stretch>
+        </p:blipFill>
+        <p:spPr>
+          <a:xfrm>
+            <a:off x="4282634" y="3472298"/>
+            <a:ext cx="6706066" cy="3385702"/>
+          </a:xfrm>
+          <a:prstGeom prst="rect">
+            <a:avLst/>
+          </a:prstGeom>
+        </p:spPr>
+      </p:pic>
     </p:spTree>
     <p:extLst>
       <p:ext uri="{BB962C8B-B14F-4D97-AF65-F5344CB8AC3E}">
@@ -19088,8 +24033,8 @@
         </p:nvSpPr>
         <p:spPr>
           <a:xfrm>
-            <a:off x="7472038" y="684640"/>
-            <a:ext cx="3172475" cy="3122862"/>
+            <a:off x="7472038" y="684639"/>
+            <a:ext cx="3172475" cy="3893539"/>
           </a:xfrm>
           <a:prstGeom prst="rect">
             <a:avLst/>
@@ -19286,7 +24231,7 @@
             </a:pPr>
             <a:r>
               <a:rPr lang="de-DE" sz="1400" dirty="0"/>
-              <a:t>Definiert die vier Berechtigungsrollen des Systems:</a:t>
+              <a:t>Hinterlegt sind vier Berechtigungsrollen des Systems:</a:t>
             </a:r>
             <a:br>
               <a:rPr lang="de-DE" sz="1400" dirty="0"/>
@@ -19309,7 +24254,7 @@
             </a:br>
             <a:r>
               <a:rPr lang="de-DE" sz="1400" dirty="0"/>
-              <a:t>Nutzer erhalten Rollen über die Tabelle NUTZER_ROLLE.</a:t>
+              <a:t>Nutzer erhalten Rollen über die Zuordnungstabelle NUTZER_ROLLE.</a:t>
             </a:r>
           </a:p>
           <a:p>
@@ -19318,7 +24263,24 @@
             </a:pPr>
             <a:r>
               <a:rPr lang="de-DE" sz="1400" dirty="0"/>
-              <a:t>Die Abfrage zeigt, wie viele Nutzer jede Rolle aktuell tragen.</a:t>
+              <a:t>Die Vergabe von Rechten je Rolle soll zur Anwendungslogik gehören und ist nicht Teil des Datenmodells.</a:t>
+            </a:r>
+          </a:p>
+          <a:p>
+            <a:pPr marL="0" indent="0">
+              <a:buNone/>
+            </a:pPr>
+            <a:r>
+              <a:rPr lang="de-DE" sz="1400" dirty="0"/>
+              <a:t>Die Abfrage zeigt, wie viele Nutzer jede Rolle aktuell tragen: Jeder Benutzer ist „</a:t>
+            </a:r>
+            <a:r>
+              <a:rPr lang="de-DE" sz="1400" dirty="0" err="1"/>
+              <a:t>Leiher</a:t>
+            </a:r>
+            <a:r>
+              <a:rPr lang="de-DE" sz="1400" dirty="0"/>
+              <a:t>“, aber es gibt beispielsweise nur einen (Stammdaten-) Pfleger.</a:t>
             </a:r>
           </a:p>
         </p:txBody>
@@ -20294,7 +25256,7 @@
         <p:spPr>
           <a:xfrm>
             <a:off x="7472038" y="684640"/>
-            <a:ext cx="3172475" cy="2635681"/>
+            <a:ext cx="3172475" cy="3232452"/>
           </a:xfrm>
           <a:prstGeom prst="rect">
             <a:avLst/>
@@ -20491,7 +25453,7 @@
             </a:pPr>
             <a:r>
               <a:rPr lang="de-DE" sz="1400" dirty="0"/>
-              <a:t>Ordnet Nutzern eine oder mehrere Rollen zu und bildet eine n:m-Beziehung zwischen NUTZER und ROLLE ab. </a:t>
+              <a:t>Benutzern werden eine oder mehrere Rollen zugeordnet. Die Kreuztabelle bildet eine n:m-Beziehung zwischen NUTZER und ROLLE ab. </a:t>
             </a:r>
           </a:p>
           <a:p>
@@ -20500,7 +25462,7 @@
             </a:pPr>
             <a:r>
               <a:rPr lang="de-DE" sz="1400" dirty="0"/>
-              <a:t>Ein Nutzer kann gleichzeitig Verleiher und </a:t>
+              <a:t>So kann ein Nutzer gleichzeitig Verleiher und </a:t>
             </a:r>
             <a:r>
               <a:rPr lang="de-DE" sz="1400" dirty="0" err="1"/>
@@ -20508,7 +25470,7 @@
             </a:r>
             <a:r>
               <a:rPr lang="de-DE" sz="1400" dirty="0"/>
-              <a:t> sein, ohne dass die Daten redundant gehalten werden.</a:t>
+              <a:t> sein, ohne dass seine Benutzerdaten redundant gehalten werden.</a:t>
             </a:r>
           </a:p>
           <a:p>
@@ -20517,41 +25479,19 @@
             </a:pPr>
             <a:r>
               <a:rPr lang="de-DE" sz="1400" dirty="0"/>
-              <a:t>Die Abfrage zeigt alle Nutzer mit mehr als einer Rolle. </a:t>
+              <a:t>Die Abfrage zeigt alle Nutzer mit mehr als einer Rolle. Nur „Bruno Krause“ ist </a:t>
+            </a:r>
+            <a:r>
+              <a:rPr lang="de-DE" sz="1400" dirty="0" err="1"/>
+              <a:t>Leiher</a:t>
+            </a:r>
+            <a:r>
+              <a:rPr lang="de-DE" sz="1400" dirty="0"/>
+              <a:t>, Verleiher und Pfleger und hat mehr als 2 Rollen.</a:t>
             </a:r>
           </a:p>
         </p:txBody>
       </p:sp>
-      <p:pic>
-        <p:nvPicPr>
-          <p:cNvPr id="8" name="Grafik 7">
-            <a:extLst>
-              <a:ext uri="{FF2B5EF4-FFF2-40B4-BE49-F238E27FC236}">
-                <a16:creationId xmlns:a16="http://schemas.microsoft.com/office/drawing/2014/main" id="{D35EF01B-199E-DC07-1AEC-3EDF38707F24}"/>
-              </a:ext>
-            </a:extLst>
-          </p:cNvPr>
-          <p:cNvPicPr>
-            <a:picLocks noChangeAspect="1"/>
-          </p:cNvPicPr>
-          <p:nvPr/>
-        </p:nvPicPr>
-        <p:blipFill>
-          <a:blip r:embed="rId2"/>
-          <a:stretch>
-            <a:fillRect/>
-          </a:stretch>
-        </p:blipFill>
-        <p:spPr>
-          <a:xfrm>
-            <a:off x="4437082" y="952196"/>
-            <a:ext cx="2305168" cy="5905804"/>
-          </a:xfrm>
-          <a:prstGeom prst="rect">
-            <a:avLst/>
-          </a:prstGeom>
-        </p:spPr>
-      </p:pic>
       <p:sp>
         <p:nvSpPr>
           <p:cNvPr id="3" name="Pfeil: nach rechts 2">
@@ -20566,7 +25506,7 @@
         </p:nvSpPr>
         <p:spPr>
           <a:xfrm>
-            <a:off x="3247729" y="2066738"/>
+            <a:off x="3311389" y="2066738"/>
             <a:ext cx="644375" cy="503227"/>
           </a:xfrm>
           <a:prstGeom prst="rightArrow">
@@ -20604,6 +25544,36 @@
           </a:p>
         </p:txBody>
       </p:sp>
+      <p:pic>
+        <p:nvPicPr>
+          <p:cNvPr id="11" name="Grafik 10">
+            <a:extLst>
+              <a:ext uri="{FF2B5EF4-FFF2-40B4-BE49-F238E27FC236}">
+                <a16:creationId xmlns:a16="http://schemas.microsoft.com/office/drawing/2014/main" id="{C7AC0BAB-EA90-3A10-EB07-42860A9B9F66}"/>
+              </a:ext>
+            </a:extLst>
+          </p:cNvPr>
+          <p:cNvPicPr>
+            <a:picLocks noChangeAspect="1"/>
+          </p:cNvPicPr>
+          <p:nvPr/>
+        </p:nvPicPr>
+        <p:blipFill>
+          <a:blip r:embed="rId2"/>
+          <a:stretch>
+            <a:fillRect/>
+          </a:stretch>
+        </p:blipFill>
+        <p:spPr>
+          <a:xfrm>
+            <a:off x="4363484" y="1123655"/>
+            <a:ext cx="2362321" cy="5734345"/>
+          </a:xfrm>
+          <a:prstGeom prst="rect">
+            <a:avLst/>
+          </a:prstGeom>
+        </p:spPr>
+      </p:pic>
     </p:spTree>
     <p:extLst>
       <p:ext uri="{BB962C8B-B14F-4D97-AF65-F5344CB8AC3E}">
@@ -20728,7 +25698,7 @@
                   <a:srgbClr val="000000"/>
                 </a:solidFill>
               </a:rPr>
-              <a:t>Fazit, Ende, Aus</a:t>
+              <a:t>Aspekte der Umsetzung</a:t>
             </a:r>
           </a:p>
         </p:txBody>
@@ -20747,6 +25717,303 @@
 </file>
 
 <file path=ppt/slides/slide25.xml><?xml version="1.0" encoding="utf-8"?>
+<p:sld xmlns:a="http://schemas.openxmlformats.org/drawingml/2006/main" xmlns:r="http://schemas.openxmlformats.org/officeDocument/2006/relationships" xmlns:p="http://schemas.openxmlformats.org/presentationml/2006/main">
+  <p:cSld>
+    <p:spTree>
+      <p:nvGrpSpPr>
+        <p:cNvPr id="1" name=""/>
+        <p:cNvGrpSpPr/>
+        <p:nvPr/>
+      </p:nvGrpSpPr>
+      <p:grpSpPr>
+        <a:xfrm>
+          <a:off x="0" y="0"/>
+          <a:ext cx="0" cy="0"/>
+          <a:chOff x="0" y="0"/>
+          <a:chExt cx="0" cy="0"/>
+        </a:xfrm>
+      </p:grpSpPr>
+      <p:sp>
+        <p:nvSpPr>
+          <p:cNvPr id="4" name="Titel 3">
+            <a:extLst>
+              <a:ext uri="{FF2B5EF4-FFF2-40B4-BE49-F238E27FC236}">
+                <a16:creationId xmlns:a16="http://schemas.microsoft.com/office/drawing/2014/main" id="{858F79EF-9F22-D67B-108E-54DF2D353687}"/>
+              </a:ext>
+            </a:extLst>
+          </p:cNvPr>
+          <p:cNvSpPr>
+            <a:spLocks noGrp="1"/>
+          </p:cNvSpPr>
+          <p:nvPr>
+            <p:ph type="title"/>
+          </p:nvPr>
+        </p:nvSpPr>
+        <p:spPr/>
+        <p:txBody>
+          <a:bodyPr>
+            <a:normAutofit/>
+          </a:bodyPr>
+          <a:lstStyle/>
+          <a:p>
+            <a:r>
+              <a:rPr lang="de-DE" sz="2800" dirty="0"/>
+              <a:t>Zusammenfassung</a:t>
+            </a:r>
+          </a:p>
+        </p:txBody>
+      </p:sp>
+      <p:sp>
+        <p:nvSpPr>
+          <p:cNvPr id="5" name="Inhaltsplatzhalter 4">
+            <a:extLst>
+              <a:ext uri="{FF2B5EF4-FFF2-40B4-BE49-F238E27FC236}">
+                <a16:creationId xmlns:a16="http://schemas.microsoft.com/office/drawing/2014/main" id="{F5D1EF22-D68A-D39B-1509-B8252230EEC4}"/>
+              </a:ext>
+            </a:extLst>
+          </p:cNvPr>
+          <p:cNvSpPr>
+            <a:spLocks noGrp="1"/>
+          </p:cNvSpPr>
+          <p:nvPr>
+            <p:ph idx="1"/>
+          </p:nvPr>
+        </p:nvSpPr>
+        <p:spPr/>
+        <p:txBody>
+          <a:bodyPr>
+            <a:noAutofit/>
+          </a:bodyPr>
+          <a:lstStyle/>
+          <a:p>
+            <a:pPr marL="0" indent="0">
+              <a:buNone/>
+            </a:pPr>
+            <a:r>
+              <a:rPr lang="de-DE" sz="1200" b="1" dirty="0"/>
+              <a:t>Datenbankumgebung</a:t>
+            </a:r>
+          </a:p>
+          <a:p>
+            <a:pPr marL="0" indent="0">
+              <a:buNone/>
+            </a:pPr>
+            <a:r>
+              <a:rPr lang="de-DE" sz="1200" dirty="0"/>
+              <a:t>Als DBMS wurde Oracle Database 23ai Free gewählt, betrieben als Container unter </a:t>
+            </a:r>
+            <a:r>
+              <a:rPr lang="de-DE" sz="1200" dirty="0" err="1"/>
+              <a:t>Podman</a:t>
+            </a:r>
+            <a:r>
+              <a:rPr lang="de-DE" sz="1200" dirty="0"/>
+              <a:t>. Die Ausführung und der Test der SQL-Statements erfolgten mit Oracle SQL Developer. Das ER-Diagramm wurde mit </a:t>
+            </a:r>
+            <a:r>
+              <a:rPr lang="de-DE" sz="1200" dirty="0" err="1"/>
+              <a:t>DBeaver</a:t>
+            </a:r>
+            <a:r>
+              <a:rPr lang="de-DE" sz="1200" dirty="0"/>
+              <a:t> erstellt.</a:t>
+            </a:r>
+          </a:p>
+          <a:p>
+            <a:pPr marL="0" indent="0">
+              <a:buNone/>
+            </a:pPr>
+            <a:r>
+              <a:rPr lang="de-DE" sz="1200" b="1" dirty="0"/>
+              <a:t>Datenbankschema</a:t>
+            </a:r>
+          </a:p>
+          <a:p>
+            <a:pPr marL="0" indent="0">
+              <a:buNone/>
+            </a:pPr>
+            <a:r>
+              <a:rPr lang="de-DE" sz="1200" dirty="0"/>
+              <a:t>Das Schema umfasst 16 Tabellen in dritter Normalform. Primärschlüssel werden über </a:t>
+            </a:r>
+            <a:r>
+              <a:rPr lang="de-DE" sz="1200" dirty="0" err="1"/>
+              <a:t>Sequences</a:t>
+            </a:r>
+            <a:r>
+              <a:rPr lang="de-DE" sz="1200" dirty="0"/>
+              <a:t> vergeben. Für relevante Felder wurden Wertebereichsprüfungen als CHECK-Constraints auf Datenbankebene hinterlegt.</a:t>
+            </a:r>
+          </a:p>
+          <a:p>
+            <a:pPr marL="0" indent="0">
+              <a:buNone/>
+            </a:pPr>
+            <a:r>
+              <a:rPr lang="de-DE" sz="1200" b="1" dirty="0"/>
+              <a:t>SQL-Dateien</a:t>
+            </a:r>
+          </a:p>
+          <a:p>
+            <a:pPr marL="0" indent="0">
+              <a:buNone/>
+            </a:pPr>
+            <a:r>
+              <a:rPr lang="de-DE" sz="1200" dirty="0"/>
+              <a:t>Die Installation ist vollständig skriptgestützt. </a:t>
+            </a:r>
+            <a:r>
+              <a:rPr lang="de-DE" sz="1200" dirty="0" err="1">
+                <a:latin typeface="Courier New" panose="02070309020205020404" pitchFamily="49" charset="0"/>
+                <a:cs typeface="Courier New" panose="02070309020205020404" pitchFamily="49" charset="0"/>
+              </a:rPr>
+              <a:t>create_tables.sql</a:t>
+            </a:r>
+            <a:r>
+              <a:rPr lang="de-DE" sz="1200" dirty="0">
+                <a:latin typeface="Courier New" panose="02070309020205020404" pitchFamily="49" charset="0"/>
+                <a:cs typeface="Courier New" panose="02070309020205020404" pitchFamily="49" charset="0"/>
+              </a:rPr>
+              <a:t> </a:t>
+            </a:r>
+            <a:r>
+              <a:rPr lang="de-DE" sz="1200" dirty="0"/>
+              <a:t>legt das Schema reproduzierbar an.</a:t>
+            </a:r>
+          </a:p>
+          <a:p>
+            <a:pPr marL="0" indent="0">
+              <a:buNone/>
+            </a:pPr>
+            <a:r>
+              <a:rPr lang="de-DE" sz="1200" dirty="0"/>
+              <a:t>Bücher und Autoren wurden über die Open Library Search API abgerufen und per Python-Skript aufbereitet. Herkunftsland und Beschreibung der Autoren wurden über </a:t>
+            </a:r>
+            <a:r>
+              <a:rPr lang="de-DE" sz="1200" dirty="0" err="1"/>
+              <a:t>Wikidata</a:t>
+            </a:r>
+            <a:r>
+              <a:rPr lang="de-DE" sz="1200" dirty="0"/>
+              <a:t> ergänzt. Die Rolle-Tabelle enthält als einzige Tabelle weniger als zehn Einträge, da das System vier Rollen vorsehen würde. Das Ergebnis ist in </a:t>
+            </a:r>
+            <a:r>
+              <a:rPr lang="de-DE" sz="1200" dirty="0" err="1">
+                <a:latin typeface="Courier New" panose="02070309020205020404" pitchFamily="49" charset="0"/>
+                <a:cs typeface="Courier New" panose="02070309020205020404" pitchFamily="49" charset="0"/>
+              </a:rPr>
+              <a:t>dummy_data.sql</a:t>
+            </a:r>
+            <a:r>
+              <a:rPr lang="de-DE" sz="1200" dirty="0">
+                <a:latin typeface="Courier New" panose="02070309020205020404" pitchFamily="49" charset="0"/>
+                <a:cs typeface="Courier New" panose="02070309020205020404" pitchFamily="49" charset="0"/>
+              </a:rPr>
+              <a:t> </a:t>
+            </a:r>
+            <a:r>
+              <a:rPr lang="de-DE" sz="1200" dirty="0"/>
+              <a:t>hinterlegt.</a:t>
+            </a:r>
+          </a:p>
+          <a:p>
+            <a:pPr marL="0" indent="0">
+              <a:buNone/>
+            </a:pPr>
+            <a:r>
+              <a:rPr lang="de-DE" sz="1200" dirty="0" err="1">
+                <a:latin typeface="Courier New" panose="02070309020205020404" pitchFamily="49" charset="0"/>
+                <a:cs typeface="Courier New" panose="02070309020205020404" pitchFamily="49" charset="0"/>
+              </a:rPr>
+              <a:t>queries.sql</a:t>
+            </a:r>
+            <a:r>
+              <a:rPr lang="de-DE" sz="1200" dirty="0">
+                <a:latin typeface="Courier New" panose="02070309020205020404" pitchFamily="49" charset="0"/>
+                <a:cs typeface="Courier New" panose="02070309020205020404" pitchFamily="49" charset="0"/>
+              </a:rPr>
+              <a:t> </a:t>
+            </a:r>
+            <a:r>
+              <a:rPr lang="de-DE" sz="1200" dirty="0"/>
+              <a:t>enthält alle Abfragen als eigenständig ausführbare Statements. Jede Abfrage deckt einen Usecase ab, der in einer Anwendung implementiert werden würde. Enthalten sind einfache SELECTs ebenso wie Common Table </a:t>
+            </a:r>
+            <a:r>
+              <a:rPr lang="de-DE" sz="1200" dirty="0" err="1"/>
+              <a:t>Expressions</a:t>
+            </a:r>
+            <a:r>
+              <a:rPr lang="de-DE" sz="1200" dirty="0"/>
+              <a:t> (With-</a:t>
+            </a:r>
+            <a:r>
+              <a:rPr lang="de-DE" sz="1200" dirty="0" err="1"/>
+              <a:t>Clause</a:t>
+            </a:r>
+            <a:r>
+              <a:rPr lang="de-DE" sz="1200" dirty="0"/>
+              <a:t>) und Abfragen mit </a:t>
+            </a:r>
+            <a:r>
+              <a:rPr lang="de-DE" sz="1200" dirty="0" err="1"/>
+              <a:t>Subqueries</a:t>
+            </a:r>
+            <a:r>
+              <a:rPr lang="de-DE" sz="1200" dirty="0"/>
+              <a:t>.</a:t>
+            </a:r>
+          </a:p>
+          <a:p>
+            <a:pPr marL="0" indent="0">
+              <a:buNone/>
+            </a:pPr>
+            <a:r>
+              <a:rPr lang="de-DE" sz="1200" b="1" dirty="0"/>
+              <a:t>Ausblick</a:t>
+            </a:r>
+          </a:p>
+          <a:p>
+            <a:pPr marL="0" indent="0">
+              <a:buNone/>
+            </a:pPr>
+            <a:r>
+              <a:rPr lang="de-DE" sz="1200" dirty="0"/>
+              <a:t>Die Tabellen sind vier fachlichen Bereichen zugeordnet: Katalog, Ausleihprozess, Bewertungen und Benutzer. In einer produktiven Umsetzung könnte man diese Bereiche als eigenständige Dienste mit separater Datenhaltung realisieren. Das Schema enthält Felder für Passwort-Hash und E-Mail-Token. In einer produktiven Umsetzung würde man die Authentifizierung und ggf. die Autorisierung an einen externen Identity-Provider auslagern und diese Felder entfernen. </a:t>
+            </a:r>
+          </a:p>
+          <a:p>
+            <a:pPr marL="0" indent="0">
+              <a:buNone/>
+            </a:pPr>
+            <a:r>
+              <a:rPr lang="de-DE" sz="1200" dirty="0"/>
+              <a:t>Das Modell ließe sich um weitere Funktionen erweitern. Eine Streitfall-Tabelle zur Dokumentation von Konflikten zwischen </a:t>
+            </a:r>
+            <a:r>
+              <a:rPr lang="de-DE" sz="1200" dirty="0" err="1"/>
+              <a:t>Leiher</a:t>
+            </a:r>
+            <a:r>
+              <a:rPr lang="de-DE" sz="1200" dirty="0"/>
+              <a:t> und Verleiher wäre ein naheliegender nächster Schritt. Mit anderen Erweiterungen wie Zahlungsabwicklung , einem Werbesystem oder einem Logistik-Modul wäre ein Schema mit 30 oder mehr Tabellen denkbar.</a:t>
+            </a:r>
+          </a:p>
+        </p:txBody>
+      </p:sp>
+    </p:spTree>
+    <p:extLst>
+      <p:ext uri="{BB962C8B-B14F-4D97-AF65-F5344CB8AC3E}">
+        <p14:creationId xmlns:p14="http://schemas.microsoft.com/office/powerpoint/2010/main" val="1767916875"/>
+      </p:ext>
+    </p:extLst>
+  </p:cSld>
+  <p:clrMapOvr>
+    <a:masterClrMapping/>
+  </p:clrMapOvr>
+</p:sld>
+</file>
+
+<file path=ppt/slides/slide26.xml><?xml version="1.0" encoding="utf-8"?>
 <p:sld xmlns:a="http://schemas.openxmlformats.org/drawingml/2006/main" xmlns:r="http://schemas.openxmlformats.org/officeDocument/2006/relationships" xmlns:p="http://schemas.openxmlformats.org/presentationml/2006/main">
   <p:cSld>
     <p:spTree>
@@ -20786,12 +26053,8 @@
           </p:nvPr>
         </p:nvSpPr>
         <p:spPr>
-          <a:xfrm>
-            <a:off x="0" y="0"/>
-            <a:ext cx="12192000" cy="432000"/>
-          </a:xfrm>
           <a:solidFill>
-            <a:srgbClr val="000000"/>
+            <a:srgbClr val="4DFBFF"/>
           </a:solidFill>
         </p:spPr>
         <p:txBody>
@@ -20801,12 +26064,8 @@
           <a:lstStyle/>
           <a:p>
             <a:r>
-              <a:rPr lang="de-DE" sz="2800" dirty="0">
-                <a:solidFill>
-                  <a:srgbClr val="FFFFFF"/>
-                </a:solidFill>
-              </a:rPr>
-              <a:t>Fazit</a:t>
+              <a:rPr lang="de-DE" sz="2800" dirty="0"/>
+              <a:t>Entwurfsentscheidungen</a:t>
             </a:r>
           </a:p>
         </p:txBody>
@@ -20824,27 +26083,244 @@
             <a:spLocks noGrp="1"/>
           </p:cNvSpPr>
           <p:nvPr>
-            <p:ph idx="1"/>
+            <p:ph sz="half" idx="1"/>
           </p:nvPr>
         </p:nvSpPr>
         <p:spPr>
-          <a:xfrm>
-            <a:off x="0" y="432000"/>
-            <a:ext cx="12192000" cy="6426000"/>
-          </a:xfrm>
           <a:solidFill>
-            <a:srgbClr val="FFFFFF"/>
+            <a:srgbClr val="F1FFFF"/>
           </a:solidFill>
         </p:spPr>
         <p:txBody>
-          <a:bodyPr lIns="180000" tIns="180000"/>
+          <a:bodyPr lIns="180000" tIns="180000">
+            <a:noAutofit/>
+          </a:bodyPr>
           <a:lstStyle/>
           <a:p>
-            <a:r>
-              <a:rPr lang="de-DE" dirty="0" err="1"/>
-              <a:t>Blah-Blah</a:t>
-            </a:r>
-            <a:endParaRPr lang="de-DE" dirty="0"/>
+            <a:pPr marL="0" indent="0">
+              <a:buNone/>
+            </a:pPr>
+            <a:r>
+              <a:rPr lang="de-DE" sz="1400" b="1" dirty="0"/>
+              <a:t>Gründe für die Wahl von Oracle als DBMS</a:t>
+            </a:r>
+          </a:p>
+          <a:p>
+            <a:pPr>
+              <a:buClr>
+                <a:srgbClr val="4DFBFF"/>
+              </a:buClr>
+            </a:pPr>
+            <a:r>
+              <a:rPr lang="de-DE" sz="1400" dirty="0"/>
+              <a:t>Per Docker-Image läuft die Datenbank lokal, ohne Installation.</a:t>
+            </a:r>
+          </a:p>
+          <a:p>
+            <a:pPr>
+              <a:buClr>
+                <a:srgbClr val="4DFBFF"/>
+              </a:buClr>
+            </a:pPr>
+            <a:r>
+              <a:rPr lang="de-DE" sz="1400" dirty="0"/>
+              <a:t>Die Free Release-Version hat denselben Funktionsumfang wie die Enterprise-Edition.</a:t>
+            </a:r>
+          </a:p>
+          <a:p>
+            <a:pPr>
+              <a:buClr>
+                <a:srgbClr val="4DFBFF"/>
+              </a:buClr>
+            </a:pPr>
+            <a:r>
+              <a:rPr lang="de-DE" sz="1400" dirty="0"/>
+              <a:t>Es gibt eine breite Tool-Unterstützung: SQL Developer, </a:t>
+            </a:r>
+            <a:r>
+              <a:rPr lang="de-DE" sz="1400" dirty="0" err="1"/>
+              <a:t>DBeaver</a:t>
+            </a:r>
+            <a:r>
+              <a:rPr lang="de-DE" sz="1400" dirty="0"/>
+              <a:t>, Python (</a:t>
+            </a:r>
+            <a:r>
+              <a:rPr lang="de-DE" sz="1400" dirty="0" err="1"/>
+              <a:t>oracledb</a:t>
+            </a:r>
+            <a:r>
+              <a:rPr lang="de-DE" sz="1400" dirty="0"/>
+              <a:t>).</a:t>
+            </a:r>
+          </a:p>
+          <a:p>
+            <a:pPr>
+              <a:buClr>
+                <a:srgbClr val="4DFBFF"/>
+              </a:buClr>
+            </a:pPr>
+            <a:r>
+              <a:rPr lang="de-DE" sz="1400" dirty="0"/>
+              <a:t>Oracle steht im DB-</a:t>
+            </a:r>
+            <a:r>
+              <a:rPr lang="de-DE" sz="1400" dirty="0" err="1"/>
+              <a:t>Engines</a:t>
+            </a:r>
+            <a:r>
+              <a:rPr lang="de-DE" sz="1400" dirty="0"/>
+              <a:t> Ranking auf Platz 1.</a:t>
+            </a:r>
+          </a:p>
+          <a:p>
+            <a:endParaRPr lang="de-DE" sz="1400" dirty="0"/>
+          </a:p>
+          <a:p>
+            <a:pPr marL="0" indent="0">
+              <a:buNone/>
+            </a:pPr>
+            <a:r>
+              <a:rPr lang="de-DE" sz="1400" b="1" dirty="0"/>
+              <a:t>Trennung von Buch und Exemplar</a:t>
+            </a:r>
+          </a:p>
+          <a:p>
+            <a:pPr>
+              <a:buClr>
+                <a:srgbClr val="4DFBFF"/>
+              </a:buClr>
+            </a:pPr>
+            <a:r>
+              <a:rPr lang="de-DE" sz="1400" dirty="0"/>
+              <a:t>Buchmetadaten (Titel, Autor, Genre) liegen einmalig in BUCH.</a:t>
+            </a:r>
+          </a:p>
+          <a:p>
+            <a:pPr>
+              <a:buClr>
+                <a:srgbClr val="4DFBFF"/>
+              </a:buClr>
+            </a:pPr>
+            <a:r>
+              <a:rPr lang="de-DE" sz="1400" dirty="0"/>
+              <a:t>Physische Exemplare mit Zustand, Besitzer und Abholort liegen in EXEMPLAR.</a:t>
+            </a:r>
+          </a:p>
+          <a:p>
+            <a:pPr>
+              <a:buClr>
+                <a:srgbClr val="4DFBFF"/>
+              </a:buClr>
+            </a:pPr>
+            <a:r>
+              <a:rPr lang="de-DE" sz="1400" dirty="0"/>
+              <a:t>Mehrere Nutzer können dasselbe Buch im Bestand haben, ohne Metadaten zu duplizieren.</a:t>
+            </a:r>
+          </a:p>
+          <a:p>
+            <a:pPr>
+              <a:buClr>
+                <a:srgbClr val="4DFBFF"/>
+              </a:buClr>
+            </a:pPr>
+            <a:r>
+              <a:rPr lang="de-DE" sz="1400" dirty="0"/>
+              <a:t>Die Suche nach verfügbaren Exemplaren eines Titels ist dadurch eindeutig.</a:t>
+            </a:r>
+          </a:p>
+        </p:txBody>
+      </p:sp>
+      <p:sp>
+        <p:nvSpPr>
+          <p:cNvPr id="7" name="Inhaltsplatzhalter 6">
+            <a:extLst>
+              <a:ext uri="{FF2B5EF4-FFF2-40B4-BE49-F238E27FC236}">
+                <a16:creationId xmlns:a16="http://schemas.microsoft.com/office/drawing/2014/main" id="{C1EF9A5F-0D61-A8E6-E178-4A48B985427C}"/>
+              </a:ext>
+            </a:extLst>
+          </p:cNvPr>
+          <p:cNvSpPr>
+            <a:spLocks noGrp="1"/>
+          </p:cNvSpPr>
+          <p:nvPr>
+            <p:ph sz="half" idx="2"/>
+          </p:nvPr>
+        </p:nvSpPr>
+        <p:spPr/>
+        <p:txBody>
+          <a:bodyPr>
+            <a:noAutofit/>
+          </a:bodyPr>
+          <a:lstStyle/>
+          <a:p>
+            <a:pPr marL="0" indent="0">
+              <a:buNone/>
+            </a:pPr>
+            <a:r>
+              <a:rPr lang="de-DE" sz="1400" b="1" dirty="0"/>
+              <a:t>CHECK-Constraints</a:t>
+            </a:r>
+          </a:p>
+          <a:p>
+            <a:pPr marL="0" indent="0">
+              <a:buNone/>
+            </a:pPr>
+            <a:r>
+              <a:rPr lang="de-DE" sz="1400" dirty="0"/>
+              <a:t>Für relevante Felder wurden Wertebereichsprüfungen auf Datenbankebene hinterlegt.</a:t>
+            </a:r>
+          </a:p>
+          <a:p>
+            <a:pPr marL="0" indent="0">
+              <a:buNone/>
+            </a:pPr>
+            <a:r>
+              <a:rPr lang="de-DE" sz="1400" dirty="0"/>
+              <a:t>Eine Erweiterung des Wertebereichs muss sowohl in der Anwendung als auch im Datenbankschema durchgeführt werden. </a:t>
+            </a:r>
+          </a:p>
+          <a:p>
+            <a:pPr marL="0" indent="0">
+              <a:buNone/>
+            </a:pPr>
+            <a:r>
+              <a:rPr lang="de-DE" sz="1400" dirty="0"/>
+              <a:t>Allerdings ist die Datenintegrität auf diese Art sowohl bei Fehlern in der Anwendungslogik als auch bei externen Buchimporten gesichert.</a:t>
+            </a:r>
+          </a:p>
+          <a:p>
+            <a:pPr marL="0" indent="0">
+              <a:buNone/>
+            </a:pPr>
+            <a:endParaRPr lang="de-DE" sz="1400" dirty="0"/>
+          </a:p>
+          <a:p>
+            <a:pPr marL="0" indent="0">
+              <a:buNone/>
+            </a:pPr>
+            <a:r>
+              <a:rPr lang="de-DE" sz="1400" b="1" dirty="0"/>
+              <a:t>Hinweis zur Präsentation</a:t>
+            </a:r>
+          </a:p>
+          <a:p>
+            <a:pPr marL="0" indent="0">
+              <a:buNone/>
+            </a:pPr>
+            <a:r>
+              <a:rPr lang="de-DE" sz="1400" dirty="0"/>
+              <a:t>Die vier Kreuztabellen sind im ERM keine eigenständigen Entitäten.</a:t>
+            </a:r>
+          </a:p>
+          <a:p>
+            <a:pPr marL="0" indent="0">
+              <a:buNone/>
+            </a:pPr>
+            <a:r>
+              <a:rPr lang="de-DE" sz="1400" dirty="0"/>
+              <a:t>Sie erhalten dennoch jeweils eine eigene Folie, da sie eigene DDL-Statements und Abfragen haben.</a:t>
+            </a:r>
           </a:p>
         </p:txBody>
       </p:sp>
@@ -20852,6 +26328,362 @@
     <p:extLst>
       <p:ext uri="{BB962C8B-B14F-4D97-AF65-F5344CB8AC3E}">
         <p14:creationId xmlns:p14="http://schemas.microsoft.com/office/powerpoint/2010/main" val="265841684"/>
+      </p:ext>
+    </p:extLst>
+  </p:cSld>
+  <p:clrMapOvr>
+    <a:masterClrMapping/>
+  </p:clrMapOvr>
+</p:sld>
+</file>
+
+<file path=ppt/slides/slide27.xml><?xml version="1.0" encoding="utf-8"?>
+<p:sld xmlns:a="http://schemas.openxmlformats.org/drawingml/2006/main" xmlns:r="http://schemas.openxmlformats.org/officeDocument/2006/relationships" xmlns:p="http://schemas.openxmlformats.org/presentationml/2006/main">
+  <p:cSld>
+    <p:spTree>
+      <p:nvGrpSpPr>
+        <p:cNvPr id="1" name="">
+          <a:extLst>
+            <a:ext uri="{FF2B5EF4-FFF2-40B4-BE49-F238E27FC236}">
+              <a16:creationId xmlns:a16="http://schemas.microsoft.com/office/drawing/2014/main" id="{E759227A-1D46-062E-7362-63CC20AD0D2A}"/>
+            </a:ext>
+          </a:extLst>
+        </p:cNvPr>
+        <p:cNvGrpSpPr/>
+        <p:nvPr/>
+      </p:nvGrpSpPr>
+      <p:grpSpPr>
+        <a:xfrm>
+          <a:off x="0" y="0"/>
+          <a:ext cx="0" cy="0"/>
+          <a:chOff x="0" y="0"/>
+          <a:chExt cx="0" cy="0"/>
+        </a:xfrm>
+      </p:grpSpPr>
+      <p:sp>
+        <p:nvSpPr>
+          <p:cNvPr id="2" name="Titel 1">
+            <a:extLst>
+              <a:ext uri="{FF2B5EF4-FFF2-40B4-BE49-F238E27FC236}">
+                <a16:creationId xmlns:a16="http://schemas.microsoft.com/office/drawing/2014/main" id="{8D50ECAC-B53E-16F2-693C-31F0D057F178}"/>
+              </a:ext>
+            </a:extLst>
+          </p:cNvPr>
+          <p:cNvSpPr>
+            <a:spLocks noGrp="1"/>
+          </p:cNvSpPr>
+          <p:nvPr>
+            <p:ph type="title"/>
+          </p:nvPr>
+        </p:nvSpPr>
+        <p:spPr>
+          <a:solidFill>
+            <a:srgbClr val="4DFBFF"/>
+          </a:solidFill>
+        </p:spPr>
+        <p:txBody>
+          <a:bodyPr>
+            <a:noAutofit/>
+          </a:bodyPr>
+          <a:lstStyle/>
+          <a:p>
+            <a:r>
+              <a:rPr lang="de-DE" sz="2800" dirty="0"/>
+              <a:t>Literaturverzeichnis</a:t>
+            </a:r>
+          </a:p>
+        </p:txBody>
+      </p:sp>
+      <p:sp>
+        <p:nvSpPr>
+          <p:cNvPr id="4" name="Inhaltsplatzhalter 2">
+            <a:extLst>
+              <a:ext uri="{FF2B5EF4-FFF2-40B4-BE49-F238E27FC236}">
+                <a16:creationId xmlns:a16="http://schemas.microsoft.com/office/drawing/2014/main" id="{DE34395B-6F2D-B663-60E1-B2EE19BF003B}"/>
+              </a:ext>
+            </a:extLst>
+          </p:cNvPr>
+          <p:cNvSpPr txBox="1">
+            <a:spLocks/>
+          </p:cNvSpPr>
+          <p:nvPr/>
+        </p:nvSpPr>
+        <p:spPr>
+          <a:xfrm>
+            <a:off x="838200" y="969925"/>
+            <a:ext cx="10515600" cy="5207038"/>
+          </a:xfrm>
+          <a:prstGeom prst="rect">
+            <a:avLst/>
+          </a:prstGeom>
+          <a:solidFill>
+            <a:srgbClr val="F1FFFF"/>
+          </a:solidFill>
+        </p:spPr>
+        <p:txBody>
+          <a:bodyPr vert="horz" lIns="180000" tIns="180000" rIns="91440" bIns="45720" rtlCol="0">
+            <a:noAutofit/>
+          </a:bodyPr>
+          <a:lstStyle>
+            <a:lvl1pPr marL="228600" indent="-228600" algn="l" defTabSz="914400" rtl="0" eaLnBrk="1" latinLnBrk="0" hangingPunct="1">
+              <a:lnSpc>
+                <a:spcPct val="90000"/>
+              </a:lnSpc>
+              <a:spcBef>
+                <a:spcPts val="1000"/>
+              </a:spcBef>
+              <a:buFont typeface="Wingdings" panose="05000000000000000000" pitchFamily="2" charset="2"/>
+              <a:buChar char="§"/>
+              <a:defRPr sz="2800" kern="1200">
+                <a:solidFill>
+                  <a:srgbClr val="000000"/>
+                </a:solidFill>
+                <a:latin typeface="+mn-lt"/>
+                <a:ea typeface="+mn-ea"/>
+                <a:cs typeface="+mn-cs"/>
+              </a:defRPr>
+            </a:lvl1pPr>
+            <a:lvl2pPr marL="685800" indent="-228600" algn="l" defTabSz="914400" rtl="0" eaLnBrk="1" latinLnBrk="0" hangingPunct="1">
+              <a:lnSpc>
+                <a:spcPct val="90000"/>
+              </a:lnSpc>
+              <a:spcBef>
+                <a:spcPts val="500"/>
+              </a:spcBef>
+              <a:buFont typeface="Wingdings" panose="05000000000000000000" pitchFamily="2" charset="2"/>
+              <a:buChar char="§"/>
+              <a:defRPr sz="2400" kern="1200">
+                <a:solidFill>
+                  <a:srgbClr val="000000"/>
+                </a:solidFill>
+                <a:latin typeface="+mn-lt"/>
+                <a:ea typeface="+mn-ea"/>
+                <a:cs typeface="+mn-cs"/>
+              </a:defRPr>
+            </a:lvl2pPr>
+            <a:lvl3pPr marL="1143000" indent="-228600" algn="l" defTabSz="914400" rtl="0" eaLnBrk="1" latinLnBrk="0" hangingPunct="1">
+              <a:lnSpc>
+                <a:spcPct val="90000"/>
+              </a:lnSpc>
+              <a:spcBef>
+                <a:spcPts val="500"/>
+              </a:spcBef>
+              <a:buFont typeface="Wingdings" panose="05000000000000000000" pitchFamily="2" charset="2"/>
+              <a:buChar char="§"/>
+              <a:defRPr sz="2000" kern="1200">
+                <a:solidFill>
+                  <a:srgbClr val="000000"/>
+                </a:solidFill>
+                <a:latin typeface="+mn-lt"/>
+                <a:ea typeface="+mn-ea"/>
+                <a:cs typeface="+mn-cs"/>
+              </a:defRPr>
+            </a:lvl3pPr>
+            <a:lvl4pPr marL="1600200" indent="-228600" algn="l" defTabSz="914400" rtl="0" eaLnBrk="1" latinLnBrk="0" hangingPunct="1">
+              <a:lnSpc>
+                <a:spcPct val="90000"/>
+              </a:lnSpc>
+              <a:spcBef>
+                <a:spcPts val="500"/>
+              </a:spcBef>
+              <a:buFont typeface="Wingdings" panose="05000000000000000000" pitchFamily="2" charset="2"/>
+              <a:buChar char="§"/>
+              <a:defRPr sz="1800" kern="1200">
+                <a:solidFill>
+                  <a:srgbClr val="000000"/>
+                </a:solidFill>
+                <a:latin typeface="+mn-lt"/>
+                <a:ea typeface="+mn-ea"/>
+                <a:cs typeface="+mn-cs"/>
+              </a:defRPr>
+            </a:lvl4pPr>
+            <a:lvl5pPr marL="2057400" indent="-228600" algn="l" defTabSz="914400" rtl="0" eaLnBrk="1" latinLnBrk="0" hangingPunct="1">
+              <a:lnSpc>
+                <a:spcPct val="90000"/>
+              </a:lnSpc>
+              <a:spcBef>
+                <a:spcPts val="500"/>
+              </a:spcBef>
+              <a:buFont typeface="Wingdings" panose="05000000000000000000" pitchFamily="2" charset="2"/>
+              <a:buChar char="§"/>
+              <a:defRPr sz="1800" kern="1200">
+                <a:solidFill>
+                  <a:srgbClr val="000000"/>
+                </a:solidFill>
+                <a:latin typeface="+mn-lt"/>
+                <a:ea typeface="+mn-ea"/>
+                <a:cs typeface="+mn-cs"/>
+              </a:defRPr>
+            </a:lvl5pPr>
+            <a:lvl6pPr marL="2514600" indent="-228600" algn="l" defTabSz="914400" rtl="0" eaLnBrk="1" latinLnBrk="0" hangingPunct="1">
+              <a:lnSpc>
+                <a:spcPct val="90000"/>
+              </a:lnSpc>
+              <a:spcBef>
+                <a:spcPts val="500"/>
+              </a:spcBef>
+              <a:buFont typeface="Arial" panose="020B0604020202020204" pitchFamily="34" charset="0"/>
+              <a:buChar char="•"/>
+              <a:defRPr sz="1800" kern="1200">
+                <a:solidFill>
+                  <a:schemeClr val="tx1"/>
+                </a:solidFill>
+                <a:latin typeface="+mn-lt"/>
+                <a:ea typeface="+mn-ea"/>
+                <a:cs typeface="+mn-cs"/>
+              </a:defRPr>
+            </a:lvl6pPr>
+            <a:lvl7pPr marL="2971800" indent="-228600" algn="l" defTabSz="914400" rtl="0" eaLnBrk="1" latinLnBrk="0" hangingPunct="1">
+              <a:lnSpc>
+                <a:spcPct val="90000"/>
+              </a:lnSpc>
+              <a:spcBef>
+                <a:spcPts val="500"/>
+              </a:spcBef>
+              <a:buFont typeface="Arial" panose="020B0604020202020204" pitchFamily="34" charset="0"/>
+              <a:buChar char="•"/>
+              <a:defRPr sz="1800" kern="1200">
+                <a:solidFill>
+                  <a:schemeClr val="tx1"/>
+                </a:solidFill>
+                <a:latin typeface="+mn-lt"/>
+                <a:ea typeface="+mn-ea"/>
+                <a:cs typeface="+mn-cs"/>
+              </a:defRPr>
+            </a:lvl7pPr>
+            <a:lvl8pPr marL="3429000" indent="-228600" algn="l" defTabSz="914400" rtl="0" eaLnBrk="1" latinLnBrk="0" hangingPunct="1">
+              <a:lnSpc>
+                <a:spcPct val="90000"/>
+              </a:lnSpc>
+              <a:spcBef>
+                <a:spcPts val="500"/>
+              </a:spcBef>
+              <a:buFont typeface="Arial" panose="020B0604020202020204" pitchFamily="34" charset="0"/>
+              <a:buChar char="•"/>
+              <a:defRPr sz="1800" kern="1200">
+                <a:solidFill>
+                  <a:schemeClr val="tx1"/>
+                </a:solidFill>
+                <a:latin typeface="+mn-lt"/>
+                <a:ea typeface="+mn-ea"/>
+                <a:cs typeface="+mn-cs"/>
+              </a:defRPr>
+            </a:lvl8pPr>
+            <a:lvl9pPr marL="3886200" indent="-228600" algn="l" defTabSz="914400" rtl="0" eaLnBrk="1" latinLnBrk="0" hangingPunct="1">
+              <a:lnSpc>
+                <a:spcPct val="90000"/>
+              </a:lnSpc>
+              <a:spcBef>
+                <a:spcPts val="500"/>
+              </a:spcBef>
+              <a:buFont typeface="Arial" panose="020B0604020202020204" pitchFamily="34" charset="0"/>
+              <a:buChar char="•"/>
+              <a:defRPr sz="1800" kern="1200">
+                <a:solidFill>
+                  <a:schemeClr val="tx1"/>
+                </a:solidFill>
+                <a:latin typeface="+mn-lt"/>
+                <a:ea typeface="+mn-ea"/>
+                <a:cs typeface="+mn-cs"/>
+              </a:defRPr>
+            </a:lvl9pPr>
+          </a:lstStyle>
+          <a:p>
+            <a:pPr marL="0" indent="0">
+              <a:buFont typeface="Wingdings" panose="05000000000000000000" pitchFamily="2" charset="2"/>
+              <a:buNone/>
+            </a:pPr>
+            <a:endParaRPr lang="de-DE" sz="1400" dirty="0"/>
+          </a:p>
+          <a:p>
+            <a:pPr marL="0" indent="0">
+              <a:buNone/>
+            </a:pPr>
+            <a:r>
+              <a:rPr lang="de-DE" sz="1400" dirty="0"/>
+              <a:t>Open Library. (</a:t>
+            </a:r>
+            <a:r>
+              <a:rPr lang="de-DE" sz="1400" dirty="0" err="1"/>
+              <a:t>n.d</a:t>
+            </a:r>
+            <a:r>
+              <a:rPr lang="de-DE" sz="1400" dirty="0"/>
+              <a:t>.). </a:t>
+            </a:r>
+            <a:r>
+              <a:rPr lang="de-DE" sz="1400" i="1" dirty="0"/>
+              <a:t>Open Library.</a:t>
+            </a:r>
+            <a:r>
+              <a:rPr lang="de-DE" sz="1400" dirty="0"/>
+              <a:t> </a:t>
+            </a:r>
+            <a:r>
+              <a:rPr lang="de-DE" sz="1400" dirty="0">
+                <a:hlinkClick r:id="rId2"/>
+              </a:rPr>
+              <a:t>https://openlibrary.org</a:t>
+            </a:r>
+            <a:endParaRPr lang="de-DE" sz="1400" dirty="0"/>
+          </a:p>
+          <a:p>
+            <a:pPr marL="0" indent="0">
+              <a:buNone/>
+            </a:pPr>
+            <a:r>
+              <a:rPr lang="de-DE" sz="1400" dirty="0"/>
+              <a:t>Wikimedia </a:t>
+            </a:r>
+            <a:r>
+              <a:rPr lang="de-DE" sz="1400" dirty="0" err="1"/>
+              <a:t>Foundation</a:t>
+            </a:r>
+            <a:r>
+              <a:rPr lang="de-DE" sz="1400" dirty="0"/>
+              <a:t>. (</a:t>
+            </a:r>
+            <a:r>
+              <a:rPr lang="de-DE" sz="1400" dirty="0" err="1"/>
+              <a:t>n.d</a:t>
+            </a:r>
+            <a:r>
+              <a:rPr lang="de-DE" sz="1400" dirty="0"/>
+              <a:t>.). </a:t>
+            </a:r>
+            <a:r>
+              <a:rPr lang="de-DE" sz="1400" i="1" dirty="0" err="1"/>
+              <a:t>Wikidata</a:t>
+            </a:r>
+            <a:r>
+              <a:rPr lang="de-DE" sz="1400" i="1" dirty="0"/>
+              <a:t>.</a:t>
+            </a:r>
+            <a:r>
+              <a:rPr lang="de-DE" sz="1400" dirty="0"/>
+              <a:t> </a:t>
+            </a:r>
+            <a:r>
+              <a:rPr lang="de-DE" sz="1400" dirty="0">
+                <a:hlinkClick r:id="rId3"/>
+              </a:rPr>
+              <a:t>https://www.wikidata.org</a:t>
+            </a:r>
+            <a:endParaRPr lang="de-DE" sz="1400" dirty="0"/>
+          </a:p>
+          <a:p>
+            <a:pPr marL="0" indent="0">
+              <a:buFont typeface="Wingdings" panose="05000000000000000000" pitchFamily="2" charset="2"/>
+              <a:buNone/>
+            </a:pPr>
+            <a:endParaRPr lang="de-DE" sz="1400" dirty="0"/>
+          </a:p>
+        </p:txBody>
+      </p:sp>
+    </p:spTree>
+    <p:extLst>
+      <p:ext uri="{BB962C8B-B14F-4D97-AF65-F5344CB8AC3E}">
+        <p14:creationId xmlns:p14="http://schemas.microsoft.com/office/powerpoint/2010/main" val="516847833"/>
       </p:ext>
     </p:extLst>
   </p:cSld>
@@ -23484,7 +29316,7 @@
                   <a:srgbClr val="000000"/>
                 </a:solidFill>
               </a:rPr>
-              <a:t>ER-Diagramm, DDL</a:t>
+              <a:t>ER-Diagramm, DDL, SQL-Statements</a:t>
             </a:r>
           </a:p>
         </p:txBody>
@@ -23569,10 +29401,10 @@
       </p:sp>
       <p:grpSp>
         <p:nvGrpSpPr>
-          <p:cNvPr id="11" name="Gruppieren 10">
+          <p:cNvPr id="12" name="Gruppieren 11">
             <a:extLst>
               <a:ext uri="{FF2B5EF4-FFF2-40B4-BE49-F238E27FC236}">
-                <a16:creationId xmlns:a16="http://schemas.microsoft.com/office/drawing/2014/main" id="{B6A9A443-F366-9C2E-D320-298CDEE4DA17}"/>
+                <a16:creationId xmlns:a16="http://schemas.microsoft.com/office/drawing/2014/main" id="{D0B5AA23-026A-7FB3-0D07-490E3D9780D4}"/>
               </a:ext>
             </a:extLst>
           </p:cNvPr>
@@ -23583,8 +29415,8 @@
           <a:xfrm>
             <a:off x="1178327" y="432000"/>
             <a:ext cx="9835346" cy="6368850"/>
-            <a:chOff x="775504" y="1024759"/>
-            <a:chExt cx="8920289" cy="5743310"/>
+            <a:chOff x="1178327" y="432000"/>
+            <a:chExt cx="9835346" cy="6368850"/>
           </a:xfrm>
         </p:grpSpPr>
         <p:pic>
@@ -23616,8 +29448,8 @@
           </p:blipFill>
           <p:spPr bwMode="auto">
             <a:xfrm>
-              <a:off x="838200" y="1106805"/>
-              <a:ext cx="8743315" cy="5558790"/>
+              <a:off x="1247454" y="522982"/>
+              <a:ext cx="9640218" cy="6164233"/>
             </a:xfrm>
             <a:prstGeom prst="rect">
               <a:avLst/>
@@ -23642,15 +29474,15 @@
           </p:nvSpPr>
           <p:spPr>
             <a:xfrm>
-              <a:off x="6883757" y="4698123"/>
-              <a:ext cx="2812036" cy="1584436"/>
+              <a:off x="7913174" y="4505453"/>
+              <a:ext cx="3100499" cy="1757007"/>
             </a:xfrm>
             <a:prstGeom prst="rect">
               <a:avLst/>
             </a:prstGeom>
             <a:solidFill>
               <a:srgbClr val="FFA73A">
-                <a:alpha val="10000"/>
+                <a:alpha val="20000"/>
               </a:srgbClr>
             </a:solidFill>
             <a:ln>
@@ -23696,15 +29528,15 @@
           </p:nvSpPr>
           <p:spPr>
             <a:xfrm>
-              <a:off x="8289775" y="1024759"/>
-              <a:ext cx="1406018" cy="3673364"/>
+              <a:off x="9463424" y="432000"/>
+              <a:ext cx="1550249" cy="4073453"/>
             </a:xfrm>
             <a:prstGeom prst="rect">
               <a:avLst/>
             </a:prstGeom>
             <a:solidFill>
               <a:srgbClr val="FFA73A">
-                <a:alpha val="10000"/>
+                <a:alpha val="20000"/>
               </a:srgbClr>
             </a:solidFill>
             <a:ln>
@@ -23750,15 +29582,15 @@
           </p:nvSpPr>
           <p:spPr>
             <a:xfrm>
-              <a:off x="6883757" y="1024759"/>
-              <a:ext cx="1406018" cy="630620"/>
+              <a:off x="7913174" y="432000"/>
+              <a:ext cx="1550249" cy="699305"/>
             </a:xfrm>
             <a:prstGeom prst="rect">
               <a:avLst/>
             </a:prstGeom>
             <a:solidFill>
               <a:srgbClr val="FFA73A">
-                <a:alpha val="10000"/>
+                <a:alpha val="20000"/>
               </a:srgbClr>
             </a:solidFill>
             <a:ln>
@@ -23804,15 +29636,15 @@
           </p:nvSpPr>
           <p:spPr>
             <a:xfrm>
-              <a:off x="4879427" y="1655379"/>
-              <a:ext cx="3410347" cy="3042744"/>
+              <a:off x="5703237" y="1131305"/>
+              <a:ext cx="3760186" cy="3374148"/>
             </a:xfrm>
             <a:prstGeom prst="rect">
               <a:avLst/>
             </a:prstGeom>
             <a:solidFill>
               <a:srgbClr val="4DFBFF">
-                <a:alpha val="10000"/>
+                <a:alpha val="20000"/>
               </a:srgbClr>
             </a:solidFill>
             <a:ln>
@@ -23858,15 +29690,15 @@
           </p:nvSpPr>
           <p:spPr>
             <a:xfrm>
-              <a:off x="775504" y="4698123"/>
-              <a:ext cx="6108251" cy="2069946"/>
+              <a:off x="1178327" y="4505453"/>
+              <a:ext cx="6734845" cy="2295397"/>
             </a:xfrm>
             <a:prstGeom prst="rect">
               <a:avLst/>
             </a:prstGeom>
             <a:solidFill>
               <a:srgbClr val="BBFFB8">
-                <a:alpha val="10000"/>
+                <a:alpha val="20000"/>
               </a:srgbClr>
             </a:solidFill>
             <a:ln>
@@ -23912,15 +29744,15 @@
           </p:nvSpPr>
           <p:spPr>
             <a:xfrm>
-              <a:off x="2274425" y="4080075"/>
-              <a:ext cx="1232704" cy="618047"/>
+              <a:off x="2831010" y="3820090"/>
+              <a:ext cx="1359157" cy="685362"/>
             </a:xfrm>
             <a:prstGeom prst="rect">
               <a:avLst/>
             </a:prstGeom>
             <a:solidFill>
               <a:srgbClr val="BBFFB8">
-                <a:alpha val="10000"/>
+                <a:alpha val="20000"/>
               </a:srgbClr>
             </a:solidFill>
             <a:ln>
@@ -23966,15 +29798,15 @@
           </p:nvSpPr>
           <p:spPr>
             <a:xfrm>
-              <a:off x="775504" y="3003630"/>
-              <a:ext cx="1498920" cy="1281896"/>
+              <a:off x="1178327" y="2626402"/>
+              <a:ext cx="1652682" cy="1421515"/>
             </a:xfrm>
             <a:prstGeom prst="rect">
               <a:avLst/>
             </a:prstGeom>
             <a:solidFill>
               <a:srgbClr val="FFB5BC">
-                <a:alpha val="10000"/>
+                <a:alpha val="20000"/>
               </a:srgbClr>
             </a:solidFill>
             <a:ln>
@@ -24003,6 +29835,336 @@
             <a:p>
               <a:pPr algn="ctr"/>
               <a:endParaRPr lang="de-DE"/>
+            </a:p>
+          </p:txBody>
+        </p:sp>
+      </p:grpSp>
+      <p:grpSp>
+        <p:nvGrpSpPr>
+          <p:cNvPr id="20" name="Gruppieren 19">
+            <a:extLst>
+              <a:ext uri="{FF2B5EF4-FFF2-40B4-BE49-F238E27FC236}">
+                <a16:creationId xmlns:a16="http://schemas.microsoft.com/office/drawing/2014/main" id="{13039010-3E78-4A6B-9F36-32C972E4EFC1}"/>
+              </a:ext>
+            </a:extLst>
+          </p:cNvPr>
+          <p:cNvGrpSpPr/>
+          <p:nvPr/>
+        </p:nvGrpSpPr>
+        <p:grpSpPr>
+          <a:xfrm>
+            <a:off x="84761" y="554536"/>
+            <a:ext cx="1107926" cy="1421515"/>
+            <a:chOff x="22925" y="642550"/>
+            <a:chExt cx="1550249" cy="1709997"/>
+          </a:xfrm>
+        </p:grpSpPr>
+        <p:sp>
+          <p:nvSpPr>
+            <p:cNvPr id="18" name="Rechteck 17">
+              <a:extLst>
+                <a:ext uri="{FF2B5EF4-FFF2-40B4-BE49-F238E27FC236}">
+                  <a16:creationId xmlns:a16="http://schemas.microsoft.com/office/drawing/2014/main" id="{A34F2C9A-AFB2-34BE-9996-511E29C407B5}"/>
+                </a:ext>
+              </a:extLst>
+            </p:cNvPr>
+            <p:cNvSpPr/>
+            <p:nvPr/>
+          </p:nvSpPr>
+          <p:spPr>
+            <a:xfrm>
+              <a:off x="22925" y="642550"/>
+              <a:ext cx="1550249" cy="1709997"/>
+            </a:xfrm>
+            <a:prstGeom prst="rect">
+              <a:avLst/>
+            </a:prstGeom>
+            <a:solidFill>
+              <a:srgbClr val="FFFFFF"/>
+            </a:solidFill>
+            <a:ln w="9525">
+              <a:solidFill>
+                <a:schemeClr val="accent1">
+                  <a:shade val="15000"/>
+                </a:schemeClr>
+              </a:solidFill>
+            </a:ln>
+          </p:spPr>
+          <p:style>
+            <a:lnRef idx="2">
+              <a:schemeClr val="accent1">
+                <a:shade val="15000"/>
+              </a:schemeClr>
+            </a:lnRef>
+            <a:fillRef idx="1">
+              <a:schemeClr val="accent1"/>
+            </a:fillRef>
+            <a:effectRef idx="0">
+              <a:schemeClr val="accent1"/>
+            </a:effectRef>
+            <a:fontRef idx="minor">
+              <a:schemeClr val="lt1"/>
+            </a:fontRef>
+          </p:style>
+          <p:txBody>
+            <a:bodyPr rtlCol="0" anchor="t" anchorCtr="0"/>
+            <a:lstStyle/>
+            <a:p>
+              <a:pPr algn="ctr"/>
+              <a:r>
+                <a:rPr lang="de-DE" sz="1000" b="1" dirty="0">
+                  <a:solidFill>
+                    <a:schemeClr val="bg2">
+                      <a:lumMod val="10000"/>
+                    </a:schemeClr>
+                  </a:solidFill>
+                </a:rPr>
+                <a:t>Legende</a:t>
+              </a:r>
+            </a:p>
+          </p:txBody>
+        </p:sp>
+        <p:sp>
+          <p:nvSpPr>
+            <p:cNvPr id="14" name="Rechteck 13">
+              <a:extLst>
+                <a:ext uri="{FF2B5EF4-FFF2-40B4-BE49-F238E27FC236}">
+                  <a16:creationId xmlns:a16="http://schemas.microsoft.com/office/drawing/2014/main" id="{C5352DF9-24E3-3E3F-7608-337B290DFDB1}"/>
+                </a:ext>
+              </a:extLst>
+            </p:cNvPr>
+            <p:cNvSpPr/>
+            <p:nvPr/>
+          </p:nvSpPr>
+          <p:spPr>
+            <a:xfrm>
+              <a:off x="78050" y="1289099"/>
+              <a:ext cx="1440000" cy="333633"/>
+            </a:xfrm>
+            <a:prstGeom prst="rect">
+              <a:avLst/>
+            </a:prstGeom>
+            <a:solidFill>
+              <a:srgbClr val="F1FFF1"/>
+            </a:solidFill>
+            <a:ln>
+              <a:noFill/>
+            </a:ln>
+          </p:spPr>
+          <p:style>
+            <a:lnRef idx="2">
+              <a:schemeClr val="accent1">
+                <a:shade val="15000"/>
+              </a:schemeClr>
+            </a:lnRef>
+            <a:fillRef idx="1">
+              <a:schemeClr val="accent1"/>
+            </a:fillRef>
+            <a:effectRef idx="0">
+              <a:schemeClr val="accent1"/>
+            </a:effectRef>
+            <a:fontRef idx="minor">
+              <a:schemeClr val="lt1"/>
+            </a:fontRef>
+          </p:style>
+          <p:txBody>
+            <a:bodyPr rtlCol="0" anchor="ctr"/>
+            <a:lstStyle/>
+            <a:p>
+              <a:pPr algn="ctr"/>
+              <a:r>
+                <a:rPr lang="de-DE" sz="1000" dirty="0">
+                  <a:solidFill>
+                    <a:schemeClr val="bg2">
+                      <a:lumMod val="10000"/>
+                    </a:schemeClr>
+                  </a:solidFill>
+                </a:rPr>
+                <a:t>Ausleihprozess</a:t>
+              </a:r>
+            </a:p>
+          </p:txBody>
+        </p:sp>
+        <p:sp>
+          <p:nvSpPr>
+            <p:cNvPr id="15" name="Rechteck 14">
+              <a:extLst>
+                <a:ext uri="{FF2B5EF4-FFF2-40B4-BE49-F238E27FC236}">
+                  <a16:creationId xmlns:a16="http://schemas.microsoft.com/office/drawing/2014/main" id="{6AB4043B-625F-A54C-FF9D-976036B4EC6C}"/>
+                </a:ext>
+              </a:extLst>
+            </p:cNvPr>
+            <p:cNvSpPr/>
+            <p:nvPr/>
+          </p:nvSpPr>
+          <p:spPr>
+            <a:xfrm>
+              <a:off x="78050" y="1622732"/>
+              <a:ext cx="1440000" cy="333633"/>
+            </a:xfrm>
+            <a:prstGeom prst="rect">
+              <a:avLst/>
+            </a:prstGeom>
+            <a:solidFill>
+              <a:srgbClr val="FFF0F2"/>
+            </a:solidFill>
+            <a:ln>
+              <a:noFill/>
+            </a:ln>
+          </p:spPr>
+          <p:style>
+            <a:lnRef idx="2">
+              <a:schemeClr val="accent1">
+                <a:shade val="15000"/>
+              </a:schemeClr>
+            </a:lnRef>
+            <a:fillRef idx="1">
+              <a:schemeClr val="accent1"/>
+            </a:fillRef>
+            <a:effectRef idx="0">
+              <a:schemeClr val="accent1"/>
+            </a:effectRef>
+            <a:fontRef idx="minor">
+              <a:schemeClr val="lt1"/>
+            </a:fontRef>
+          </p:style>
+          <p:txBody>
+            <a:bodyPr rtlCol="0" anchor="ctr"/>
+            <a:lstStyle/>
+            <a:p>
+              <a:pPr algn="ctr"/>
+              <a:r>
+                <a:rPr lang="de-DE" sz="1000" dirty="0">
+                  <a:solidFill>
+                    <a:schemeClr val="bg2">
+                      <a:lumMod val="10000"/>
+                    </a:schemeClr>
+                  </a:solidFill>
+                </a:rPr>
+                <a:t>Bewertungen</a:t>
+              </a:r>
+            </a:p>
+          </p:txBody>
+        </p:sp>
+        <p:sp>
+          <p:nvSpPr>
+            <p:cNvPr id="16" name="Rechteck 15">
+              <a:extLst>
+                <a:ext uri="{FF2B5EF4-FFF2-40B4-BE49-F238E27FC236}">
+                  <a16:creationId xmlns:a16="http://schemas.microsoft.com/office/drawing/2014/main" id="{3810F888-A29D-2F87-5F28-9987F0342ABB}"/>
+                </a:ext>
+              </a:extLst>
+            </p:cNvPr>
+            <p:cNvSpPr/>
+            <p:nvPr/>
+          </p:nvSpPr>
+          <p:spPr>
+            <a:xfrm>
+              <a:off x="78050" y="1956365"/>
+              <a:ext cx="1440000" cy="333633"/>
+            </a:xfrm>
+            <a:prstGeom prst="rect">
+              <a:avLst/>
+            </a:prstGeom>
+            <a:solidFill>
+              <a:srgbClr val="FFEDD8"/>
+            </a:solidFill>
+            <a:ln>
+              <a:noFill/>
+            </a:ln>
+          </p:spPr>
+          <p:style>
+            <a:lnRef idx="2">
+              <a:schemeClr val="accent1">
+                <a:shade val="15000"/>
+              </a:schemeClr>
+            </a:lnRef>
+            <a:fillRef idx="1">
+              <a:schemeClr val="accent1"/>
+            </a:fillRef>
+            <a:effectRef idx="0">
+              <a:schemeClr val="accent1"/>
+            </a:effectRef>
+            <a:fontRef idx="minor">
+              <a:schemeClr val="lt1"/>
+            </a:fontRef>
+          </p:style>
+          <p:txBody>
+            <a:bodyPr rtlCol="0" anchor="ctr"/>
+            <a:lstStyle/>
+            <a:p>
+              <a:pPr algn="ctr"/>
+              <a:r>
+                <a:rPr lang="de-DE" sz="1000" dirty="0">
+                  <a:solidFill>
+                    <a:schemeClr val="bg2">
+                      <a:lumMod val="10000"/>
+                    </a:schemeClr>
+                  </a:solidFill>
+                </a:rPr>
+                <a:t>Benutzer</a:t>
+              </a:r>
+            </a:p>
+          </p:txBody>
+        </p:sp>
+        <p:sp>
+          <p:nvSpPr>
+            <p:cNvPr id="17" name="Rechteck 16">
+              <a:extLst>
+                <a:ext uri="{FF2B5EF4-FFF2-40B4-BE49-F238E27FC236}">
+                  <a16:creationId xmlns:a16="http://schemas.microsoft.com/office/drawing/2014/main" id="{BDC4CE7D-8D18-E04F-0E62-925AB8C18175}"/>
+                </a:ext>
+              </a:extLst>
+            </p:cNvPr>
+            <p:cNvSpPr/>
+            <p:nvPr/>
+          </p:nvSpPr>
+          <p:spPr>
+            <a:xfrm>
+              <a:off x="78050" y="955466"/>
+              <a:ext cx="1440000" cy="333633"/>
+            </a:xfrm>
+            <a:prstGeom prst="rect">
+              <a:avLst/>
+            </a:prstGeom>
+            <a:solidFill>
+              <a:srgbClr val="DBFEFF"/>
+            </a:solidFill>
+            <a:ln>
+              <a:noFill/>
+            </a:ln>
+          </p:spPr>
+          <p:style>
+            <a:lnRef idx="2">
+              <a:schemeClr val="accent1">
+                <a:shade val="15000"/>
+              </a:schemeClr>
+            </a:lnRef>
+            <a:fillRef idx="1">
+              <a:schemeClr val="accent1"/>
+            </a:fillRef>
+            <a:effectRef idx="0">
+              <a:schemeClr val="accent1"/>
+            </a:effectRef>
+            <a:fontRef idx="minor">
+              <a:schemeClr val="lt1"/>
+            </a:fontRef>
+          </p:style>
+          <p:txBody>
+            <a:bodyPr rtlCol="0" anchor="ctr"/>
+            <a:lstStyle/>
+            <a:p>
+              <a:pPr algn="ctr"/>
+              <a:r>
+                <a:rPr lang="de-DE" sz="1000" dirty="0">
+                  <a:solidFill>
+                    <a:schemeClr val="bg2">
+                      <a:lumMod val="10000"/>
+                    </a:schemeClr>
+                  </a:solidFill>
+                </a:rPr>
+                <a:t>Katalog</a:t>
+              </a:r>
             </a:p>
           </p:txBody>
         </p:sp>
@@ -25524,16 +31686,7 @@
             </a:pPr>
             <a:r>
               <a:rPr lang="de-DE" sz="1400" dirty="0"/>
-              <a:t>Autor und Genre sind hingegen keine Attribute des Buches, sondern werden in eigenen Tabellen geführt.</a:t>
-            </a:r>
-          </a:p>
-          <a:p>
-            <a:pPr marL="0" indent="0">
-              <a:buNone/>
-            </a:pPr>
-            <a:r>
-              <a:rPr lang="de-DE" sz="1400" dirty="0"/>
-              <a:t>Über Autor oder Genre kann ein Nutzer nach Büchern suchen.</a:t>
+              <a:t>Autor und Genre sind keine Attribute des Buches, sondern werden in eigenen Tabellen geführt. Über diese Felder kann ein Nutzer aber nach Büchern suchen.</a:t>
             </a:r>
           </a:p>
           <a:p>
@@ -25629,6 +31782,57 @@
           </a:prstGeom>
         </p:spPr>
       </p:pic>
+      <p:sp>
+        <p:nvSpPr>
+          <p:cNvPr id="3" name="Textfeld 2">
+            <a:extLst>
+              <a:ext uri="{FF2B5EF4-FFF2-40B4-BE49-F238E27FC236}">
+                <a16:creationId xmlns:a16="http://schemas.microsoft.com/office/drawing/2014/main" id="{BF73A49F-8263-E003-F9F6-D10757C4A0C2}"/>
+              </a:ext>
+            </a:extLst>
+          </p:cNvPr>
+          <p:cNvSpPr txBox="1"/>
+          <p:nvPr/>
+        </p:nvSpPr>
+        <p:spPr>
+          <a:xfrm>
+            <a:off x="5970849" y="4751955"/>
+            <a:ext cx="2551670" cy="523220"/>
+          </a:xfrm>
+          <a:prstGeom prst="rect">
+            <a:avLst/>
+          </a:prstGeom>
+          <a:noFill/>
+        </p:spPr>
+        <p:txBody>
+          <a:bodyPr wrap="square" rtlCol="0">
+            <a:spAutoFit/>
+          </a:bodyPr>
+          <a:lstStyle/>
+          <a:p>
+            <a:pPr algn="ctr"/>
+            <a:r>
+              <a:rPr lang="de-DE" sz="1400" b="1" dirty="0">
+                <a:solidFill>
+                  <a:srgbClr val="4DFBFF"/>
+                </a:solidFill>
+              </a:rPr>
+              <a:t>Teilmenge,</a:t>
+            </a:r>
+          </a:p>
+          <a:p>
+            <a:pPr algn="ctr"/>
+            <a:r>
+              <a:rPr lang="de-DE" sz="1400" b="1" dirty="0">
+                <a:solidFill>
+                  <a:srgbClr val="4DFBFF"/>
+                </a:solidFill>
+              </a:rPr>
+              <a:t>insgesamt 300 Datensätze</a:t>
+            </a:r>
+          </a:p>
+        </p:txBody>
+      </p:sp>
     </p:spTree>
     <p:extLst>
       <p:ext uri="{BB962C8B-B14F-4D97-AF65-F5344CB8AC3E}">
@@ -26864,6 +33068,57 @@
           </a:prstGeom>
         </p:spPr>
       </p:pic>
+      <p:sp>
+        <p:nvSpPr>
+          <p:cNvPr id="3" name="Textfeld 2">
+            <a:extLst>
+              <a:ext uri="{FF2B5EF4-FFF2-40B4-BE49-F238E27FC236}">
+                <a16:creationId xmlns:a16="http://schemas.microsoft.com/office/drawing/2014/main" id="{32504EF0-9FE7-DF1B-EDA8-0F0B4F436BBD}"/>
+              </a:ext>
+            </a:extLst>
+          </p:cNvPr>
+          <p:cNvSpPr txBox="1"/>
+          <p:nvPr/>
+        </p:nvSpPr>
+        <p:spPr>
+          <a:xfrm>
+            <a:off x="3808332" y="4126922"/>
+            <a:ext cx="2551670" cy="523220"/>
+          </a:xfrm>
+          <a:prstGeom prst="rect">
+            <a:avLst/>
+          </a:prstGeom>
+          <a:noFill/>
+        </p:spPr>
+        <p:txBody>
+          <a:bodyPr wrap="square" rtlCol="0">
+            <a:spAutoFit/>
+          </a:bodyPr>
+          <a:lstStyle/>
+          <a:p>
+            <a:pPr algn="ctr"/>
+            <a:r>
+              <a:rPr lang="de-DE" sz="1400" b="1" dirty="0">
+                <a:solidFill>
+                  <a:srgbClr val="4DFBFF"/>
+                </a:solidFill>
+              </a:rPr>
+              <a:t>Teilmenge,</a:t>
+            </a:r>
+          </a:p>
+          <a:p>
+            <a:pPr algn="ctr"/>
+            <a:r>
+              <a:rPr lang="de-DE" sz="1400" b="1" dirty="0">
+                <a:solidFill>
+                  <a:srgbClr val="4DFBFF"/>
+                </a:solidFill>
+              </a:rPr>
+              <a:t>insgesamt 27 Datensätze</a:t>
+            </a:r>
+          </a:p>
+        </p:txBody>
+      </p:sp>
     </p:spTree>
     <p:extLst>
       <p:ext uri="{BB962C8B-B14F-4D97-AF65-F5344CB8AC3E}">
